--- a/public/fun/pack/pptx/review/보장점검양식_43_가족점검_설날세배.pptx
+++ b/public/fun/pack/pptx/review/보장점검양식_43_가족점검_설날세배.pptx
@@ -3286,14 +3286,6 @@
 <file path=ppt/slides/slide1.xml><?xml version="1.0" encoding="utf-8"?>
 <p:sld xmlns:a="http://schemas.openxmlformats.org/drawingml/2006/main" xmlns:p="http://schemas.openxmlformats.org/presentationml/2006/main" xmlns:r="http://schemas.openxmlformats.org/officeDocument/2006/relationships">
   <p:cSld>
-    <p:bg>
-      <p:bgPr>
-        <a:solidFill>
-          <a:srgbClr val="FFFFFF"/>
-        </a:solidFill>
-        <a:effectLst/>
-      </p:bgPr>
-    </p:bg>
     <p:spTree>
       <p:nvGrpSpPr>
         <p:cNvPr id="1" name=""/>
@@ -3301,325 +3293,30 @@
         <p:nvPr/>
       </p:nvGrpSpPr>
       <p:grpSpPr/>
-      <p:sp>
-        <p:nvSpPr>
-          <p:cNvPr id="3" name="장식"/>
-          <p:cNvSpPr/>
+      <p:pic>
+        <p:nvPicPr>
+          <p:cNvPr id="3" name="표지 그림" descr="review-43.jpg"/>
+          <p:cNvPicPr>
+            <a:picLocks noChangeAspect="1"/>
+          </p:cNvPicPr>
           <p:nvPr/>
-        </p:nvSpPr>
-        <p:spPr>
-          <a:xfrm>
-            <a:off x="-274320" y="4251960"/>
-            <a:ext cx="12740335" cy="2743200"/>
-          </a:xfrm>
-          <a:prstGeom prst="wave">
-            <a:avLst/>
-          </a:prstGeom>
-          <a:solidFill>
-            <a:srgbClr val="F0D1D6"/>
-          </a:solidFill>
-          <a:ln>
-            <a:noFill/>
-          </a:ln>
-        </p:spPr>
-        <p:txBody>
-          <a:bodyPr rtlCol="0" anchor="ctr"/>
-          <a:lstStyle/>
-          <a:p>
-            <a:pPr algn="ctr"/>
-          </a:p>
-        </p:txBody>
-      </p:sp>
-      <p:sp>
-        <p:nvSpPr>
-          <p:cNvPr id="4" name="장식"/>
-          <p:cNvSpPr/>
-          <p:nvPr/>
-        </p:nvSpPr>
-        <p:spPr>
-          <a:xfrm>
-            <a:off x="-274320" y="5074920"/>
-            <a:ext cx="12740335" cy="2331720"/>
-          </a:xfrm>
-          <a:prstGeom prst="wave">
-            <a:avLst/>
-          </a:prstGeom>
-          <a:solidFill>
-            <a:srgbClr val="8D3443"/>
-          </a:solidFill>
-          <a:ln>
-            <a:noFill/>
-          </a:ln>
-        </p:spPr>
-        <p:txBody>
-          <a:bodyPr rtlCol="0" anchor="ctr"/>
-          <a:lstStyle/>
-          <a:p>
-            <a:pPr algn="ctr"/>
-          </a:p>
-        </p:txBody>
-      </p:sp>
-      <p:sp>
-        <p:nvSpPr>
-          <p:cNvPr id="5" name="장식"/>
-          <p:cNvSpPr/>
-          <p:nvPr/>
-        </p:nvSpPr>
-        <p:spPr>
-          <a:xfrm>
-            <a:off x="8543294" y="1234440"/>
-            <a:ext cx="822959" cy="1371600"/>
-          </a:xfrm>
-          <a:prstGeom prst="roundRect">
-            <a:avLst/>
-          </a:prstGeom>
-          <a:solidFill>
-            <a:srgbClr val="8D3443"/>
-          </a:solidFill>
-          <a:ln>
-            <a:noFill/>
-          </a:ln>
-        </p:spPr>
-        <p:txBody>
-          <a:bodyPr rtlCol="0" anchor="ctr"/>
-          <a:lstStyle/>
-          <a:p>
-            <a:pPr algn="ctr"/>
-          </a:p>
-        </p:txBody>
-      </p:sp>
-      <p:sp>
-        <p:nvSpPr>
-          <p:cNvPr id="6" name="장식"/>
-          <p:cNvSpPr/>
-          <p:nvPr/>
-        </p:nvSpPr>
-        <p:spPr>
-          <a:xfrm>
-            <a:off x="8749034" y="1097280"/>
-            <a:ext cx="411479" cy="137160"/>
+        </p:nvPicPr>
+        <p:blipFill>
+          <a:blip r:embed="rId2"/>
+          <a:stretch>
+            <a:fillRect/>
+          </a:stretch>
+        </p:blipFill>
+        <p:spPr>
+          <a:xfrm>
+            <a:off x="0" y="0"/>
+            <a:ext cx="12191695" cy="6858000"/>
           </a:xfrm>
           <a:prstGeom prst="rect">
             <a:avLst/>
           </a:prstGeom>
-          <a:solidFill>
-            <a:srgbClr val="3B9158"/>
-          </a:solidFill>
-          <a:ln>
-            <a:noFill/>
-          </a:ln>
-        </p:spPr>
-        <p:txBody>
-          <a:bodyPr rtlCol="0" anchor="ctr"/>
-          <a:lstStyle/>
-          <a:p>
-            <a:pPr algn="ctr"/>
-          </a:p>
-        </p:txBody>
-      </p:sp>
-      <p:sp>
-        <p:nvSpPr>
-          <p:cNvPr id="7" name="장식"/>
-          <p:cNvSpPr/>
-          <p:nvPr/>
-        </p:nvSpPr>
-        <p:spPr>
-          <a:xfrm>
-            <a:off x="8749034" y="2606040"/>
-            <a:ext cx="411479" cy="137160"/>
-          </a:xfrm>
-          <a:prstGeom prst="rect">
-            <a:avLst/>
-          </a:prstGeom>
-          <a:solidFill>
-            <a:srgbClr val="3B9158"/>
-          </a:solidFill>
-          <a:ln>
-            <a:noFill/>
-          </a:ln>
-        </p:spPr>
-        <p:txBody>
-          <a:bodyPr rtlCol="0" anchor="ctr"/>
-          <a:lstStyle/>
-          <a:p>
-            <a:pPr algn="ctr"/>
-          </a:p>
-        </p:txBody>
-      </p:sp>
-      <p:sp>
-        <p:nvSpPr>
-          <p:cNvPr id="8" name="장식"/>
-          <p:cNvSpPr/>
-          <p:nvPr/>
-        </p:nvSpPr>
-        <p:spPr>
-          <a:xfrm>
-            <a:off x="9585710" y="1728216"/>
-            <a:ext cx="822959" cy="1152144"/>
-          </a:xfrm>
-          <a:prstGeom prst="roundRect">
-            <a:avLst/>
-          </a:prstGeom>
-          <a:solidFill>
-            <a:srgbClr val="F0D1D6"/>
-          </a:solidFill>
-          <a:ln>
-            <a:noFill/>
-          </a:ln>
-        </p:spPr>
-        <p:txBody>
-          <a:bodyPr rtlCol="0" anchor="ctr"/>
-          <a:lstStyle/>
-          <a:p>
-            <a:pPr algn="ctr"/>
-          </a:p>
-        </p:txBody>
-      </p:sp>
-      <p:sp>
-        <p:nvSpPr>
-          <p:cNvPr id="9" name="장식"/>
-          <p:cNvSpPr/>
-          <p:nvPr/>
-        </p:nvSpPr>
-        <p:spPr>
-          <a:xfrm>
-            <a:off x="9791450" y="1591056"/>
-            <a:ext cx="411479" cy="137160"/>
-          </a:xfrm>
-          <a:prstGeom prst="rect">
-            <a:avLst/>
-          </a:prstGeom>
-          <a:solidFill>
-            <a:srgbClr val="3B9158"/>
-          </a:solidFill>
-          <a:ln>
-            <a:noFill/>
-          </a:ln>
-        </p:spPr>
-        <p:txBody>
-          <a:bodyPr rtlCol="0" anchor="ctr"/>
-          <a:lstStyle/>
-          <a:p>
-            <a:pPr algn="ctr"/>
-          </a:p>
-        </p:txBody>
-      </p:sp>
-      <p:sp>
-        <p:nvSpPr>
-          <p:cNvPr id="10" name="장식"/>
-          <p:cNvSpPr/>
-          <p:nvPr/>
-        </p:nvSpPr>
-        <p:spPr>
-          <a:xfrm>
-            <a:off x="9791450" y="2880360"/>
-            <a:ext cx="411479" cy="137160"/>
-          </a:xfrm>
-          <a:prstGeom prst="rect">
-            <a:avLst/>
-          </a:prstGeom>
-          <a:solidFill>
-            <a:srgbClr val="3B9158"/>
-          </a:solidFill>
-          <a:ln>
-            <a:noFill/>
-          </a:ln>
-        </p:spPr>
-        <p:txBody>
-          <a:bodyPr rtlCol="0" anchor="ctr"/>
-          <a:lstStyle/>
-          <a:p>
-            <a:pPr algn="ctr"/>
-          </a:p>
-        </p:txBody>
-      </p:sp>
-      <p:sp>
-        <p:nvSpPr>
-          <p:cNvPr id="11" name="장식"/>
-          <p:cNvSpPr/>
-          <p:nvPr/>
-        </p:nvSpPr>
-        <p:spPr>
-          <a:xfrm>
-            <a:off x="10628126" y="1234440"/>
-            <a:ext cx="822959" cy="1371600"/>
-          </a:xfrm>
-          <a:prstGeom prst="roundRect">
-            <a:avLst/>
-          </a:prstGeom>
-          <a:solidFill>
-            <a:srgbClr val="3B9158"/>
-          </a:solidFill>
-          <a:ln>
-            <a:noFill/>
-          </a:ln>
-        </p:spPr>
-        <p:txBody>
-          <a:bodyPr rtlCol="0" anchor="ctr"/>
-          <a:lstStyle/>
-          <a:p>
-            <a:pPr algn="ctr"/>
-          </a:p>
-        </p:txBody>
-      </p:sp>
-      <p:sp>
-        <p:nvSpPr>
-          <p:cNvPr id="12" name="장식"/>
-          <p:cNvSpPr/>
-          <p:nvPr/>
-        </p:nvSpPr>
-        <p:spPr>
-          <a:xfrm>
-            <a:off x="10833866" y="1097280"/>
-            <a:ext cx="411479" cy="137160"/>
-          </a:xfrm>
-          <a:prstGeom prst="rect">
-            <a:avLst/>
-          </a:prstGeom>
-          <a:solidFill>
-            <a:srgbClr val="8D3443"/>
-          </a:solidFill>
-          <a:ln>
-            <a:noFill/>
-          </a:ln>
-        </p:spPr>
-        <p:txBody>
-          <a:bodyPr rtlCol="0" anchor="ctr"/>
-          <a:lstStyle/>
-          <a:p>
-            <a:pPr algn="ctr"/>
-          </a:p>
-        </p:txBody>
-      </p:sp>
-      <p:sp>
-        <p:nvSpPr>
-          <p:cNvPr id="13" name="장식"/>
-          <p:cNvSpPr/>
-          <p:nvPr/>
-        </p:nvSpPr>
-        <p:spPr>
-          <a:xfrm>
-            <a:off x="10833866" y="2606040"/>
-            <a:ext cx="411479" cy="137160"/>
-          </a:xfrm>
-          <a:prstGeom prst="rect">
-            <a:avLst/>
-          </a:prstGeom>
-          <a:solidFill>
-            <a:srgbClr val="8D3443"/>
-          </a:solidFill>
-          <a:ln>
-            <a:noFill/>
-          </a:ln>
-        </p:spPr>
-        <p:txBody>
-          <a:bodyPr rtlCol="0" anchor="ctr"/>
-          <a:lstStyle/>
-          <a:p>
-            <a:pPr algn="ctr"/>
-          </a:p>
-        </p:txBody>
-      </p:sp>
+        </p:spPr>
+      </p:pic>
       <p:sp>
         <p:nvSpPr>
           <p:cNvPr id="2" name="Title 1"/>
@@ -3632,8 +3329,8 @@
         </p:nvSpPr>
         <p:spPr>
           <a:xfrm>
-            <a:off x="975335" y="1371600"/>
-            <a:ext cx="7558851" cy="1463040"/>
+            <a:off x="853418" y="2057400"/>
+            <a:ext cx="6095847" cy="1554480"/>
           </a:xfrm>
         </p:spPr>
         <p:txBody>
@@ -3660,14 +3357,14 @@
       </p:sp>
       <p:sp>
         <p:nvSpPr>
-          <p:cNvPr id="14" name="한 줄 문구"/>
+          <p:cNvPr id="4" name="한 줄 문구"/>
           <p:cNvSpPr txBox="1"/>
           <p:nvPr/>
         </p:nvSpPr>
         <p:spPr>
           <a:xfrm>
-            <a:off x="975335" y="2926080"/>
-            <a:ext cx="7315017" cy="822960"/>
+            <a:off x="853418" y="3749039"/>
+            <a:ext cx="6095847" cy="822960"/>
           </a:xfrm>
           <a:prstGeom prst="rect">
             <a:avLst/>
@@ -3691,21 +3388,21 @@
                   <a:srgbClr val="431920"/>
                 </a:solidFill>
               </a:rPr>
-              <a:t>세배하는 마음으로 부모님 보험부터</a:t>
+              <a:t>겨울방학에 한 번 정리합니다</a:t>
             </a:r>
           </a:p>
         </p:txBody>
       </p:sp>
       <p:sp>
         <p:nvSpPr>
-          <p:cNvPr id="15" name="안내 문구"/>
+          <p:cNvPr id="5" name="안내 문구"/>
           <p:cNvSpPr txBox="1"/>
           <p:nvPr/>
         </p:nvSpPr>
         <p:spPr>
           <a:xfrm>
-            <a:off x="975335" y="3794760"/>
-            <a:ext cx="7315017" cy="914400"/>
+            <a:off x="853418" y="4617720"/>
+            <a:ext cx="6095847" cy="914400"/>
           </a:xfrm>
           <a:prstGeom prst="rect">
             <a:avLst/>
@@ -3729,7 +3426,7 @@
                   <a:srgbClr val="666666"/>
                 </a:solidFill>
               </a:rPr>
-              <a:t>가족 점검 · 2026. 00. 00</a:t>
+              <a:t>가족 점검 · 2027. 00. 00</a:t>
             </a:r>
           </a:p>
           <a:p>
@@ -3835,267 +3532,6 @@
       </p:sp>
       <p:sp>
         <p:nvSpPr>
-          <p:cNvPr id="5" name="장식"/>
-          <p:cNvSpPr/>
-          <p:nvPr/>
-        </p:nvSpPr>
-        <p:spPr>
-          <a:xfrm>
-            <a:off x="10789920" y="525780"/>
-            <a:ext cx="301752" cy="502920"/>
-          </a:xfrm>
-          <a:prstGeom prst="roundRect">
-            <a:avLst/>
-          </a:prstGeom>
-          <a:solidFill>
-            <a:srgbClr val="8D3443"/>
-          </a:solidFill>
-          <a:ln>
-            <a:noFill/>
-          </a:ln>
-        </p:spPr>
-        <p:txBody>
-          <a:bodyPr rtlCol="0" anchor="ctr"/>
-          <a:lstStyle/>
-          <a:p>
-            <a:pPr algn="ctr"/>
-          </a:p>
-        </p:txBody>
-      </p:sp>
-      <p:sp>
-        <p:nvSpPr>
-          <p:cNvPr id="6" name="장식"/>
-          <p:cNvSpPr/>
-          <p:nvPr/>
-        </p:nvSpPr>
-        <p:spPr>
-          <a:xfrm>
-            <a:off x="10865358" y="475487"/>
-            <a:ext cx="150876" cy="50292"/>
-          </a:xfrm>
-          <a:prstGeom prst="rect">
-            <a:avLst/>
-          </a:prstGeom>
-          <a:solidFill>
-            <a:srgbClr val="3B9158"/>
-          </a:solidFill>
-          <a:ln>
-            <a:noFill/>
-          </a:ln>
-        </p:spPr>
-        <p:txBody>
-          <a:bodyPr rtlCol="0" anchor="ctr"/>
-          <a:lstStyle/>
-          <a:p>
-            <a:pPr algn="ctr"/>
-          </a:p>
-        </p:txBody>
-      </p:sp>
-      <p:sp>
-        <p:nvSpPr>
-          <p:cNvPr id="7" name="장식"/>
-          <p:cNvSpPr/>
-          <p:nvPr/>
-        </p:nvSpPr>
-        <p:spPr>
-          <a:xfrm>
-            <a:off x="10865358" y="1028700"/>
-            <a:ext cx="150876" cy="50292"/>
-          </a:xfrm>
-          <a:prstGeom prst="rect">
-            <a:avLst/>
-          </a:prstGeom>
-          <a:solidFill>
-            <a:srgbClr val="3B9158"/>
-          </a:solidFill>
-          <a:ln>
-            <a:noFill/>
-          </a:ln>
-        </p:spPr>
-        <p:txBody>
-          <a:bodyPr rtlCol="0" anchor="ctr"/>
-          <a:lstStyle/>
-          <a:p>
-            <a:pPr algn="ctr"/>
-          </a:p>
-        </p:txBody>
-      </p:sp>
-      <p:sp>
-        <p:nvSpPr>
-          <p:cNvPr id="8" name="장식"/>
-          <p:cNvSpPr/>
-          <p:nvPr/>
-        </p:nvSpPr>
-        <p:spPr>
-          <a:xfrm>
-            <a:off x="11172139" y="706831"/>
-            <a:ext cx="301752" cy="422452"/>
-          </a:xfrm>
-          <a:prstGeom prst="roundRect">
-            <a:avLst/>
-          </a:prstGeom>
-          <a:solidFill>
-            <a:srgbClr val="F0D1D6"/>
-          </a:solidFill>
-          <a:ln>
-            <a:noFill/>
-          </a:ln>
-        </p:spPr>
-        <p:txBody>
-          <a:bodyPr rtlCol="0" anchor="ctr"/>
-          <a:lstStyle/>
-          <a:p>
-            <a:pPr algn="ctr"/>
-          </a:p>
-        </p:txBody>
-      </p:sp>
-      <p:sp>
-        <p:nvSpPr>
-          <p:cNvPr id="9" name="장식"/>
-          <p:cNvSpPr/>
-          <p:nvPr/>
-        </p:nvSpPr>
-        <p:spPr>
-          <a:xfrm>
-            <a:off x="11247577" y="656539"/>
-            <a:ext cx="150876" cy="50292"/>
-          </a:xfrm>
-          <a:prstGeom prst="rect">
-            <a:avLst/>
-          </a:prstGeom>
-          <a:solidFill>
-            <a:srgbClr val="3B9158"/>
-          </a:solidFill>
-          <a:ln>
-            <a:noFill/>
-          </a:ln>
-        </p:spPr>
-        <p:txBody>
-          <a:bodyPr rtlCol="0" anchor="ctr"/>
-          <a:lstStyle/>
-          <a:p>
-            <a:pPr algn="ctr"/>
-          </a:p>
-        </p:txBody>
-      </p:sp>
-      <p:sp>
-        <p:nvSpPr>
-          <p:cNvPr id="10" name="장식"/>
-          <p:cNvSpPr/>
-          <p:nvPr/>
-        </p:nvSpPr>
-        <p:spPr>
-          <a:xfrm>
-            <a:off x="11247577" y="1129284"/>
-            <a:ext cx="150876" cy="50292"/>
-          </a:xfrm>
-          <a:prstGeom prst="rect">
-            <a:avLst/>
-          </a:prstGeom>
-          <a:solidFill>
-            <a:srgbClr val="3B9158"/>
-          </a:solidFill>
-          <a:ln>
-            <a:noFill/>
-          </a:ln>
-        </p:spPr>
-        <p:txBody>
-          <a:bodyPr rtlCol="0" anchor="ctr"/>
-          <a:lstStyle/>
-          <a:p>
-            <a:pPr algn="ctr"/>
-          </a:p>
-        </p:txBody>
-      </p:sp>
-      <p:sp>
-        <p:nvSpPr>
-          <p:cNvPr id="11" name="장식"/>
-          <p:cNvSpPr/>
-          <p:nvPr/>
-        </p:nvSpPr>
-        <p:spPr>
-          <a:xfrm>
-            <a:off x="11554358" y="525780"/>
-            <a:ext cx="301752" cy="502920"/>
-          </a:xfrm>
-          <a:prstGeom prst="roundRect">
-            <a:avLst/>
-          </a:prstGeom>
-          <a:solidFill>
-            <a:srgbClr val="3B9158"/>
-          </a:solidFill>
-          <a:ln>
-            <a:noFill/>
-          </a:ln>
-        </p:spPr>
-        <p:txBody>
-          <a:bodyPr rtlCol="0" anchor="ctr"/>
-          <a:lstStyle/>
-          <a:p>
-            <a:pPr algn="ctr"/>
-          </a:p>
-        </p:txBody>
-      </p:sp>
-      <p:sp>
-        <p:nvSpPr>
-          <p:cNvPr id="12" name="장식"/>
-          <p:cNvSpPr/>
-          <p:nvPr/>
-        </p:nvSpPr>
-        <p:spPr>
-          <a:xfrm>
-            <a:off x="11629796" y="475487"/>
-            <a:ext cx="150876" cy="50292"/>
-          </a:xfrm>
-          <a:prstGeom prst="rect">
-            <a:avLst/>
-          </a:prstGeom>
-          <a:solidFill>
-            <a:srgbClr val="8D3443"/>
-          </a:solidFill>
-          <a:ln>
-            <a:noFill/>
-          </a:ln>
-        </p:spPr>
-        <p:txBody>
-          <a:bodyPr rtlCol="0" anchor="ctr"/>
-          <a:lstStyle/>
-          <a:p>
-            <a:pPr algn="ctr"/>
-          </a:p>
-        </p:txBody>
-      </p:sp>
-      <p:sp>
-        <p:nvSpPr>
-          <p:cNvPr id="13" name="장식"/>
-          <p:cNvSpPr/>
-          <p:nvPr/>
-        </p:nvSpPr>
-        <p:spPr>
-          <a:xfrm>
-            <a:off x="11629796" y="1028700"/>
-            <a:ext cx="150876" cy="50292"/>
-          </a:xfrm>
-          <a:prstGeom prst="rect">
-            <a:avLst/>
-          </a:prstGeom>
-          <a:solidFill>
-            <a:srgbClr val="8D3443"/>
-          </a:solidFill>
-          <a:ln>
-            <a:noFill/>
-          </a:ln>
-        </p:spPr>
-        <p:txBody>
-          <a:bodyPr rtlCol="0" anchor="ctr"/>
-          <a:lstStyle/>
-          <a:p>
-            <a:pPr algn="ctr"/>
-          </a:p>
-        </p:txBody>
-      </p:sp>
-      <p:sp>
-        <p:nvSpPr>
           <p:cNvPr id="2" name="Title 1"/>
           <p:cNvSpPr>
             <a:spLocks noGrp="1"/>
@@ -4134,7 +3570,7 @@
       </p:sp>
       <p:graphicFrame>
         <p:nvGraphicFramePr>
-          <p:cNvPr id="14" name="표"/>
+          <p:cNvPr id="5" name="표"/>
           <p:cNvGraphicFramePr>
             <a:graphicFrameLocks noGrp="1"/>
           </p:cNvGraphicFramePr>
@@ -5176,267 +4612,6 @@
       </p:sp>
       <p:sp>
         <p:nvSpPr>
-          <p:cNvPr id="5" name="장식"/>
-          <p:cNvSpPr/>
-          <p:nvPr/>
-        </p:nvSpPr>
-        <p:spPr>
-          <a:xfrm>
-            <a:off x="10789920" y="525780"/>
-            <a:ext cx="301752" cy="502920"/>
-          </a:xfrm>
-          <a:prstGeom prst="roundRect">
-            <a:avLst/>
-          </a:prstGeom>
-          <a:solidFill>
-            <a:srgbClr val="8D3443"/>
-          </a:solidFill>
-          <a:ln>
-            <a:noFill/>
-          </a:ln>
-        </p:spPr>
-        <p:txBody>
-          <a:bodyPr rtlCol="0" anchor="ctr"/>
-          <a:lstStyle/>
-          <a:p>
-            <a:pPr algn="ctr"/>
-          </a:p>
-        </p:txBody>
-      </p:sp>
-      <p:sp>
-        <p:nvSpPr>
-          <p:cNvPr id="6" name="장식"/>
-          <p:cNvSpPr/>
-          <p:nvPr/>
-        </p:nvSpPr>
-        <p:spPr>
-          <a:xfrm>
-            <a:off x="10865358" y="475487"/>
-            <a:ext cx="150876" cy="50292"/>
-          </a:xfrm>
-          <a:prstGeom prst="rect">
-            <a:avLst/>
-          </a:prstGeom>
-          <a:solidFill>
-            <a:srgbClr val="3B9158"/>
-          </a:solidFill>
-          <a:ln>
-            <a:noFill/>
-          </a:ln>
-        </p:spPr>
-        <p:txBody>
-          <a:bodyPr rtlCol="0" anchor="ctr"/>
-          <a:lstStyle/>
-          <a:p>
-            <a:pPr algn="ctr"/>
-          </a:p>
-        </p:txBody>
-      </p:sp>
-      <p:sp>
-        <p:nvSpPr>
-          <p:cNvPr id="7" name="장식"/>
-          <p:cNvSpPr/>
-          <p:nvPr/>
-        </p:nvSpPr>
-        <p:spPr>
-          <a:xfrm>
-            <a:off x="10865358" y="1028700"/>
-            <a:ext cx="150876" cy="50292"/>
-          </a:xfrm>
-          <a:prstGeom prst="rect">
-            <a:avLst/>
-          </a:prstGeom>
-          <a:solidFill>
-            <a:srgbClr val="3B9158"/>
-          </a:solidFill>
-          <a:ln>
-            <a:noFill/>
-          </a:ln>
-        </p:spPr>
-        <p:txBody>
-          <a:bodyPr rtlCol="0" anchor="ctr"/>
-          <a:lstStyle/>
-          <a:p>
-            <a:pPr algn="ctr"/>
-          </a:p>
-        </p:txBody>
-      </p:sp>
-      <p:sp>
-        <p:nvSpPr>
-          <p:cNvPr id="8" name="장식"/>
-          <p:cNvSpPr/>
-          <p:nvPr/>
-        </p:nvSpPr>
-        <p:spPr>
-          <a:xfrm>
-            <a:off x="11172139" y="706831"/>
-            <a:ext cx="301752" cy="422452"/>
-          </a:xfrm>
-          <a:prstGeom prst="roundRect">
-            <a:avLst/>
-          </a:prstGeom>
-          <a:solidFill>
-            <a:srgbClr val="F0D1D6"/>
-          </a:solidFill>
-          <a:ln>
-            <a:noFill/>
-          </a:ln>
-        </p:spPr>
-        <p:txBody>
-          <a:bodyPr rtlCol="0" anchor="ctr"/>
-          <a:lstStyle/>
-          <a:p>
-            <a:pPr algn="ctr"/>
-          </a:p>
-        </p:txBody>
-      </p:sp>
-      <p:sp>
-        <p:nvSpPr>
-          <p:cNvPr id="9" name="장식"/>
-          <p:cNvSpPr/>
-          <p:nvPr/>
-        </p:nvSpPr>
-        <p:spPr>
-          <a:xfrm>
-            <a:off x="11247577" y="656539"/>
-            <a:ext cx="150876" cy="50292"/>
-          </a:xfrm>
-          <a:prstGeom prst="rect">
-            <a:avLst/>
-          </a:prstGeom>
-          <a:solidFill>
-            <a:srgbClr val="3B9158"/>
-          </a:solidFill>
-          <a:ln>
-            <a:noFill/>
-          </a:ln>
-        </p:spPr>
-        <p:txBody>
-          <a:bodyPr rtlCol="0" anchor="ctr"/>
-          <a:lstStyle/>
-          <a:p>
-            <a:pPr algn="ctr"/>
-          </a:p>
-        </p:txBody>
-      </p:sp>
-      <p:sp>
-        <p:nvSpPr>
-          <p:cNvPr id="10" name="장식"/>
-          <p:cNvSpPr/>
-          <p:nvPr/>
-        </p:nvSpPr>
-        <p:spPr>
-          <a:xfrm>
-            <a:off x="11247577" y="1129284"/>
-            <a:ext cx="150876" cy="50292"/>
-          </a:xfrm>
-          <a:prstGeom prst="rect">
-            <a:avLst/>
-          </a:prstGeom>
-          <a:solidFill>
-            <a:srgbClr val="3B9158"/>
-          </a:solidFill>
-          <a:ln>
-            <a:noFill/>
-          </a:ln>
-        </p:spPr>
-        <p:txBody>
-          <a:bodyPr rtlCol="0" anchor="ctr"/>
-          <a:lstStyle/>
-          <a:p>
-            <a:pPr algn="ctr"/>
-          </a:p>
-        </p:txBody>
-      </p:sp>
-      <p:sp>
-        <p:nvSpPr>
-          <p:cNvPr id="11" name="장식"/>
-          <p:cNvSpPr/>
-          <p:nvPr/>
-        </p:nvSpPr>
-        <p:spPr>
-          <a:xfrm>
-            <a:off x="11554358" y="525780"/>
-            <a:ext cx="301752" cy="502920"/>
-          </a:xfrm>
-          <a:prstGeom prst="roundRect">
-            <a:avLst/>
-          </a:prstGeom>
-          <a:solidFill>
-            <a:srgbClr val="3B9158"/>
-          </a:solidFill>
-          <a:ln>
-            <a:noFill/>
-          </a:ln>
-        </p:spPr>
-        <p:txBody>
-          <a:bodyPr rtlCol="0" anchor="ctr"/>
-          <a:lstStyle/>
-          <a:p>
-            <a:pPr algn="ctr"/>
-          </a:p>
-        </p:txBody>
-      </p:sp>
-      <p:sp>
-        <p:nvSpPr>
-          <p:cNvPr id="12" name="장식"/>
-          <p:cNvSpPr/>
-          <p:nvPr/>
-        </p:nvSpPr>
-        <p:spPr>
-          <a:xfrm>
-            <a:off x="11629796" y="475487"/>
-            <a:ext cx="150876" cy="50292"/>
-          </a:xfrm>
-          <a:prstGeom prst="rect">
-            <a:avLst/>
-          </a:prstGeom>
-          <a:solidFill>
-            <a:srgbClr val="8D3443"/>
-          </a:solidFill>
-          <a:ln>
-            <a:noFill/>
-          </a:ln>
-        </p:spPr>
-        <p:txBody>
-          <a:bodyPr rtlCol="0" anchor="ctr"/>
-          <a:lstStyle/>
-          <a:p>
-            <a:pPr algn="ctr"/>
-          </a:p>
-        </p:txBody>
-      </p:sp>
-      <p:sp>
-        <p:nvSpPr>
-          <p:cNvPr id="13" name="장식"/>
-          <p:cNvSpPr/>
-          <p:nvPr/>
-        </p:nvSpPr>
-        <p:spPr>
-          <a:xfrm>
-            <a:off x="11629796" y="1028700"/>
-            <a:ext cx="150876" cy="50292"/>
-          </a:xfrm>
-          <a:prstGeom prst="rect">
-            <a:avLst/>
-          </a:prstGeom>
-          <a:solidFill>
-            <a:srgbClr val="8D3443"/>
-          </a:solidFill>
-          <a:ln>
-            <a:noFill/>
-          </a:ln>
-        </p:spPr>
-        <p:txBody>
-          <a:bodyPr rtlCol="0" anchor="ctr"/>
-          <a:lstStyle/>
-          <a:p>
-            <a:pPr algn="ctr"/>
-          </a:p>
-        </p:txBody>
-      </p:sp>
-      <p:sp>
-        <p:nvSpPr>
           <p:cNvPr id="2" name="Title 1"/>
           <p:cNvSpPr>
             <a:spLocks noGrp="1"/>
@@ -5475,7 +4650,7 @@
       </p:sp>
       <p:graphicFrame>
         <p:nvGraphicFramePr>
-          <p:cNvPr id="14" name="표"/>
+          <p:cNvPr id="5" name="표"/>
           <p:cNvGraphicFramePr>
             <a:graphicFrameLocks noGrp="1"/>
           </p:cNvGraphicFramePr>
@@ -7212,267 +6387,6 @@
       </p:sp>
       <p:sp>
         <p:nvSpPr>
-          <p:cNvPr id="5" name="장식"/>
-          <p:cNvSpPr/>
-          <p:nvPr/>
-        </p:nvSpPr>
-        <p:spPr>
-          <a:xfrm>
-            <a:off x="10789920" y="525780"/>
-            <a:ext cx="301752" cy="502920"/>
-          </a:xfrm>
-          <a:prstGeom prst="roundRect">
-            <a:avLst/>
-          </a:prstGeom>
-          <a:solidFill>
-            <a:srgbClr val="8D3443"/>
-          </a:solidFill>
-          <a:ln>
-            <a:noFill/>
-          </a:ln>
-        </p:spPr>
-        <p:txBody>
-          <a:bodyPr rtlCol="0" anchor="ctr"/>
-          <a:lstStyle/>
-          <a:p>
-            <a:pPr algn="ctr"/>
-          </a:p>
-        </p:txBody>
-      </p:sp>
-      <p:sp>
-        <p:nvSpPr>
-          <p:cNvPr id="6" name="장식"/>
-          <p:cNvSpPr/>
-          <p:nvPr/>
-        </p:nvSpPr>
-        <p:spPr>
-          <a:xfrm>
-            <a:off x="10865358" y="475487"/>
-            <a:ext cx="150876" cy="50292"/>
-          </a:xfrm>
-          <a:prstGeom prst="rect">
-            <a:avLst/>
-          </a:prstGeom>
-          <a:solidFill>
-            <a:srgbClr val="3B9158"/>
-          </a:solidFill>
-          <a:ln>
-            <a:noFill/>
-          </a:ln>
-        </p:spPr>
-        <p:txBody>
-          <a:bodyPr rtlCol="0" anchor="ctr"/>
-          <a:lstStyle/>
-          <a:p>
-            <a:pPr algn="ctr"/>
-          </a:p>
-        </p:txBody>
-      </p:sp>
-      <p:sp>
-        <p:nvSpPr>
-          <p:cNvPr id="7" name="장식"/>
-          <p:cNvSpPr/>
-          <p:nvPr/>
-        </p:nvSpPr>
-        <p:spPr>
-          <a:xfrm>
-            <a:off x="10865358" y="1028700"/>
-            <a:ext cx="150876" cy="50292"/>
-          </a:xfrm>
-          <a:prstGeom prst="rect">
-            <a:avLst/>
-          </a:prstGeom>
-          <a:solidFill>
-            <a:srgbClr val="3B9158"/>
-          </a:solidFill>
-          <a:ln>
-            <a:noFill/>
-          </a:ln>
-        </p:spPr>
-        <p:txBody>
-          <a:bodyPr rtlCol="0" anchor="ctr"/>
-          <a:lstStyle/>
-          <a:p>
-            <a:pPr algn="ctr"/>
-          </a:p>
-        </p:txBody>
-      </p:sp>
-      <p:sp>
-        <p:nvSpPr>
-          <p:cNvPr id="8" name="장식"/>
-          <p:cNvSpPr/>
-          <p:nvPr/>
-        </p:nvSpPr>
-        <p:spPr>
-          <a:xfrm>
-            <a:off x="11172139" y="706831"/>
-            <a:ext cx="301752" cy="422452"/>
-          </a:xfrm>
-          <a:prstGeom prst="roundRect">
-            <a:avLst/>
-          </a:prstGeom>
-          <a:solidFill>
-            <a:srgbClr val="F0D1D6"/>
-          </a:solidFill>
-          <a:ln>
-            <a:noFill/>
-          </a:ln>
-        </p:spPr>
-        <p:txBody>
-          <a:bodyPr rtlCol="0" anchor="ctr"/>
-          <a:lstStyle/>
-          <a:p>
-            <a:pPr algn="ctr"/>
-          </a:p>
-        </p:txBody>
-      </p:sp>
-      <p:sp>
-        <p:nvSpPr>
-          <p:cNvPr id="9" name="장식"/>
-          <p:cNvSpPr/>
-          <p:nvPr/>
-        </p:nvSpPr>
-        <p:spPr>
-          <a:xfrm>
-            <a:off x="11247577" y="656539"/>
-            <a:ext cx="150876" cy="50292"/>
-          </a:xfrm>
-          <a:prstGeom prst="rect">
-            <a:avLst/>
-          </a:prstGeom>
-          <a:solidFill>
-            <a:srgbClr val="3B9158"/>
-          </a:solidFill>
-          <a:ln>
-            <a:noFill/>
-          </a:ln>
-        </p:spPr>
-        <p:txBody>
-          <a:bodyPr rtlCol="0" anchor="ctr"/>
-          <a:lstStyle/>
-          <a:p>
-            <a:pPr algn="ctr"/>
-          </a:p>
-        </p:txBody>
-      </p:sp>
-      <p:sp>
-        <p:nvSpPr>
-          <p:cNvPr id="10" name="장식"/>
-          <p:cNvSpPr/>
-          <p:nvPr/>
-        </p:nvSpPr>
-        <p:spPr>
-          <a:xfrm>
-            <a:off x="11247577" y="1129284"/>
-            <a:ext cx="150876" cy="50292"/>
-          </a:xfrm>
-          <a:prstGeom prst="rect">
-            <a:avLst/>
-          </a:prstGeom>
-          <a:solidFill>
-            <a:srgbClr val="3B9158"/>
-          </a:solidFill>
-          <a:ln>
-            <a:noFill/>
-          </a:ln>
-        </p:spPr>
-        <p:txBody>
-          <a:bodyPr rtlCol="0" anchor="ctr"/>
-          <a:lstStyle/>
-          <a:p>
-            <a:pPr algn="ctr"/>
-          </a:p>
-        </p:txBody>
-      </p:sp>
-      <p:sp>
-        <p:nvSpPr>
-          <p:cNvPr id="11" name="장식"/>
-          <p:cNvSpPr/>
-          <p:nvPr/>
-        </p:nvSpPr>
-        <p:spPr>
-          <a:xfrm>
-            <a:off x="11554358" y="525780"/>
-            <a:ext cx="301752" cy="502920"/>
-          </a:xfrm>
-          <a:prstGeom prst="roundRect">
-            <a:avLst/>
-          </a:prstGeom>
-          <a:solidFill>
-            <a:srgbClr val="3B9158"/>
-          </a:solidFill>
-          <a:ln>
-            <a:noFill/>
-          </a:ln>
-        </p:spPr>
-        <p:txBody>
-          <a:bodyPr rtlCol="0" anchor="ctr"/>
-          <a:lstStyle/>
-          <a:p>
-            <a:pPr algn="ctr"/>
-          </a:p>
-        </p:txBody>
-      </p:sp>
-      <p:sp>
-        <p:nvSpPr>
-          <p:cNvPr id="12" name="장식"/>
-          <p:cNvSpPr/>
-          <p:nvPr/>
-        </p:nvSpPr>
-        <p:spPr>
-          <a:xfrm>
-            <a:off x="11629796" y="475487"/>
-            <a:ext cx="150876" cy="50292"/>
-          </a:xfrm>
-          <a:prstGeom prst="rect">
-            <a:avLst/>
-          </a:prstGeom>
-          <a:solidFill>
-            <a:srgbClr val="8D3443"/>
-          </a:solidFill>
-          <a:ln>
-            <a:noFill/>
-          </a:ln>
-        </p:spPr>
-        <p:txBody>
-          <a:bodyPr rtlCol="0" anchor="ctr"/>
-          <a:lstStyle/>
-          <a:p>
-            <a:pPr algn="ctr"/>
-          </a:p>
-        </p:txBody>
-      </p:sp>
-      <p:sp>
-        <p:nvSpPr>
-          <p:cNvPr id="13" name="장식"/>
-          <p:cNvSpPr/>
-          <p:nvPr/>
-        </p:nvSpPr>
-        <p:spPr>
-          <a:xfrm>
-            <a:off x="11629796" y="1028700"/>
-            <a:ext cx="150876" cy="50292"/>
-          </a:xfrm>
-          <a:prstGeom prst="rect">
-            <a:avLst/>
-          </a:prstGeom>
-          <a:solidFill>
-            <a:srgbClr val="8D3443"/>
-          </a:solidFill>
-          <a:ln>
-            <a:noFill/>
-          </a:ln>
-        </p:spPr>
-        <p:txBody>
-          <a:bodyPr rtlCol="0" anchor="ctr"/>
-          <a:lstStyle/>
-          <a:p>
-            <a:pPr algn="ctr"/>
-          </a:p>
-        </p:txBody>
-      </p:sp>
-      <p:sp>
-        <p:nvSpPr>
           <p:cNvPr id="2" name="Title 1"/>
           <p:cNvSpPr>
             <a:spLocks noGrp="1"/>
@@ -7511,7 +6425,7 @@
       </p:sp>
       <p:graphicFrame>
         <p:nvGraphicFramePr>
-          <p:cNvPr id="14" name="표"/>
+          <p:cNvPr id="5" name="표"/>
           <p:cNvGraphicFramePr>
             <a:graphicFrameLocks noGrp="1"/>
           </p:cNvGraphicFramePr>
@@ -9297,267 +8211,6 @@
       </p:sp>
       <p:sp>
         <p:nvSpPr>
-          <p:cNvPr id="5" name="장식"/>
-          <p:cNvSpPr/>
-          <p:nvPr/>
-        </p:nvSpPr>
-        <p:spPr>
-          <a:xfrm>
-            <a:off x="10789920" y="525780"/>
-            <a:ext cx="301752" cy="502920"/>
-          </a:xfrm>
-          <a:prstGeom prst="roundRect">
-            <a:avLst/>
-          </a:prstGeom>
-          <a:solidFill>
-            <a:srgbClr val="8D3443"/>
-          </a:solidFill>
-          <a:ln>
-            <a:noFill/>
-          </a:ln>
-        </p:spPr>
-        <p:txBody>
-          <a:bodyPr rtlCol="0" anchor="ctr"/>
-          <a:lstStyle/>
-          <a:p>
-            <a:pPr algn="ctr"/>
-          </a:p>
-        </p:txBody>
-      </p:sp>
-      <p:sp>
-        <p:nvSpPr>
-          <p:cNvPr id="6" name="장식"/>
-          <p:cNvSpPr/>
-          <p:nvPr/>
-        </p:nvSpPr>
-        <p:spPr>
-          <a:xfrm>
-            <a:off x="10865358" y="475487"/>
-            <a:ext cx="150876" cy="50292"/>
-          </a:xfrm>
-          <a:prstGeom prst="rect">
-            <a:avLst/>
-          </a:prstGeom>
-          <a:solidFill>
-            <a:srgbClr val="3B9158"/>
-          </a:solidFill>
-          <a:ln>
-            <a:noFill/>
-          </a:ln>
-        </p:spPr>
-        <p:txBody>
-          <a:bodyPr rtlCol="0" anchor="ctr"/>
-          <a:lstStyle/>
-          <a:p>
-            <a:pPr algn="ctr"/>
-          </a:p>
-        </p:txBody>
-      </p:sp>
-      <p:sp>
-        <p:nvSpPr>
-          <p:cNvPr id="7" name="장식"/>
-          <p:cNvSpPr/>
-          <p:nvPr/>
-        </p:nvSpPr>
-        <p:spPr>
-          <a:xfrm>
-            <a:off x="10865358" y="1028700"/>
-            <a:ext cx="150876" cy="50292"/>
-          </a:xfrm>
-          <a:prstGeom prst="rect">
-            <a:avLst/>
-          </a:prstGeom>
-          <a:solidFill>
-            <a:srgbClr val="3B9158"/>
-          </a:solidFill>
-          <a:ln>
-            <a:noFill/>
-          </a:ln>
-        </p:spPr>
-        <p:txBody>
-          <a:bodyPr rtlCol="0" anchor="ctr"/>
-          <a:lstStyle/>
-          <a:p>
-            <a:pPr algn="ctr"/>
-          </a:p>
-        </p:txBody>
-      </p:sp>
-      <p:sp>
-        <p:nvSpPr>
-          <p:cNvPr id="8" name="장식"/>
-          <p:cNvSpPr/>
-          <p:nvPr/>
-        </p:nvSpPr>
-        <p:spPr>
-          <a:xfrm>
-            <a:off x="11172139" y="706831"/>
-            <a:ext cx="301752" cy="422452"/>
-          </a:xfrm>
-          <a:prstGeom prst="roundRect">
-            <a:avLst/>
-          </a:prstGeom>
-          <a:solidFill>
-            <a:srgbClr val="F0D1D6"/>
-          </a:solidFill>
-          <a:ln>
-            <a:noFill/>
-          </a:ln>
-        </p:spPr>
-        <p:txBody>
-          <a:bodyPr rtlCol="0" anchor="ctr"/>
-          <a:lstStyle/>
-          <a:p>
-            <a:pPr algn="ctr"/>
-          </a:p>
-        </p:txBody>
-      </p:sp>
-      <p:sp>
-        <p:nvSpPr>
-          <p:cNvPr id="9" name="장식"/>
-          <p:cNvSpPr/>
-          <p:nvPr/>
-        </p:nvSpPr>
-        <p:spPr>
-          <a:xfrm>
-            <a:off x="11247577" y="656539"/>
-            <a:ext cx="150876" cy="50292"/>
-          </a:xfrm>
-          <a:prstGeom prst="rect">
-            <a:avLst/>
-          </a:prstGeom>
-          <a:solidFill>
-            <a:srgbClr val="3B9158"/>
-          </a:solidFill>
-          <a:ln>
-            <a:noFill/>
-          </a:ln>
-        </p:spPr>
-        <p:txBody>
-          <a:bodyPr rtlCol="0" anchor="ctr"/>
-          <a:lstStyle/>
-          <a:p>
-            <a:pPr algn="ctr"/>
-          </a:p>
-        </p:txBody>
-      </p:sp>
-      <p:sp>
-        <p:nvSpPr>
-          <p:cNvPr id="10" name="장식"/>
-          <p:cNvSpPr/>
-          <p:nvPr/>
-        </p:nvSpPr>
-        <p:spPr>
-          <a:xfrm>
-            <a:off x="11247577" y="1129284"/>
-            <a:ext cx="150876" cy="50292"/>
-          </a:xfrm>
-          <a:prstGeom prst="rect">
-            <a:avLst/>
-          </a:prstGeom>
-          <a:solidFill>
-            <a:srgbClr val="3B9158"/>
-          </a:solidFill>
-          <a:ln>
-            <a:noFill/>
-          </a:ln>
-        </p:spPr>
-        <p:txBody>
-          <a:bodyPr rtlCol="0" anchor="ctr"/>
-          <a:lstStyle/>
-          <a:p>
-            <a:pPr algn="ctr"/>
-          </a:p>
-        </p:txBody>
-      </p:sp>
-      <p:sp>
-        <p:nvSpPr>
-          <p:cNvPr id="11" name="장식"/>
-          <p:cNvSpPr/>
-          <p:nvPr/>
-        </p:nvSpPr>
-        <p:spPr>
-          <a:xfrm>
-            <a:off x="11554358" y="525780"/>
-            <a:ext cx="301752" cy="502920"/>
-          </a:xfrm>
-          <a:prstGeom prst="roundRect">
-            <a:avLst/>
-          </a:prstGeom>
-          <a:solidFill>
-            <a:srgbClr val="3B9158"/>
-          </a:solidFill>
-          <a:ln>
-            <a:noFill/>
-          </a:ln>
-        </p:spPr>
-        <p:txBody>
-          <a:bodyPr rtlCol="0" anchor="ctr"/>
-          <a:lstStyle/>
-          <a:p>
-            <a:pPr algn="ctr"/>
-          </a:p>
-        </p:txBody>
-      </p:sp>
-      <p:sp>
-        <p:nvSpPr>
-          <p:cNvPr id="12" name="장식"/>
-          <p:cNvSpPr/>
-          <p:nvPr/>
-        </p:nvSpPr>
-        <p:spPr>
-          <a:xfrm>
-            <a:off x="11629796" y="475487"/>
-            <a:ext cx="150876" cy="50292"/>
-          </a:xfrm>
-          <a:prstGeom prst="rect">
-            <a:avLst/>
-          </a:prstGeom>
-          <a:solidFill>
-            <a:srgbClr val="8D3443"/>
-          </a:solidFill>
-          <a:ln>
-            <a:noFill/>
-          </a:ln>
-        </p:spPr>
-        <p:txBody>
-          <a:bodyPr rtlCol="0" anchor="ctr"/>
-          <a:lstStyle/>
-          <a:p>
-            <a:pPr algn="ctr"/>
-          </a:p>
-        </p:txBody>
-      </p:sp>
-      <p:sp>
-        <p:nvSpPr>
-          <p:cNvPr id="13" name="장식"/>
-          <p:cNvSpPr/>
-          <p:nvPr/>
-        </p:nvSpPr>
-        <p:spPr>
-          <a:xfrm>
-            <a:off x="11629796" y="1028700"/>
-            <a:ext cx="150876" cy="50292"/>
-          </a:xfrm>
-          <a:prstGeom prst="rect">
-            <a:avLst/>
-          </a:prstGeom>
-          <a:solidFill>
-            <a:srgbClr val="8D3443"/>
-          </a:solidFill>
-          <a:ln>
-            <a:noFill/>
-          </a:ln>
-        </p:spPr>
-        <p:txBody>
-          <a:bodyPr rtlCol="0" anchor="ctr"/>
-          <a:lstStyle/>
-          <a:p>
-            <a:pPr algn="ctr"/>
-          </a:p>
-        </p:txBody>
-      </p:sp>
-      <p:sp>
-        <p:nvSpPr>
           <p:cNvPr id="2" name="Title 1"/>
           <p:cNvSpPr>
             <a:spLocks noGrp="1"/>
@@ -9596,7 +8249,7 @@
       </p:sp>
       <p:sp>
         <p:nvSpPr>
-          <p:cNvPr id="14" name="카드 1"/>
+          <p:cNvPr id="5" name="카드 1"/>
           <p:cNvSpPr/>
           <p:nvPr/>
         </p:nvSpPr>
@@ -9629,7 +8282,7 @@
       </p:sp>
       <p:sp>
         <p:nvSpPr>
-          <p:cNvPr id="15" name="번호 1"/>
+          <p:cNvPr id="6" name="번호 1"/>
           <p:cNvSpPr/>
           <p:nvPr/>
         </p:nvSpPr>
@@ -9672,7 +8325,7 @@
       </p:sp>
       <p:sp>
         <p:nvSpPr>
-          <p:cNvPr id="16" name="TextBox 15"/>
+          <p:cNvPr id="7" name="TextBox 6"/>
           <p:cNvSpPr txBox="1"/>
           <p:nvPr/>
         </p:nvSpPr>
@@ -9710,7 +8363,7 @@
       </p:sp>
       <p:sp>
         <p:nvSpPr>
-          <p:cNvPr id="17" name="TextBox 16"/>
+          <p:cNvPr id="8" name="TextBox 7"/>
           <p:cNvSpPr txBox="1"/>
           <p:nvPr/>
         </p:nvSpPr>
@@ -9748,7 +8401,7 @@
       </p:sp>
       <p:sp>
         <p:nvSpPr>
-          <p:cNvPr id="18" name="카드 2"/>
+          <p:cNvPr id="9" name="카드 2"/>
           <p:cNvSpPr/>
           <p:nvPr/>
         </p:nvSpPr>
@@ -9781,7 +8434,7 @@
       </p:sp>
       <p:sp>
         <p:nvSpPr>
-          <p:cNvPr id="19" name="번호 2"/>
+          <p:cNvPr id="10" name="번호 2"/>
           <p:cNvSpPr/>
           <p:nvPr/>
         </p:nvSpPr>
@@ -9824,7 +8477,7 @@
       </p:sp>
       <p:sp>
         <p:nvSpPr>
-          <p:cNvPr id="20" name="TextBox 19"/>
+          <p:cNvPr id="11" name="TextBox 10"/>
           <p:cNvSpPr txBox="1"/>
           <p:nvPr/>
         </p:nvSpPr>
@@ -9862,7 +8515,7 @@
       </p:sp>
       <p:sp>
         <p:nvSpPr>
-          <p:cNvPr id="21" name="TextBox 20"/>
+          <p:cNvPr id="12" name="TextBox 11"/>
           <p:cNvSpPr txBox="1"/>
           <p:nvPr/>
         </p:nvSpPr>
@@ -9900,7 +8553,7 @@
       </p:sp>
       <p:sp>
         <p:nvSpPr>
-          <p:cNvPr id="22" name="카드 3"/>
+          <p:cNvPr id="13" name="카드 3"/>
           <p:cNvSpPr/>
           <p:nvPr/>
         </p:nvSpPr>
@@ -9933,7 +8586,7 @@
       </p:sp>
       <p:sp>
         <p:nvSpPr>
-          <p:cNvPr id="23" name="번호 3"/>
+          <p:cNvPr id="14" name="번호 3"/>
           <p:cNvSpPr/>
           <p:nvPr/>
         </p:nvSpPr>
@@ -9976,7 +8629,7 @@
       </p:sp>
       <p:sp>
         <p:nvSpPr>
-          <p:cNvPr id="24" name="TextBox 23"/>
+          <p:cNvPr id="15" name="TextBox 14"/>
           <p:cNvSpPr txBox="1"/>
           <p:nvPr/>
         </p:nvSpPr>
@@ -10014,7 +8667,7 @@
       </p:sp>
       <p:sp>
         <p:nvSpPr>
-          <p:cNvPr id="25" name="TextBox 24"/>
+          <p:cNvPr id="16" name="TextBox 15"/>
           <p:cNvSpPr txBox="1"/>
           <p:nvPr/>
         </p:nvSpPr>
@@ -10052,7 +8705,7 @@
       </p:sp>
       <p:sp>
         <p:nvSpPr>
-          <p:cNvPr id="26" name="안내"/>
+          <p:cNvPr id="17" name="안내"/>
           <p:cNvSpPr txBox="1"/>
           <p:nvPr/>
         </p:nvSpPr>
@@ -10174,267 +8827,6 @@
       </p:sp>
       <p:sp>
         <p:nvSpPr>
-          <p:cNvPr id="5" name="장식"/>
-          <p:cNvSpPr/>
-          <p:nvPr/>
-        </p:nvSpPr>
-        <p:spPr>
-          <a:xfrm>
-            <a:off x="10789920" y="525780"/>
-            <a:ext cx="301752" cy="502920"/>
-          </a:xfrm>
-          <a:prstGeom prst="roundRect">
-            <a:avLst/>
-          </a:prstGeom>
-          <a:solidFill>
-            <a:srgbClr val="8D3443"/>
-          </a:solidFill>
-          <a:ln>
-            <a:noFill/>
-          </a:ln>
-        </p:spPr>
-        <p:txBody>
-          <a:bodyPr rtlCol="0" anchor="ctr"/>
-          <a:lstStyle/>
-          <a:p>
-            <a:pPr algn="ctr"/>
-          </a:p>
-        </p:txBody>
-      </p:sp>
-      <p:sp>
-        <p:nvSpPr>
-          <p:cNvPr id="6" name="장식"/>
-          <p:cNvSpPr/>
-          <p:nvPr/>
-        </p:nvSpPr>
-        <p:spPr>
-          <a:xfrm>
-            <a:off x="10865358" y="475487"/>
-            <a:ext cx="150876" cy="50292"/>
-          </a:xfrm>
-          <a:prstGeom prst="rect">
-            <a:avLst/>
-          </a:prstGeom>
-          <a:solidFill>
-            <a:srgbClr val="3B9158"/>
-          </a:solidFill>
-          <a:ln>
-            <a:noFill/>
-          </a:ln>
-        </p:spPr>
-        <p:txBody>
-          <a:bodyPr rtlCol="0" anchor="ctr"/>
-          <a:lstStyle/>
-          <a:p>
-            <a:pPr algn="ctr"/>
-          </a:p>
-        </p:txBody>
-      </p:sp>
-      <p:sp>
-        <p:nvSpPr>
-          <p:cNvPr id="7" name="장식"/>
-          <p:cNvSpPr/>
-          <p:nvPr/>
-        </p:nvSpPr>
-        <p:spPr>
-          <a:xfrm>
-            <a:off x="10865358" y="1028700"/>
-            <a:ext cx="150876" cy="50292"/>
-          </a:xfrm>
-          <a:prstGeom prst="rect">
-            <a:avLst/>
-          </a:prstGeom>
-          <a:solidFill>
-            <a:srgbClr val="3B9158"/>
-          </a:solidFill>
-          <a:ln>
-            <a:noFill/>
-          </a:ln>
-        </p:spPr>
-        <p:txBody>
-          <a:bodyPr rtlCol="0" anchor="ctr"/>
-          <a:lstStyle/>
-          <a:p>
-            <a:pPr algn="ctr"/>
-          </a:p>
-        </p:txBody>
-      </p:sp>
-      <p:sp>
-        <p:nvSpPr>
-          <p:cNvPr id="8" name="장식"/>
-          <p:cNvSpPr/>
-          <p:nvPr/>
-        </p:nvSpPr>
-        <p:spPr>
-          <a:xfrm>
-            <a:off x="11172139" y="706831"/>
-            <a:ext cx="301752" cy="422452"/>
-          </a:xfrm>
-          <a:prstGeom prst="roundRect">
-            <a:avLst/>
-          </a:prstGeom>
-          <a:solidFill>
-            <a:srgbClr val="F0D1D6"/>
-          </a:solidFill>
-          <a:ln>
-            <a:noFill/>
-          </a:ln>
-        </p:spPr>
-        <p:txBody>
-          <a:bodyPr rtlCol="0" anchor="ctr"/>
-          <a:lstStyle/>
-          <a:p>
-            <a:pPr algn="ctr"/>
-          </a:p>
-        </p:txBody>
-      </p:sp>
-      <p:sp>
-        <p:nvSpPr>
-          <p:cNvPr id="9" name="장식"/>
-          <p:cNvSpPr/>
-          <p:nvPr/>
-        </p:nvSpPr>
-        <p:spPr>
-          <a:xfrm>
-            <a:off x="11247577" y="656539"/>
-            <a:ext cx="150876" cy="50292"/>
-          </a:xfrm>
-          <a:prstGeom prst="rect">
-            <a:avLst/>
-          </a:prstGeom>
-          <a:solidFill>
-            <a:srgbClr val="3B9158"/>
-          </a:solidFill>
-          <a:ln>
-            <a:noFill/>
-          </a:ln>
-        </p:spPr>
-        <p:txBody>
-          <a:bodyPr rtlCol="0" anchor="ctr"/>
-          <a:lstStyle/>
-          <a:p>
-            <a:pPr algn="ctr"/>
-          </a:p>
-        </p:txBody>
-      </p:sp>
-      <p:sp>
-        <p:nvSpPr>
-          <p:cNvPr id="10" name="장식"/>
-          <p:cNvSpPr/>
-          <p:nvPr/>
-        </p:nvSpPr>
-        <p:spPr>
-          <a:xfrm>
-            <a:off x="11247577" y="1129284"/>
-            <a:ext cx="150876" cy="50292"/>
-          </a:xfrm>
-          <a:prstGeom prst="rect">
-            <a:avLst/>
-          </a:prstGeom>
-          <a:solidFill>
-            <a:srgbClr val="3B9158"/>
-          </a:solidFill>
-          <a:ln>
-            <a:noFill/>
-          </a:ln>
-        </p:spPr>
-        <p:txBody>
-          <a:bodyPr rtlCol="0" anchor="ctr"/>
-          <a:lstStyle/>
-          <a:p>
-            <a:pPr algn="ctr"/>
-          </a:p>
-        </p:txBody>
-      </p:sp>
-      <p:sp>
-        <p:nvSpPr>
-          <p:cNvPr id="11" name="장식"/>
-          <p:cNvSpPr/>
-          <p:nvPr/>
-        </p:nvSpPr>
-        <p:spPr>
-          <a:xfrm>
-            <a:off x="11554358" y="525780"/>
-            <a:ext cx="301752" cy="502920"/>
-          </a:xfrm>
-          <a:prstGeom prst="roundRect">
-            <a:avLst/>
-          </a:prstGeom>
-          <a:solidFill>
-            <a:srgbClr val="3B9158"/>
-          </a:solidFill>
-          <a:ln>
-            <a:noFill/>
-          </a:ln>
-        </p:spPr>
-        <p:txBody>
-          <a:bodyPr rtlCol="0" anchor="ctr"/>
-          <a:lstStyle/>
-          <a:p>
-            <a:pPr algn="ctr"/>
-          </a:p>
-        </p:txBody>
-      </p:sp>
-      <p:sp>
-        <p:nvSpPr>
-          <p:cNvPr id="12" name="장식"/>
-          <p:cNvSpPr/>
-          <p:nvPr/>
-        </p:nvSpPr>
-        <p:spPr>
-          <a:xfrm>
-            <a:off x="11629796" y="475487"/>
-            <a:ext cx="150876" cy="50292"/>
-          </a:xfrm>
-          <a:prstGeom prst="rect">
-            <a:avLst/>
-          </a:prstGeom>
-          <a:solidFill>
-            <a:srgbClr val="8D3443"/>
-          </a:solidFill>
-          <a:ln>
-            <a:noFill/>
-          </a:ln>
-        </p:spPr>
-        <p:txBody>
-          <a:bodyPr rtlCol="0" anchor="ctr"/>
-          <a:lstStyle/>
-          <a:p>
-            <a:pPr algn="ctr"/>
-          </a:p>
-        </p:txBody>
-      </p:sp>
-      <p:sp>
-        <p:nvSpPr>
-          <p:cNvPr id="13" name="장식"/>
-          <p:cNvSpPr/>
-          <p:nvPr/>
-        </p:nvSpPr>
-        <p:spPr>
-          <a:xfrm>
-            <a:off x="11629796" y="1028700"/>
-            <a:ext cx="150876" cy="50292"/>
-          </a:xfrm>
-          <a:prstGeom prst="rect">
-            <a:avLst/>
-          </a:prstGeom>
-          <a:solidFill>
-            <a:srgbClr val="8D3443"/>
-          </a:solidFill>
-          <a:ln>
-            <a:noFill/>
-          </a:ln>
-        </p:spPr>
-        <p:txBody>
-          <a:bodyPr rtlCol="0" anchor="ctr"/>
-          <a:lstStyle/>
-          <a:p>
-            <a:pPr algn="ctr"/>
-          </a:p>
-        </p:txBody>
-      </p:sp>
-      <p:sp>
-        <p:nvSpPr>
           <p:cNvPr id="2" name="Title 1"/>
           <p:cNvSpPr>
             <a:spLocks noGrp="1"/>
@@ -10473,7 +8865,7 @@
       </p:sp>
       <p:sp>
         <p:nvSpPr>
-          <p:cNvPr id="14" name="카드 1"/>
+          <p:cNvPr id="5" name="카드 1"/>
           <p:cNvSpPr/>
           <p:nvPr/>
         </p:nvSpPr>
@@ -10506,7 +8898,7 @@
       </p:sp>
       <p:sp>
         <p:nvSpPr>
-          <p:cNvPr id="15" name="번호 1"/>
+          <p:cNvPr id="6" name="번호 1"/>
           <p:cNvSpPr/>
           <p:nvPr/>
         </p:nvSpPr>
@@ -10549,7 +8941,7 @@
       </p:sp>
       <p:sp>
         <p:nvSpPr>
-          <p:cNvPr id="16" name="TextBox 15"/>
+          <p:cNvPr id="7" name="TextBox 6"/>
           <p:cNvSpPr txBox="1"/>
           <p:nvPr/>
         </p:nvSpPr>
@@ -10587,7 +8979,7 @@
       </p:sp>
       <p:sp>
         <p:nvSpPr>
-          <p:cNvPr id="17" name="TextBox 16"/>
+          <p:cNvPr id="8" name="TextBox 7"/>
           <p:cNvSpPr txBox="1"/>
           <p:nvPr/>
         </p:nvSpPr>
@@ -10625,7 +9017,7 @@
       </p:sp>
       <p:sp>
         <p:nvSpPr>
-          <p:cNvPr id="18" name="카드 2"/>
+          <p:cNvPr id="9" name="카드 2"/>
           <p:cNvSpPr/>
           <p:nvPr/>
         </p:nvSpPr>
@@ -10658,7 +9050,7 @@
       </p:sp>
       <p:sp>
         <p:nvSpPr>
-          <p:cNvPr id="19" name="번호 2"/>
+          <p:cNvPr id="10" name="번호 2"/>
           <p:cNvSpPr/>
           <p:nvPr/>
         </p:nvSpPr>
@@ -10701,7 +9093,7 @@
       </p:sp>
       <p:sp>
         <p:nvSpPr>
-          <p:cNvPr id="20" name="TextBox 19"/>
+          <p:cNvPr id="11" name="TextBox 10"/>
           <p:cNvSpPr txBox="1"/>
           <p:nvPr/>
         </p:nvSpPr>
@@ -10739,7 +9131,7 @@
       </p:sp>
       <p:sp>
         <p:nvSpPr>
-          <p:cNvPr id="21" name="TextBox 20"/>
+          <p:cNvPr id="12" name="TextBox 11"/>
           <p:cNvSpPr txBox="1"/>
           <p:nvPr/>
         </p:nvSpPr>
@@ -10777,7 +9169,7 @@
       </p:sp>
       <p:sp>
         <p:nvSpPr>
-          <p:cNvPr id="22" name="카드 3"/>
+          <p:cNvPr id="13" name="카드 3"/>
           <p:cNvSpPr/>
           <p:nvPr/>
         </p:nvSpPr>
@@ -10810,7 +9202,7 @@
       </p:sp>
       <p:sp>
         <p:nvSpPr>
-          <p:cNvPr id="23" name="번호 3"/>
+          <p:cNvPr id="14" name="번호 3"/>
           <p:cNvSpPr/>
           <p:nvPr/>
         </p:nvSpPr>
@@ -10853,7 +9245,7 @@
       </p:sp>
       <p:sp>
         <p:nvSpPr>
-          <p:cNvPr id="24" name="TextBox 23"/>
+          <p:cNvPr id="15" name="TextBox 14"/>
           <p:cNvSpPr txBox="1"/>
           <p:nvPr/>
         </p:nvSpPr>
@@ -10891,7 +9283,7 @@
       </p:sp>
       <p:sp>
         <p:nvSpPr>
-          <p:cNvPr id="25" name="TextBox 24"/>
+          <p:cNvPr id="16" name="TextBox 15"/>
           <p:cNvSpPr txBox="1"/>
           <p:nvPr/>
         </p:nvSpPr>
@@ -10929,7 +9321,7 @@
       </p:sp>
       <p:sp>
         <p:nvSpPr>
-          <p:cNvPr id="26" name="안내 문구"/>
+          <p:cNvPr id="17" name="안내 문구"/>
           <p:cNvSpPr txBox="1"/>
           <p:nvPr/>
         </p:nvSpPr>

--- a/public/fun/pack/pptx/review/보장점검양식_43_가족점검_설날세배.pptx
+++ b/public/fun/pack/pptx/review/보장점검양식_43_가족점검_설날세배.pptx
@@ -3286,6 +3286,14 @@
 <file path=ppt/slides/slide1.xml><?xml version="1.0" encoding="utf-8"?>
 <p:sld xmlns:a="http://schemas.openxmlformats.org/drawingml/2006/main" xmlns:p="http://schemas.openxmlformats.org/presentationml/2006/main" xmlns:r="http://schemas.openxmlformats.org/officeDocument/2006/relationships">
   <p:cSld>
+    <p:bg>
+      <p:bgPr>
+        <a:solidFill>
+          <a:srgbClr val="F6D5DA"/>
+        </a:solidFill>
+        <a:effectLst/>
+      </p:bgPr>
+    </p:bg>
     <p:spTree>
       <p:nvGrpSpPr>
         <p:cNvPr id="1" name=""/>
@@ -3293,30 +3301,102 @@
         <p:nvPr/>
       </p:nvGrpSpPr>
       <p:grpSpPr/>
-      <p:pic>
-        <p:nvPicPr>
-          <p:cNvPr id="3" name="표지 그림" descr="review-43.jpg"/>
-          <p:cNvPicPr>
-            <a:picLocks noChangeAspect="1"/>
-          </p:cNvPicPr>
+      <p:sp>
+        <p:nvSpPr>
+          <p:cNvPr id="3" name="장식"/>
+          <p:cNvSpPr/>
           <p:nvPr/>
-        </p:nvPicPr>
-        <p:blipFill>
-          <a:blip r:embed="rId2"/>
-          <a:stretch>
-            <a:fillRect/>
-          </a:stretch>
-        </p:blipFill>
-        <p:spPr>
-          <a:xfrm>
-            <a:off x="0" y="0"/>
-            <a:ext cx="12191695" cy="6858000"/>
+        </p:nvSpPr>
+        <p:spPr>
+          <a:xfrm>
+            <a:off x="5684367" y="1097280"/>
+            <a:ext cx="822960" cy="822960"/>
+          </a:xfrm>
+          <a:prstGeom prst="ellipse">
+            <a:avLst/>
+          </a:prstGeom>
+          <a:solidFill>
+            <a:srgbClr val="FFFFFF"/>
+          </a:solidFill>
+          <a:ln>
+            <a:noFill/>
+          </a:ln>
+        </p:spPr>
+        <p:txBody>
+          <a:bodyPr rtlCol="0" anchor="ctr"/>
+          <a:lstStyle/>
+          <a:p>
+            <a:pPr algn="ctr"/>
+          </a:p>
+        </p:txBody>
+      </p:sp>
+      <p:sp>
+        <p:nvSpPr>
+          <p:cNvPr id="4" name="장식"/>
+          <p:cNvSpPr/>
+          <p:nvPr/>
+        </p:nvSpPr>
+        <p:spPr>
+          <a:xfrm>
+            <a:off x="5547207" y="4663440"/>
+            <a:ext cx="1097280" cy="18288"/>
           </a:xfrm>
           <a:prstGeom prst="rect">
             <a:avLst/>
           </a:prstGeom>
-        </p:spPr>
-      </p:pic>
+          <a:solidFill>
+            <a:srgbClr val="26231F"/>
+          </a:solidFill>
+          <a:ln>
+            <a:noFill/>
+          </a:ln>
+        </p:spPr>
+        <p:txBody>
+          <a:bodyPr rtlCol="0" anchor="ctr"/>
+          <a:lstStyle/>
+          <a:p>
+            <a:pPr algn="ctr"/>
+          </a:p>
+        </p:txBody>
+      </p:sp>
+      <p:sp>
+        <p:nvSpPr>
+          <p:cNvPr id="5" name="라벨"/>
+          <p:cNvSpPr txBox="1"/>
+          <p:nvPr/>
+        </p:nvSpPr>
+        <p:spPr>
+          <a:xfrm>
+            <a:off x="1828754" y="1874520"/>
+            <a:ext cx="8534186" cy="274320"/>
+          </a:xfrm>
+          <a:prstGeom prst="rect">
+            <a:avLst/>
+          </a:prstGeom>
+          <a:noFill/>
+        </p:spPr>
+        <p:txBody>
+          <a:bodyPr wrap="square" lIns="54864" rIns="54864" tIns="27432" bIns="27432" anchor="t">
+            <a:noAutofit/>
+          </a:bodyPr>
+          <a:lstStyle/>
+          <a:p>
+            <a:pPr algn="ctr">
+              <a:lnSpc>
+                <a:spcPct val="115000"/>
+              </a:lnSpc>
+            </a:pPr>
+            <a:r>
+              <a:rPr sz="1000" b="1" i="0" spc="250">
+                <a:solidFill>
+                  <a:srgbClr val="26231F"/>
+                </a:solidFill>
+              </a:rPr>
+              <a:t>INSURANCE CHECK</a:t>
+            </a:r>
+          </a:p>
+        </p:txBody>
+      </p:sp>
       <p:sp>
         <p:nvSpPr>
           <p:cNvPr id="2" name="Title 1"/>
@@ -3329,8 +3409,8 @@
         </p:nvSpPr>
         <p:spPr>
           <a:xfrm>
-            <a:off x="853418" y="2057400"/>
-            <a:ext cx="6095847" cy="1554480"/>
+            <a:off x="1828754" y="2331720"/>
+            <a:ext cx="8534186" cy="1188720"/>
           </a:xfrm>
         </p:spPr>
         <p:txBody>
@@ -3339,7 +3419,7 @@
           </a:bodyPr>
           <a:lstStyle/>
           <a:p>
-            <a:pPr algn="l">
+            <a:pPr algn="ctr">
               <a:lnSpc>
                 <a:spcPct val="105000"/>
               </a:lnSpc>
@@ -3347,7 +3427,7 @@
             <a:r>
               <a:rPr sz="3600" b="1" i="0">
                 <a:solidFill>
-                  <a:srgbClr val="431920"/>
+                  <a:srgbClr val="26231F"/>
                 </a:solidFill>
               </a:rPr>
               <a:t>우리 보험 점검 시간</a:t>
@@ -3357,14 +3437,14 @@
       </p:sp>
       <p:sp>
         <p:nvSpPr>
-          <p:cNvPr id="4" name="한 줄 문구"/>
+          <p:cNvPr id="6" name="한 줄 문구"/>
           <p:cNvSpPr txBox="1"/>
           <p:nvPr/>
         </p:nvSpPr>
         <p:spPr>
           <a:xfrm>
-            <a:off x="853418" y="3749039"/>
-            <a:ext cx="6095847" cy="822960"/>
+            <a:off x="1828754" y="3611880"/>
+            <a:ext cx="8534186" cy="822960"/>
           </a:xfrm>
           <a:prstGeom prst="rect">
             <a:avLst/>
@@ -3377,32 +3457,32 @@
           </a:bodyPr>
           <a:lstStyle/>
           <a:p>
-            <a:pPr algn="l">
+            <a:pPr algn="ctr">
               <a:lnSpc>
                 <a:spcPct val="115000"/>
               </a:lnSpc>
             </a:pPr>
             <a:r>
-              <a:rPr sz="1700" b="0" i="1">
+              <a:rPr sz="1700" b="0" i="0">
                 <a:solidFill>
-                  <a:srgbClr val="431920"/>
+                  <a:srgbClr val="26231F"/>
                 </a:solidFill>
               </a:rPr>
-              <a:t>겨울방학에 한 번 정리합니다</a:t>
+              <a:t>시간 날 때 한 번 정리합니다</a:t>
             </a:r>
           </a:p>
         </p:txBody>
       </p:sp>
       <p:sp>
         <p:nvSpPr>
-          <p:cNvPr id="5" name="안내 문구"/>
+          <p:cNvPr id="7" name="안내 문구"/>
           <p:cNvSpPr txBox="1"/>
           <p:nvPr/>
         </p:nvSpPr>
         <p:spPr>
           <a:xfrm>
-            <a:off x="853418" y="4617720"/>
-            <a:ext cx="6095847" cy="914400"/>
+            <a:off x="1828754" y="4480560"/>
+            <a:ext cx="8534186" cy="914400"/>
           </a:xfrm>
           <a:prstGeom prst="rect">
             <a:avLst/>
@@ -3415,7 +3495,7 @@
           </a:bodyPr>
           <a:lstStyle/>
           <a:p>
-            <a:pPr algn="l">
+            <a:pPr algn="ctr">
               <a:lnSpc>
                 <a:spcPct val="115000"/>
               </a:lnSpc>
@@ -3423,14 +3503,14 @@
             <a:r>
               <a:rPr sz="1400" b="0" i="0">
                 <a:solidFill>
-                  <a:srgbClr val="666666"/>
+                  <a:srgbClr val="26231F"/>
                 </a:solidFill>
               </a:rPr>
-              <a:t>가족 점검 · 2027. 00. 00</a:t>
+              <a:t>가족 점검 · 날짜 입력</a:t>
             </a:r>
           </a:p>
           <a:p>
-            <a:pPr algn="l">
+            <a:pPr algn="ctr">
               <a:lnSpc>
                 <a:spcPct val="115000"/>
               </a:lnSpc>
@@ -3438,7 +3518,7 @@
             <a:r>
               <a:rPr sz="1400" b="0" i="0">
                 <a:solidFill>
-                  <a:srgbClr val="666666"/>
+                  <a:srgbClr val="26231F"/>
                 </a:solidFill>
               </a:rPr>
               <a:t>가입 내용을 정리하고 함께 확인하는 양식</a:t>
@@ -3480,14 +3560,14 @@
         </p:nvSpPr>
         <p:spPr>
           <a:xfrm>
-            <a:off x="-182880" y="6144768"/>
-            <a:ext cx="12557455" cy="731520"/>
-          </a:xfrm>
-          <a:prstGeom prst="wave">
+            <a:off x="0" y="6565392"/>
+            <a:ext cx="12191695" cy="292608"/>
+          </a:xfrm>
+          <a:prstGeom prst="rect">
             <a:avLst/>
           </a:prstGeom>
           <a:solidFill>
-            <a:srgbClr val="F0D1D6"/>
+            <a:srgbClr val="EBADB8"/>
           </a:solidFill>
           <a:ln>
             <a:noFill/>
@@ -3509,14 +3589,83 @@
         </p:nvSpPr>
         <p:spPr>
           <a:xfrm>
-            <a:off x="-182880" y="6400800"/>
-            <a:ext cx="12557455" cy="502920"/>
-          </a:xfrm>
-          <a:prstGeom prst="wave">
+            <a:off x="640080" y="566928"/>
+            <a:ext cx="64008" cy="868680"/>
+          </a:xfrm>
+          <a:prstGeom prst="roundRect">
+            <a:avLst>
+              <a:gd name="adj" fmla="val 50000"/>
+            </a:avLst>
+          </a:prstGeom>
+          <a:solidFill>
+            <a:srgbClr val="E198A4"/>
+          </a:solidFill>
+          <a:ln>
+            <a:noFill/>
+          </a:ln>
+        </p:spPr>
+        <p:txBody>
+          <a:bodyPr rtlCol="0" anchor="ctr"/>
+          <a:lstStyle/>
+          <a:p>
+            <a:pPr algn="ctr"/>
+          </a:p>
+        </p:txBody>
+      </p:sp>
+      <p:sp>
+        <p:nvSpPr>
+          <p:cNvPr id="5" name="상단 라벨"/>
+          <p:cNvSpPr txBox="1"/>
+          <p:nvPr/>
+        </p:nvSpPr>
+        <p:spPr>
+          <a:xfrm>
+            <a:off x="868680" y="274320"/>
+            <a:ext cx="5486400" cy="274320"/>
+          </a:xfrm>
+          <a:prstGeom prst="rect">
+            <a:avLst/>
+          </a:prstGeom>
+          <a:noFill/>
+        </p:spPr>
+        <p:txBody>
+          <a:bodyPr wrap="square" lIns="54864" rIns="54864" tIns="27432" bIns="27432" anchor="ctr">
+            <a:noAutofit/>
+          </a:bodyPr>
+          <a:lstStyle/>
+          <a:p>
+            <a:pPr algn="l">
+              <a:lnSpc>
+                <a:spcPct val="115000"/>
+              </a:lnSpc>
+            </a:pPr>
+            <a:r>
+              <a:rPr sz="900" b="1" i="0" spc="250">
+                <a:solidFill>
+                  <a:srgbClr val="8E8780"/>
+                </a:solidFill>
+              </a:rPr>
+              <a:t>INSURANCE CHECK</a:t>
+            </a:r>
+          </a:p>
+        </p:txBody>
+      </p:sp>
+      <p:sp>
+        <p:nvSpPr>
+          <p:cNvPr id="6" name="포인트"/>
+          <p:cNvSpPr/>
+          <p:nvPr/>
+        </p:nvSpPr>
+        <p:spPr>
+          <a:xfrm>
+            <a:off x="11167567" y="667512"/>
+            <a:ext cx="310896" cy="310896"/>
+          </a:xfrm>
+          <a:prstGeom prst="mathPlus">
             <a:avLst/>
           </a:prstGeom>
           <a:solidFill>
-            <a:srgbClr val="8D3443"/>
+            <a:srgbClr val="EBADB8"/>
           </a:solidFill>
           <a:ln>
             <a:noFill/>
@@ -3542,8 +3691,8 @@
         </p:nvSpPr>
         <p:spPr>
           <a:xfrm>
-            <a:off x="640080" y="457200"/>
-            <a:ext cx="9722815" cy="868680"/>
+            <a:off x="868680" y="566928"/>
+            <a:ext cx="9448495" cy="868680"/>
           </a:xfrm>
         </p:spPr>
         <p:txBody>
@@ -3560,7 +3709,7 @@
             <a:r>
               <a:rPr sz="3000" b="1" i="0">
                 <a:solidFill>
-                  <a:srgbClr val="431920"/>
+                  <a:srgbClr val="26231F"/>
                 </a:solidFill>
               </a:rPr>
               <a:t>점검 대상 현황</a:t>
@@ -3570,14 +3719,14 @@
       </p:sp>
       <p:graphicFrame>
         <p:nvGraphicFramePr>
-          <p:cNvPr id="5" name="표"/>
+          <p:cNvPr id="7" name="표"/>
           <p:cNvGraphicFramePr>
             <a:graphicFrameLocks noGrp="1"/>
           </p:cNvGraphicFramePr>
           <p:nvPr/>
         </p:nvGraphicFramePr>
         <p:xfrm>
-          <a:off x="640080" y="1554480"/>
+          <a:off x="640080" y="1783080"/>
           <a:ext cx="10911532" cy="3657600"/>
         </p:xfrm>
         <a:graphic>
@@ -3602,7 +3751,7 @@
                       <a:r>
                         <a:rPr sz="1600" b="1">
                           <a:solidFill>
-                            <a:srgbClr val="FFFFFF"/>
+                            <a:srgbClr val="26231F"/>
                           </a:solidFill>
                         </a:rPr>
                         <a:t>구분</a:t>
@@ -3612,30 +3761,30 @@
                   <a:tcPr anchor="ctr" marL="73152" marR="73152">
                     <a:lnL w="9525" cap="flat" cmpd="sng" algn="ctr">
                       <a:solidFill>
-                        <a:srgbClr val="8D3443"/>
+                        <a:srgbClr val="E198A4"/>
                       </a:solidFill>
                       <a:prstDash val="solid"/>
                     </a:lnL>
                     <a:lnR w="9525" cap="flat" cmpd="sng" algn="ctr">
                       <a:solidFill>
-                        <a:srgbClr val="8D3443"/>
+                        <a:srgbClr val="E198A4"/>
                       </a:solidFill>
                       <a:prstDash val="solid"/>
                     </a:lnR>
                     <a:lnT w="9525" cap="flat" cmpd="sng" algn="ctr">
                       <a:solidFill>
-                        <a:srgbClr val="8D3443"/>
+                        <a:srgbClr val="E198A4"/>
                       </a:solidFill>
                       <a:prstDash val="solid"/>
                     </a:lnT>
                     <a:lnB w="9525" cap="flat" cmpd="sng" algn="ctr">
                       <a:solidFill>
-                        <a:srgbClr val="8D3443"/>
+                        <a:srgbClr val="E198A4"/>
                       </a:solidFill>
                       <a:prstDash val="solid"/>
                     </a:lnB>
                     <a:solidFill>
-                      <a:srgbClr val="8D3443"/>
+                      <a:srgbClr val="E198A4"/>
                     </a:solidFill>
                   </a:tcPr>
                 </a:tc>
@@ -3648,7 +3797,7 @@
                       <a:r>
                         <a:rPr sz="1600" b="1">
                           <a:solidFill>
-                            <a:srgbClr val="FFFFFF"/>
+                            <a:srgbClr val="26231F"/>
                           </a:solidFill>
                         </a:rPr>
                         <a:t>아빠</a:t>
@@ -3658,30 +3807,30 @@
                   <a:tcPr anchor="ctr" marL="73152" marR="73152">
                     <a:lnL w="9525" cap="flat" cmpd="sng" algn="ctr">
                       <a:solidFill>
-                        <a:srgbClr val="8D3443"/>
+                        <a:srgbClr val="E198A4"/>
                       </a:solidFill>
                       <a:prstDash val="solid"/>
                     </a:lnL>
                     <a:lnR w="9525" cap="flat" cmpd="sng" algn="ctr">
                       <a:solidFill>
-                        <a:srgbClr val="8D3443"/>
+                        <a:srgbClr val="E198A4"/>
                       </a:solidFill>
                       <a:prstDash val="solid"/>
                     </a:lnR>
                     <a:lnT w="9525" cap="flat" cmpd="sng" algn="ctr">
                       <a:solidFill>
-                        <a:srgbClr val="8D3443"/>
+                        <a:srgbClr val="E198A4"/>
                       </a:solidFill>
                       <a:prstDash val="solid"/>
                     </a:lnT>
                     <a:lnB w="9525" cap="flat" cmpd="sng" algn="ctr">
                       <a:solidFill>
-                        <a:srgbClr val="8D3443"/>
+                        <a:srgbClr val="E198A4"/>
                       </a:solidFill>
                       <a:prstDash val="solid"/>
                     </a:lnB>
                     <a:solidFill>
-                      <a:srgbClr val="8D3443"/>
+                      <a:srgbClr val="E198A4"/>
                     </a:solidFill>
                   </a:tcPr>
                 </a:tc>
@@ -3694,7 +3843,7 @@
                       <a:r>
                         <a:rPr sz="1600" b="1">
                           <a:solidFill>
-                            <a:srgbClr val="FFFFFF"/>
+                            <a:srgbClr val="26231F"/>
                           </a:solidFill>
                         </a:rPr>
                         <a:t>엄마</a:t>
@@ -3704,30 +3853,30 @@
                   <a:tcPr anchor="ctr" marL="73152" marR="73152">
                     <a:lnL w="9525" cap="flat" cmpd="sng" algn="ctr">
                       <a:solidFill>
-                        <a:srgbClr val="8D3443"/>
+                        <a:srgbClr val="E198A4"/>
                       </a:solidFill>
                       <a:prstDash val="solid"/>
                     </a:lnL>
                     <a:lnR w="9525" cap="flat" cmpd="sng" algn="ctr">
                       <a:solidFill>
-                        <a:srgbClr val="8D3443"/>
+                        <a:srgbClr val="E198A4"/>
                       </a:solidFill>
                       <a:prstDash val="solid"/>
                     </a:lnR>
                     <a:lnT w="9525" cap="flat" cmpd="sng" algn="ctr">
                       <a:solidFill>
-                        <a:srgbClr val="8D3443"/>
+                        <a:srgbClr val="E198A4"/>
                       </a:solidFill>
                       <a:prstDash val="solid"/>
                     </a:lnT>
                     <a:lnB w="9525" cap="flat" cmpd="sng" algn="ctr">
                       <a:solidFill>
-                        <a:srgbClr val="8D3443"/>
+                        <a:srgbClr val="E198A4"/>
                       </a:solidFill>
                       <a:prstDash val="solid"/>
                     </a:lnB>
                     <a:solidFill>
-                      <a:srgbClr val="8D3443"/>
+                      <a:srgbClr val="E198A4"/>
                     </a:solidFill>
                   </a:tcPr>
                 </a:tc>
@@ -3740,7 +3889,7 @@
                       <a:r>
                         <a:rPr sz="1600" b="1">
                           <a:solidFill>
-                            <a:srgbClr val="FFFFFF"/>
+                            <a:srgbClr val="26231F"/>
                           </a:solidFill>
                         </a:rPr>
                         <a:t>자녀</a:t>
@@ -3750,30 +3899,30 @@
                   <a:tcPr anchor="ctr" marL="73152" marR="73152">
                     <a:lnL w="9525" cap="flat" cmpd="sng" algn="ctr">
                       <a:solidFill>
-                        <a:srgbClr val="8D3443"/>
+                        <a:srgbClr val="E198A4"/>
                       </a:solidFill>
                       <a:prstDash val="solid"/>
                     </a:lnL>
                     <a:lnR w="9525" cap="flat" cmpd="sng" algn="ctr">
                       <a:solidFill>
-                        <a:srgbClr val="8D3443"/>
+                        <a:srgbClr val="E198A4"/>
                       </a:solidFill>
                       <a:prstDash val="solid"/>
                     </a:lnR>
                     <a:lnT w="9525" cap="flat" cmpd="sng" algn="ctr">
                       <a:solidFill>
-                        <a:srgbClr val="8D3443"/>
+                        <a:srgbClr val="E198A4"/>
                       </a:solidFill>
                       <a:prstDash val="solid"/>
                     </a:lnT>
                     <a:lnB w="9525" cap="flat" cmpd="sng" algn="ctr">
                       <a:solidFill>
-                        <a:srgbClr val="8D3443"/>
+                        <a:srgbClr val="E198A4"/>
                       </a:solidFill>
                       <a:prstDash val="solid"/>
                     </a:lnB>
                     <a:solidFill>
-                      <a:srgbClr val="8D3443"/>
+                      <a:srgbClr val="E198A4"/>
                     </a:solidFill>
                   </a:tcPr>
                 </a:tc>
@@ -3788,7 +3937,7 @@
                       <a:r>
                         <a:rPr sz="1600" b="1">
                           <a:solidFill>
-                            <a:srgbClr val="431920"/>
+                            <a:srgbClr val="49272D"/>
                           </a:solidFill>
                         </a:rPr>
                         <a:t>이름</a:t>
@@ -3798,30 +3947,30 @@
                   <a:tcPr anchor="ctr" marL="73152" marR="73152">
                     <a:lnL w="9525" cap="flat" cmpd="sng" algn="ctr">
                       <a:solidFill>
-                        <a:srgbClr val="F0D1D6"/>
+                        <a:srgbClr val="F6D5DA"/>
                       </a:solidFill>
                       <a:prstDash val="solid"/>
                     </a:lnL>
                     <a:lnR w="9525" cap="flat" cmpd="sng" algn="ctr">
                       <a:solidFill>
-                        <a:srgbClr val="F0D1D6"/>
+                        <a:srgbClr val="F6D5DA"/>
                       </a:solidFill>
                       <a:prstDash val="solid"/>
                     </a:lnR>
                     <a:lnT w="9525" cap="flat" cmpd="sng" algn="ctr">
                       <a:solidFill>
-                        <a:srgbClr val="F0D1D6"/>
+                        <a:srgbClr val="F6D5DA"/>
                       </a:solidFill>
                       <a:prstDash val="solid"/>
                     </a:lnT>
                     <a:lnB w="9525" cap="flat" cmpd="sng" algn="ctr">
                       <a:solidFill>
-                        <a:srgbClr val="F0D1D6"/>
+                        <a:srgbClr val="F6D5DA"/>
                       </a:solidFill>
                       <a:prstDash val="solid"/>
                     </a:lnB>
                     <a:solidFill>
-                      <a:srgbClr val="F0D1D6"/>
+                      <a:srgbClr val="F6D5DA"/>
                     </a:solidFill>
                   </a:tcPr>
                 </a:tc>
@@ -3834,7 +3983,7 @@
                       <a:r>
                         <a:rPr sz="1600" b="0">
                           <a:solidFill>
-                            <a:srgbClr val="2B2B2B"/>
+                            <a:srgbClr val="26231F"/>
                           </a:solidFill>
                         </a:rPr>
                         <a:t/>
@@ -3844,25 +3993,25 @@
                   <a:tcPr anchor="ctr" marL="73152" marR="73152">
                     <a:lnL w="9525" cap="flat" cmpd="sng" algn="ctr">
                       <a:solidFill>
-                        <a:srgbClr val="F0D1D6"/>
+                        <a:srgbClr val="F6D5DA"/>
                       </a:solidFill>
                       <a:prstDash val="solid"/>
                     </a:lnL>
                     <a:lnR w="9525" cap="flat" cmpd="sng" algn="ctr">
                       <a:solidFill>
-                        <a:srgbClr val="F0D1D6"/>
+                        <a:srgbClr val="F6D5DA"/>
                       </a:solidFill>
                       <a:prstDash val="solid"/>
                     </a:lnR>
                     <a:lnT w="9525" cap="flat" cmpd="sng" algn="ctr">
                       <a:solidFill>
-                        <a:srgbClr val="F0D1D6"/>
+                        <a:srgbClr val="F6D5DA"/>
                       </a:solidFill>
                       <a:prstDash val="solid"/>
                     </a:lnT>
                     <a:lnB w="9525" cap="flat" cmpd="sng" algn="ctr">
                       <a:solidFill>
-                        <a:srgbClr val="F0D1D6"/>
+                        <a:srgbClr val="F6D5DA"/>
                       </a:solidFill>
                       <a:prstDash val="solid"/>
                     </a:lnB>
@@ -3880,7 +4029,7 @@
                       <a:r>
                         <a:rPr sz="1600" b="0">
                           <a:solidFill>
-                            <a:srgbClr val="2B2B2B"/>
+                            <a:srgbClr val="26231F"/>
                           </a:solidFill>
                         </a:rPr>
                         <a:t/>
@@ -3890,25 +4039,25 @@
                   <a:tcPr anchor="ctr" marL="73152" marR="73152">
                     <a:lnL w="9525" cap="flat" cmpd="sng" algn="ctr">
                       <a:solidFill>
-                        <a:srgbClr val="F0D1D6"/>
+                        <a:srgbClr val="F6D5DA"/>
                       </a:solidFill>
                       <a:prstDash val="solid"/>
                     </a:lnL>
                     <a:lnR w="9525" cap="flat" cmpd="sng" algn="ctr">
                       <a:solidFill>
-                        <a:srgbClr val="F0D1D6"/>
+                        <a:srgbClr val="F6D5DA"/>
                       </a:solidFill>
                       <a:prstDash val="solid"/>
                     </a:lnR>
                     <a:lnT w="9525" cap="flat" cmpd="sng" algn="ctr">
                       <a:solidFill>
-                        <a:srgbClr val="F0D1D6"/>
+                        <a:srgbClr val="F6D5DA"/>
                       </a:solidFill>
                       <a:prstDash val="solid"/>
                     </a:lnT>
                     <a:lnB w="9525" cap="flat" cmpd="sng" algn="ctr">
                       <a:solidFill>
-                        <a:srgbClr val="F0D1D6"/>
+                        <a:srgbClr val="F6D5DA"/>
                       </a:solidFill>
                       <a:prstDash val="solid"/>
                     </a:lnB>
@@ -3926,7 +4075,7 @@
                       <a:r>
                         <a:rPr sz="1600" b="0">
                           <a:solidFill>
-                            <a:srgbClr val="2B2B2B"/>
+                            <a:srgbClr val="26231F"/>
                           </a:solidFill>
                         </a:rPr>
                         <a:t/>
@@ -3936,25 +4085,25 @@
                   <a:tcPr anchor="ctr" marL="73152" marR="73152">
                     <a:lnL w="9525" cap="flat" cmpd="sng" algn="ctr">
                       <a:solidFill>
-                        <a:srgbClr val="F0D1D6"/>
+                        <a:srgbClr val="F6D5DA"/>
                       </a:solidFill>
                       <a:prstDash val="solid"/>
                     </a:lnL>
                     <a:lnR w="9525" cap="flat" cmpd="sng" algn="ctr">
                       <a:solidFill>
-                        <a:srgbClr val="F0D1D6"/>
+                        <a:srgbClr val="F6D5DA"/>
                       </a:solidFill>
                       <a:prstDash val="solid"/>
                     </a:lnR>
                     <a:lnT w="9525" cap="flat" cmpd="sng" algn="ctr">
                       <a:solidFill>
-                        <a:srgbClr val="F0D1D6"/>
+                        <a:srgbClr val="F6D5DA"/>
                       </a:solidFill>
                       <a:prstDash val="solid"/>
                     </a:lnT>
                     <a:lnB w="9525" cap="flat" cmpd="sng" algn="ctr">
                       <a:solidFill>
-                        <a:srgbClr val="F0D1D6"/>
+                        <a:srgbClr val="F6D5DA"/>
                       </a:solidFill>
                       <a:prstDash val="solid"/>
                     </a:lnB>
@@ -3974,7 +4123,7 @@
                       <a:r>
                         <a:rPr sz="1600" b="1">
                           <a:solidFill>
-                            <a:srgbClr val="431920"/>
+                            <a:srgbClr val="49272D"/>
                           </a:solidFill>
                         </a:rPr>
                         <a:t>나이</a:t>
@@ -3984,30 +4133,30 @@
                   <a:tcPr anchor="ctr" marL="73152" marR="73152">
                     <a:lnL w="9525" cap="flat" cmpd="sng" algn="ctr">
                       <a:solidFill>
-                        <a:srgbClr val="F0D1D6"/>
+                        <a:srgbClr val="F6D5DA"/>
                       </a:solidFill>
                       <a:prstDash val="solid"/>
                     </a:lnL>
                     <a:lnR w="9525" cap="flat" cmpd="sng" algn="ctr">
                       <a:solidFill>
-                        <a:srgbClr val="F0D1D6"/>
+                        <a:srgbClr val="F6D5DA"/>
                       </a:solidFill>
                       <a:prstDash val="solid"/>
                     </a:lnR>
                     <a:lnT w="9525" cap="flat" cmpd="sng" algn="ctr">
                       <a:solidFill>
-                        <a:srgbClr val="F0D1D6"/>
+                        <a:srgbClr val="F6D5DA"/>
                       </a:solidFill>
                       <a:prstDash val="solid"/>
                     </a:lnT>
                     <a:lnB w="9525" cap="flat" cmpd="sng" algn="ctr">
                       <a:solidFill>
-                        <a:srgbClr val="F0D1D6"/>
+                        <a:srgbClr val="F6D5DA"/>
                       </a:solidFill>
                       <a:prstDash val="solid"/>
                     </a:lnB>
                     <a:solidFill>
-                      <a:srgbClr val="F0D1D6"/>
+                      <a:srgbClr val="F6D5DA"/>
                     </a:solidFill>
                   </a:tcPr>
                 </a:tc>
@@ -4020,7 +4169,7 @@
                       <a:r>
                         <a:rPr sz="1600" b="0">
                           <a:solidFill>
-                            <a:srgbClr val="2B2B2B"/>
+                            <a:srgbClr val="26231F"/>
                           </a:solidFill>
                         </a:rPr>
                         <a:t/>
@@ -4030,30 +4179,30 @@
                   <a:tcPr anchor="ctr" marL="73152" marR="73152">
                     <a:lnL w="9525" cap="flat" cmpd="sng" algn="ctr">
                       <a:solidFill>
-                        <a:srgbClr val="F0D1D6"/>
+                        <a:srgbClr val="F6D5DA"/>
                       </a:solidFill>
                       <a:prstDash val="solid"/>
                     </a:lnL>
                     <a:lnR w="9525" cap="flat" cmpd="sng" algn="ctr">
                       <a:solidFill>
-                        <a:srgbClr val="F0D1D6"/>
+                        <a:srgbClr val="F6D5DA"/>
                       </a:solidFill>
                       <a:prstDash val="solid"/>
                     </a:lnR>
                     <a:lnT w="9525" cap="flat" cmpd="sng" algn="ctr">
                       <a:solidFill>
-                        <a:srgbClr val="F0D1D6"/>
+                        <a:srgbClr val="F6D5DA"/>
                       </a:solidFill>
                       <a:prstDash val="solid"/>
                     </a:lnT>
                     <a:lnB w="9525" cap="flat" cmpd="sng" algn="ctr">
                       <a:solidFill>
-                        <a:srgbClr val="F0D1D6"/>
+                        <a:srgbClr val="F6D5DA"/>
                       </a:solidFill>
                       <a:prstDash val="solid"/>
                     </a:lnB>
                     <a:solidFill>
-                      <a:srgbClr val="F9F0F2"/>
+                      <a:srgbClr val="FBECEF"/>
                     </a:solidFill>
                   </a:tcPr>
                 </a:tc>
@@ -4066,7 +4215,7 @@
                       <a:r>
                         <a:rPr sz="1600" b="0">
                           <a:solidFill>
-                            <a:srgbClr val="2B2B2B"/>
+                            <a:srgbClr val="26231F"/>
                           </a:solidFill>
                         </a:rPr>
                         <a:t/>
@@ -4076,30 +4225,30 @@
                   <a:tcPr anchor="ctr" marL="73152" marR="73152">
                     <a:lnL w="9525" cap="flat" cmpd="sng" algn="ctr">
                       <a:solidFill>
-                        <a:srgbClr val="F0D1D6"/>
+                        <a:srgbClr val="F6D5DA"/>
                       </a:solidFill>
                       <a:prstDash val="solid"/>
                     </a:lnL>
                     <a:lnR w="9525" cap="flat" cmpd="sng" algn="ctr">
                       <a:solidFill>
-                        <a:srgbClr val="F0D1D6"/>
+                        <a:srgbClr val="F6D5DA"/>
                       </a:solidFill>
                       <a:prstDash val="solid"/>
                     </a:lnR>
                     <a:lnT w="9525" cap="flat" cmpd="sng" algn="ctr">
                       <a:solidFill>
-                        <a:srgbClr val="F0D1D6"/>
+                        <a:srgbClr val="F6D5DA"/>
                       </a:solidFill>
                       <a:prstDash val="solid"/>
                     </a:lnT>
                     <a:lnB w="9525" cap="flat" cmpd="sng" algn="ctr">
                       <a:solidFill>
-                        <a:srgbClr val="F0D1D6"/>
+                        <a:srgbClr val="F6D5DA"/>
                       </a:solidFill>
                       <a:prstDash val="solid"/>
                     </a:lnB>
                     <a:solidFill>
-                      <a:srgbClr val="F9F0F2"/>
+                      <a:srgbClr val="FBECEF"/>
                     </a:solidFill>
                   </a:tcPr>
                 </a:tc>
@@ -4112,7 +4261,7 @@
                       <a:r>
                         <a:rPr sz="1600" b="0">
                           <a:solidFill>
-                            <a:srgbClr val="2B2B2B"/>
+                            <a:srgbClr val="26231F"/>
                           </a:solidFill>
                         </a:rPr>
                         <a:t/>
@@ -4122,30 +4271,30 @@
                   <a:tcPr anchor="ctr" marL="73152" marR="73152">
                     <a:lnL w="9525" cap="flat" cmpd="sng" algn="ctr">
                       <a:solidFill>
-                        <a:srgbClr val="F0D1D6"/>
+                        <a:srgbClr val="F6D5DA"/>
                       </a:solidFill>
                       <a:prstDash val="solid"/>
                     </a:lnL>
                     <a:lnR w="9525" cap="flat" cmpd="sng" algn="ctr">
                       <a:solidFill>
-                        <a:srgbClr val="F0D1D6"/>
+                        <a:srgbClr val="F6D5DA"/>
                       </a:solidFill>
                       <a:prstDash val="solid"/>
                     </a:lnR>
                     <a:lnT w="9525" cap="flat" cmpd="sng" algn="ctr">
                       <a:solidFill>
-                        <a:srgbClr val="F0D1D6"/>
+                        <a:srgbClr val="F6D5DA"/>
                       </a:solidFill>
                       <a:prstDash val="solid"/>
                     </a:lnT>
                     <a:lnB w="9525" cap="flat" cmpd="sng" algn="ctr">
                       <a:solidFill>
-                        <a:srgbClr val="F0D1D6"/>
+                        <a:srgbClr val="F6D5DA"/>
                       </a:solidFill>
                       <a:prstDash val="solid"/>
                     </a:lnB>
                     <a:solidFill>
-                      <a:srgbClr val="F9F0F2"/>
+                      <a:srgbClr val="FBECEF"/>
                     </a:solidFill>
                   </a:tcPr>
                 </a:tc>
@@ -4160,7 +4309,7 @@
                       <a:r>
                         <a:rPr sz="1600" b="1">
                           <a:solidFill>
-                            <a:srgbClr val="431920"/>
+                            <a:srgbClr val="49272D"/>
                           </a:solidFill>
                         </a:rPr>
                         <a:t>직업·학교</a:t>
@@ -4170,30 +4319,30 @@
                   <a:tcPr anchor="ctr" marL="73152" marR="73152">
                     <a:lnL w="9525" cap="flat" cmpd="sng" algn="ctr">
                       <a:solidFill>
-                        <a:srgbClr val="F0D1D6"/>
+                        <a:srgbClr val="F6D5DA"/>
                       </a:solidFill>
                       <a:prstDash val="solid"/>
                     </a:lnL>
                     <a:lnR w="9525" cap="flat" cmpd="sng" algn="ctr">
                       <a:solidFill>
-                        <a:srgbClr val="F0D1D6"/>
+                        <a:srgbClr val="F6D5DA"/>
                       </a:solidFill>
                       <a:prstDash val="solid"/>
                     </a:lnR>
                     <a:lnT w="9525" cap="flat" cmpd="sng" algn="ctr">
                       <a:solidFill>
-                        <a:srgbClr val="F0D1D6"/>
+                        <a:srgbClr val="F6D5DA"/>
                       </a:solidFill>
                       <a:prstDash val="solid"/>
                     </a:lnT>
                     <a:lnB w="9525" cap="flat" cmpd="sng" algn="ctr">
                       <a:solidFill>
-                        <a:srgbClr val="F0D1D6"/>
+                        <a:srgbClr val="F6D5DA"/>
                       </a:solidFill>
                       <a:prstDash val="solid"/>
                     </a:lnB>
                     <a:solidFill>
-                      <a:srgbClr val="F0D1D6"/>
+                      <a:srgbClr val="F6D5DA"/>
                     </a:solidFill>
                   </a:tcPr>
                 </a:tc>
@@ -4206,7 +4355,7 @@
                       <a:r>
                         <a:rPr sz="1600" b="0">
                           <a:solidFill>
-                            <a:srgbClr val="2B2B2B"/>
+                            <a:srgbClr val="26231F"/>
                           </a:solidFill>
                         </a:rPr>
                         <a:t/>
@@ -4216,25 +4365,25 @@
                   <a:tcPr anchor="ctr" marL="73152" marR="73152">
                     <a:lnL w="9525" cap="flat" cmpd="sng" algn="ctr">
                       <a:solidFill>
-                        <a:srgbClr val="F0D1D6"/>
+                        <a:srgbClr val="F6D5DA"/>
                       </a:solidFill>
                       <a:prstDash val="solid"/>
                     </a:lnL>
                     <a:lnR w="9525" cap="flat" cmpd="sng" algn="ctr">
                       <a:solidFill>
-                        <a:srgbClr val="F0D1D6"/>
+                        <a:srgbClr val="F6D5DA"/>
                       </a:solidFill>
                       <a:prstDash val="solid"/>
                     </a:lnR>
                     <a:lnT w="9525" cap="flat" cmpd="sng" algn="ctr">
                       <a:solidFill>
-                        <a:srgbClr val="F0D1D6"/>
+                        <a:srgbClr val="F6D5DA"/>
                       </a:solidFill>
                       <a:prstDash val="solid"/>
                     </a:lnT>
                     <a:lnB w="9525" cap="flat" cmpd="sng" algn="ctr">
                       <a:solidFill>
-                        <a:srgbClr val="F0D1D6"/>
+                        <a:srgbClr val="F6D5DA"/>
                       </a:solidFill>
                       <a:prstDash val="solid"/>
                     </a:lnB>
@@ -4252,7 +4401,7 @@
                       <a:r>
                         <a:rPr sz="1600" b="0">
                           <a:solidFill>
-                            <a:srgbClr val="2B2B2B"/>
+                            <a:srgbClr val="26231F"/>
                           </a:solidFill>
                         </a:rPr>
                         <a:t/>
@@ -4262,25 +4411,25 @@
                   <a:tcPr anchor="ctr" marL="73152" marR="73152">
                     <a:lnL w="9525" cap="flat" cmpd="sng" algn="ctr">
                       <a:solidFill>
-                        <a:srgbClr val="F0D1D6"/>
+                        <a:srgbClr val="F6D5DA"/>
                       </a:solidFill>
                       <a:prstDash val="solid"/>
                     </a:lnL>
                     <a:lnR w="9525" cap="flat" cmpd="sng" algn="ctr">
                       <a:solidFill>
-                        <a:srgbClr val="F0D1D6"/>
+                        <a:srgbClr val="F6D5DA"/>
                       </a:solidFill>
                       <a:prstDash val="solid"/>
                     </a:lnR>
                     <a:lnT w="9525" cap="flat" cmpd="sng" algn="ctr">
                       <a:solidFill>
-                        <a:srgbClr val="F0D1D6"/>
+                        <a:srgbClr val="F6D5DA"/>
                       </a:solidFill>
                       <a:prstDash val="solid"/>
                     </a:lnT>
                     <a:lnB w="9525" cap="flat" cmpd="sng" algn="ctr">
                       <a:solidFill>
-                        <a:srgbClr val="F0D1D6"/>
+                        <a:srgbClr val="F6D5DA"/>
                       </a:solidFill>
                       <a:prstDash val="solid"/>
                     </a:lnB>
@@ -4298,7 +4447,7 @@
                       <a:r>
                         <a:rPr sz="1600" b="0">
                           <a:solidFill>
-                            <a:srgbClr val="2B2B2B"/>
+                            <a:srgbClr val="26231F"/>
                           </a:solidFill>
                         </a:rPr>
                         <a:t/>
@@ -4308,25 +4457,25 @@
                   <a:tcPr anchor="ctr" marL="73152" marR="73152">
                     <a:lnL w="9525" cap="flat" cmpd="sng" algn="ctr">
                       <a:solidFill>
-                        <a:srgbClr val="F0D1D6"/>
+                        <a:srgbClr val="F6D5DA"/>
                       </a:solidFill>
                       <a:prstDash val="solid"/>
                     </a:lnL>
                     <a:lnR w="9525" cap="flat" cmpd="sng" algn="ctr">
                       <a:solidFill>
-                        <a:srgbClr val="F0D1D6"/>
+                        <a:srgbClr val="F6D5DA"/>
                       </a:solidFill>
                       <a:prstDash val="solid"/>
                     </a:lnR>
                     <a:lnT w="9525" cap="flat" cmpd="sng" algn="ctr">
                       <a:solidFill>
-                        <a:srgbClr val="F0D1D6"/>
+                        <a:srgbClr val="F6D5DA"/>
                       </a:solidFill>
                       <a:prstDash val="solid"/>
                     </a:lnT>
                     <a:lnB w="9525" cap="flat" cmpd="sng" algn="ctr">
                       <a:solidFill>
-                        <a:srgbClr val="F0D1D6"/>
+                        <a:srgbClr val="F6D5DA"/>
                       </a:solidFill>
                       <a:prstDash val="solid"/>
                     </a:lnB>
@@ -4346,7 +4495,7 @@
                       <a:r>
                         <a:rPr sz="1600" b="1">
                           <a:solidFill>
-                            <a:srgbClr val="431920"/>
+                            <a:srgbClr val="49272D"/>
                           </a:solidFill>
                         </a:rPr>
                         <a:t>메모</a:t>
@@ -4356,30 +4505,30 @@
                   <a:tcPr anchor="ctr" marL="73152" marR="73152">
                     <a:lnL w="9525" cap="flat" cmpd="sng" algn="ctr">
                       <a:solidFill>
-                        <a:srgbClr val="F0D1D6"/>
+                        <a:srgbClr val="F6D5DA"/>
                       </a:solidFill>
                       <a:prstDash val="solid"/>
                     </a:lnL>
                     <a:lnR w="9525" cap="flat" cmpd="sng" algn="ctr">
                       <a:solidFill>
-                        <a:srgbClr val="F0D1D6"/>
+                        <a:srgbClr val="F6D5DA"/>
                       </a:solidFill>
                       <a:prstDash val="solid"/>
                     </a:lnR>
                     <a:lnT w="9525" cap="flat" cmpd="sng" algn="ctr">
                       <a:solidFill>
-                        <a:srgbClr val="F0D1D6"/>
+                        <a:srgbClr val="F6D5DA"/>
                       </a:solidFill>
                       <a:prstDash val="solid"/>
                     </a:lnT>
                     <a:lnB w="9525" cap="flat" cmpd="sng" algn="ctr">
                       <a:solidFill>
-                        <a:srgbClr val="F0D1D6"/>
+                        <a:srgbClr val="F6D5DA"/>
                       </a:solidFill>
                       <a:prstDash val="solid"/>
                     </a:lnB>
                     <a:solidFill>
-                      <a:srgbClr val="F0D1D6"/>
+                      <a:srgbClr val="F6D5DA"/>
                     </a:solidFill>
                   </a:tcPr>
                 </a:tc>
@@ -4392,7 +4541,7 @@
                       <a:r>
                         <a:rPr sz="1600" b="0">
                           <a:solidFill>
-                            <a:srgbClr val="2B2B2B"/>
+                            <a:srgbClr val="26231F"/>
                           </a:solidFill>
                         </a:rPr>
                         <a:t/>
@@ -4402,30 +4551,30 @@
                   <a:tcPr anchor="ctr" marL="73152" marR="73152">
                     <a:lnL w="9525" cap="flat" cmpd="sng" algn="ctr">
                       <a:solidFill>
-                        <a:srgbClr val="F0D1D6"/>
+                        <a:srgbClr val="F6D5DA"/>
                       </a:solidFill>
                       <a:prstDash val="solid"/>
                     </a:lnL>
                     <a:lnR w="9525" cap="flat" cmpd="sng" algn="ctr">
                       <a:solidFill>
-                        <a:srgbClr val="F0D1D6"/>
+                        <a:srgbClr val="F6D5DA"/>
                       </a:solidFill>
                       <a:prstDash val="solid"/>
                     </a:lnR>
                     <a:lnT w="9525" cap="flat" cmpd="sng" algn="ctr">
                       <a:solidFill>
-                        <a:srgbClr val="F0D1D6"/>
+                        <a:srgbClr val="F6D5DA"/>
                       </a:solidFill>
                       <a:prstDash val="solid"/>
                     </a:lnT>
                     <a:lnB w="9525" cap="flat" cmpd="sng" algn="ctr">
                       <a:solidFill>
-                        <a:srgbClr val="F0D1D6"/>
+                        <a:srgbClr val="F6D5DA"/>
                       </a:solidFill>
                       <a:prstDash val="solid"/>
                     </a:lnB>
                     <a:solidFill>
-                      <a:srgbClr val="F9F0F2"/>
+                      <a:srgbClr val="FBECEF"/>
                     </a:solidFill>
                   </a:tcPr>
                 </a:tc>
@@ -4438,7 +4587,7 @@
                       <a:r>
                         <a:rPr sz="1600" b="0">
                           <a:solidFill>
-                            <a:srgbClr val="2B2B2B"/>
+                            <a:srgbClr val="26231F"/>
                           </a:solidFill>
                         </a:rPr>
                         <a:t/>
@@ -4448,30 +4597,30 @@
                   <a:tcPr anchor="ctr" marL="73152" marR="73152">
                     <a:lnL w="9525" cap="flat" cmpd="sng" algn="ctr">
                       <a:solidFill>
-                        <a:srgbClr val="F0D1D6"/>
+                        <a:srgbClr val="F6D5DA"/>
                       </a:solidFill>
                       <a:prstDash val="solid"/>
                     </a:lnL>
                     <a:lnR w="9525" cap="flat" cmpd="sng" algn="ctr">
                       <a:solidFill>
-                        <a:srgbClr val="F0D1D6"/>
+                        <a:srgbClr val="F6D5DA"/>
                       </a:solidFill>
                       <a:prstDash val="solid"/>
                     </a:lnR>
                     <a:lnT w="9525" cap="flat" cmpd="sng" algn="ctr">
                       <a:solidFill>
-                        <a:srgbClr val="F0D1D6"/>
+                        <a:srgbClr val="F6D5DA"/>
                       </a:solidFill>
                       <a:prstDash val="solid"/>
                     </a:lnT>
                     <a:lnB w="9525" cap="flat" cmpd="sng" algn="ctr">
                       <a:solidFill>
-                        <a:srgbClr val="F0D1D6"/>
+                        <a:srgbClr val="F6D5DA"/>
                       </a:solidFill>
                       <a:prstDash val="solid"/>
                     </a:lnB>
                     <a:solidFill>
-                      <a:srgbClr val="F9F0F2"/>
+                      <a:srgbClr val="FBECEF"/>
                     </a:solidFill>
                   </a:tcPr>
                 </a:tc>
@@ -4484,7 +4633,7 @@
                       <a:r>
                         <a:rPr sz="1600" b="0">
                           <a:solidFill>
-                            <a:srgbClr val="2B2B2B"/>
+                            <a:srgbClr val="26231F"/>
                           </a:solidFill>
                         </a:rPr>
                         <a:t/>
@@ -4494,30 +4643,30 @@
                   <a:tcPr anchor="ctr" marL="73152" marR="73152">
                     <a:lnL w="9525" cap="flat" cmpd="sng" algn="ctr">
                       <a:solidFill>
-                        <a:srgbClr val="F0D1D6"/>
+                        <a:srgbClr val="F6D5DA"/>
                       </a:solidFill>
                       <a:prstDash val="solid"/>
                     </a:lnL>
                     <a:lnR w="9525" cap="flat" cmpd="sng" algn="ctr">
                       <a:solidFill>
-                        <a:srgbClr val="F0D1D6"/>
+                        <a:srgbClr val="F6D5DA"/>
                       </a:solidFill>
                       <a:prstDash val="solid"/>
                     </a:lnR>
                     <a:lnT w="9525" cap="flat" cmpd="sng" algn="ctr">
                       <a:solidFill>
-                        <a:srgbClr val="F0D1D6"/>
+                        <a:srgbClr val="F6D5DA"/>
                       </a:solidFill>
                       <a:prstDash val="solid"/>
                     </a:lnT>
                     <a:lnB w="9525" cap="flat" cmpd="sng" algn="ctr">
                       <a:solidFill>
-                        <a:srgbClr val="F0D1D6"/>
+                        <a:srgbClr val="F6D5DA"/>
                       </a:solidFill>
                       <a:prstDash val="solid"/>
                     </a:lnB>
                     <a:solidFill>
-                      <a:srgbClr val="F9F0F2"/>
+                      <a:srgbClr val="FBECEF"/>
                     </a:solidFill>
                   </a:tcPr>
                 </a:tc>
@@ -4560,14 +4709,14 @@
         </p:nvSpPr>
         <p:spPr>
           <a:xfrm>
-            <a:off x="-182880" y="6144768"/>
-            <a:ext cx="12557455" cy="731520"/>
-          </a:xfrm>
-          <a:prstGeom prst="wave">
+            <a:off x="0" y="6565392"/>
+            <a:ext cx="12191695" cy="292608"/>
+          </a:xfrm>
+          <a:prstGeom prst="rect">
             <a:avLst/>
           </a:prstGeom>
           <a:solidFill>
-            <a:srgbClr val="F0D1D6"/>
+            <a:srgbClr val="EBADB8"/>
           </a:solidFill>
           <a:ln>
             <a:noFill/>
@@ -4589,14 +4738,83 @@
         </p:nvSpPr>
         <p:spPr>
           <a:xfrm>
-            <a:off x="-182880" y="6400800"/>
-            <a:ext cx="12557455" cy="502920"/>
-          </a:xfrm>
-          <a:prstGeom prst="wave">
+            <a:off x="640080" y="566928"/>
+            <a:ext cx="64008" cy="868680"/>
+          </a:xfrm>
+          <a:prstGeom prst="roundRect">
+            <a:avLst>
+              <a:gd name="adj" fmla="val 50000"/>
+            </a:avLst>
+          </a:prstGeom>
+          <a:solidFill>
+            <a:srgbClr val="E198A4"/>
+          </a:solidFill>
+          <a:ln>
+            <a:noFill/>
+          </a:ln>
+        </p:spPr>
+        <p:txBody>
+          <a:bodyPr rtlCol="0" anchor="ctr"/>
+          <a:lstStyle/>
+          <a:p>
+            <a:pPr algn="ctr"/>
+          </a:p>
+        </p:txBody>
+      </p:sp>
+      <p:sp>
+        <p:nvSpPr>
+          <p:cNvPr id="5" name="상단 라벨"/>
+          <p:cNvSpPr txBox="1"/>
+          <p:nvPr/>
+        </p:nvSpPr>
+        <p:spPr>
+          <a:xfrm>
+            <a:off x="868680" y="274320"/>
+            <a:ext cx="5486400" cy="274320"/>
+          </a:xfrm>
+          <a:prstGeom prst="rect">
+            <a:avLst/>
+          </a:prstGeom>
+          <a:noFill/>
+        </p:spPr>
+        <p:txBody>
+          <a:bodyPr wrap="square" lIns="54864" rIns="54864" tIns="27432" bIns="27432" anchor="ctr">
+            <a:noAutofit/>
+          </a:bodyPr>
+          <a:lstStyle/>
+          <a:p>
+            <a:pPr algn="l">
+              <a:lnSpc>
+                <a:spcPct val="115000"/>
+              </a:lnSpc>
+            </a:pPr>
+            <a:r>
+              <a:rPr sz="900" b="1" i="0" spc="250">
+                <a:solidFill>
+                  <a:srgbClr val="8E8780"/>
+                </a:solidFill>
+              </a:rPr>
+              <a:t>INSURANCE CHECK</a:t>
+            </a:r>
+          </a:p>
+        </p:txBody>
+      </p:sp>
+      <p:sp>
+        <p:nvSpPr>
+          <p:cNvPr id="6" name="포인트"/>
+          <p:cNvSpPr/>
+          <p:nvPr/>
+        </p:nvSpPr>
+        <p:spPr>
+          <a:xfrm>
+            <a:off x="11167567" y="667512"/>
+            <a:ext cx="310896" cy="310896"/>
+          </a:xfrm>
+          <a:prstGeom prst="mathPlus">
             <a:avLst/>
           </a:prstGeom>
           <a:solidFill>
-            <a:srgbClr val="8D3443"/>
+            <a:srgbClr val="EBADB8"/>
           </a:solidFill>
           <a:ln>
             <a:noFill/>
@@ -4622,8 +4840,8 @@
         </p:nvSpPr>
         <p:spPr>
           <a:xfrm>
-            <a:off x="640080" y="457200"/>
-            <a:ext cx="9722815" cy="868680"/>
+            <a:off x="868680" y="566928"/>
+            <a:ext cx="9448495" cy="868680"/>
           </a:xfrm>
         </p:spPr>
         <p:txBody>
@@ -4640,7 +4858,7 @@
             <a:r>
               <a:rPr sz="3000" b="1" i="0">
                 <a:solidFill>
-                  <a:srgbClr val="431920"/>
+                  <a:srgbClr val="26231F"/>
                 </a:solidFill>
               </a:rPr>
               <a:t>가입한 보험 목록</a:t>
@@ -4650,14 +4868,14 @@
       </p:sp>
       <p:graphicFrame>
         <p:nvGraphicFramePr>
-          <p:cNvPr id="5" name="표"/>
+          <p:cNvPr id="7" name="표"/>
           <p:cNvGraphicFramePr>
             <a:graphicFrameLocks noGrp="1"/>
           </p:cNvGraphicFramePr>
           <p:nvPr/>
         </p:nvGraphicFramePr>
         <p:xfrm>
-          <a:off x="640080" y="1554480"/>
+          <a:off x="640080" y="1783080"/>
           <a:ext cx="10911535" cy="4224528"/>
         </p:xfrm>
         <a:graphic>
@@ -4683,7 +4901,7 @@
                       <a:r>
                         <a:rPr sz="1400" b="1">
                           <a:solidFill>
-                            <a:srgbClr val="FFFFFF"/>
+                            <a:srgbClr val="26231F"/>
                           </a:solidFill>
                         </a:rPr>
                         <a:t>보험회사</a:t>
@@ -4693,30 +4911,30 @@
                   <a:tcPr anchor="ctr" marL="73152" marR="73152">
                     <a:lnL w="9525" cap="flat" cmpd="sng" algn="ctr">
                       <a:solidFill>
-                        <a:srgbClr val="8D3443"/>
+                        <a:srgbClr val="E198A4"/>
                       </a:solidFill>
                       <a:prstDash val="solid"/>
                     </a:lnL>
                     <a:lnR w="9525" cap="flat" cmpd="sng" algn="ctr">
                       <a:solidFill>
-                        <a:srgbClr val="8D3443"/>
+                        <a:srgbClr val="E198A4"/>
                       </a:solidFill>
                       <a:prstDash val="solid"/>
                     </a:lnR>
                     <a:lnT w="9525" cap="flat" cmpd="sng" algn="ctr">
                       <a:solidFill>
-                        <a:srgbClr val="8D3443"/>
+                        <a:srgbClr val="E198A4"/>
                       </a:solidFill>
                       <a:prstDash val="solid"/>
                     </a:lnT>
                     <a:lnB w="9525" cap="flat" cmpd="sng" algn="ctr">
                       <a:solidFill>
-                        <a:srgbClr val="8D3443"/>
+                        <a:srgbClr val="E198A4"/>
                       </a:solidFill>
                       <a:prstDash val="solid"/>
                     </a:lnB>
                     <a:solidFill>
-                      <a:srgbClr val="8D3443"/>
+                      <a:srgbClr val="E198A4"/>
                     </a:solidFill>
                   </a:tcPr>
                 </a:tc>
@@ -4729,7 +4947,7 @@
                       <a:r>
                         <a:rPr sz="1400" b="1">
                           <a:solidFill>
-                            <a:srgbClr val="FFFFFF"/>
+                            <a:srgbClr val="26231F"/>
                           </a:solidFill>
                         </a:rPr>
                         <a:t>상품명</a:t>
@@ -4739,30 +4957,30 @@
                   <a:tcPr anchor="ctr" marL="73152" marR="73152">
                     <a:lnL w="9525" cap="flat" cmpd="sng" algn="ctr">
                       <a:solidFill>
-                        <a:srgbClr val="8D3443"/>
+                        <a:srgbClr val="E198A4"/>
                       </a:solidFill>
                       <a:prstDash val="solid"/>
                     </a:lnL>
                     <a:lnR w="9525" cap="flat" cmpd="sng" algn="ctr">
                       <a:solidFill>
-                        <a:srgbClr val="8D3443"/>
+                        <a:srgbClr val="E198A4"/>
                       </a:solidFill>
                       <a:prstDash val="solid"/>
                     </a:lnR>
                     <a:lnT w="9525" cap="flat" cmpd="sng" algn="ctr">
                       <a:solidFill>
-                        <a:srgbClr val="8D3443"/>
+                        <a:srgbClr val="E198A4"/>
                       </a:solidFill>
                       <a:prstDash val="solid"/>
                     </a:lnT>
                     <a:lnB w="9525" cap="flat" cmpd="sng" algn="ctr">
                       <a:solidFill>
-                        <a:srgbClr val="8D3443"/>
+                        <a:srgbClr val="E198A4"/>
                       </a:solidFill>
                       <a:prstDash val="solid"/>
                     </a:lnB>
                     <a:solidFill>
-                      <a:srgbClr val="8D3443"/>
+                      <a:srgbClr val="E198A4"/>
                     </a:solidFill>
                   </a:tcPr>
                 </a:tc>
@@ -4775,7 +4993,7 @@
                       <a:r>
                         <a:rPr sz="1400" b="1">
                           <a:solidFill>
-                            <a:srgbClr val="FFFFFF"/>
+                            <a:srgbClr val="26231F"/>
                           </a:solidFill>
                         </a:rPr>
                         <a:t>종류</a:t>
@@ -4785,30 +5003,30 @@
                   <a:tcPr anchor="ctr" marL="73152" marR="73152">
                     <a:lnL w="9525" cap="flat" cmpd="sng" algn="ctr">
                       <a:solidFill>
-                        <a:srgbClr val="8D3443"/>
+                        <a:srgbClr val="E198A4"/>
                       </a:solidFill>
                       <a:prstDash val="solid"/>
                     </a:lnL>
                     <a:lnR w="9525" cap="flat" cmpd="sng" algn="ctr">
                       <a:solidFill>
-                        <a:srgbClr val="8D3443"/>
+                        <a:srgbClr val="E198A4"/>
                       </a:solidFill>
                       <a:prstDash val="solid"/>
                     </a:lnR>
                     <a:lnT w="9525" cap="flat" cmpd="sng" algn="ctr">
                       <a:solidFill>
-                        <a:srgbClr val="8D3443"/>
+                        <a:srgbClr val="E198A4"/>
                       </a:solidFill>
                       <a:prstDash val="solid"/>
                     </a:lnT>
                     <a:lnB w="9525" cap="flat" cmpd="sng" algn="ctr">
                       <a:solidFill>
-                        <a:srgbClr val="8D3443"/>
+                        <a:srgbClr val="E198A4"/>
                       </a:solidFill>
                       <a:prstDash val="solid"/>
                     </a:lnB>
                     <a:solidFill>
-                      <a:srgbClr val="8D3443"/>
+                      <a:srgbClr val="E198A4"/>
                     </a:solidFill>
                   </a:tcPr>
                 </a:tc>
@@ -4821,7 +5039,7 @@
                       <a:r>
                         <a:rPr sz="1400" b="1">
                           <a:solidFill>
-                            <a:srgbClr val="FFFFFF"/>
+                            <a:srgbClr val="26231F"/>
                           </a:solidFill>
                         </a:rPr>
                         <a:t>만기일</a:t>
@@ -4831,30 +5049,30 @@
                   <a:tcPr anchor="ctr" marL="73152" marR="73152">
                     <a:lnL w="9525" cap="flat" cmpd="sng" algn="ctr">
                       <a:solidFill>
-                        <a:srgbClr val="8D3443"/>
+                        <a:srgbClr val="E198A4"/>
                       </a:solidFill>
                       <a:prstDash val="solid"/>
                     </a:lnL>
                     <a:lnR w="9525" cap="flat" cmpd="sng" algn="ctr">
                       <a:solidFill>
-                        <a:srgbClr val="8D3443"/>
+                        <a:srgbClr val="E198A4"/>
                       </a:solidFill>
                       <a:prstDash val="solid"/>
                     </a:lnR>
                     <a:lnT w="9525" cap="flat" cmpd="sng" algn="ctr">
                       <a:solidFill>
-                        <a:srgbClr val="8D3443"/>
+                        <a:srgbClr val="E198A4"/>
                       </a:solidFill>
                       <a:prstDash val="solid"/>
                     </a:lnT>
                     <a:lnB w="9525" cap="flat" cmpd="sng" algn="ctr">
                       <a:solidFill>
-                        <a:srgbClr val="8D3443"/>
+                        <a:srgbClr val="E198A4"/>
                       </a:solidFill>
                       <a:prstDash val="solid"/>
                     </a:lnB>
                     <a:solidFill>
-                      <a:srgbClr val="8D3443"/>
+                      <a:srgbClr val="E198A4"/>
                     </a:solidFill>
                   </a:tcPr>
                 </a:tc>
@@ -4867,7 +5085,7 @@
                       <a:r>
                         <a:rPr sz="1400" b="1">
                           <a:solidFill>
-                            <a:srgbClr val="FFFFFF"/>
+                            <a:srgbClr val="26231F"/>
                           </a:solidFill>
                         </a:rPr>
                         <a:t>월 보험료</a:t>
@@ -4877,30 +5095,30 @@
                   <a:tcPr anchor="ctr" marL="73152" marR="73152">
                     <a:lnL w="9525" cap="flat" cmpd="sng" algn="ctr">
                       <a:solidFill>
-                        <a:srgbClr val="8D3443"/>
+                        <a:srgbClr val="E198A4"/>
                       </a:solidFill>
                       <a:prstDash val="solid"/>
                     </a:lnL>
                     <a:lnR w="9525" cap="flat" cmpd="sng" algn="ctr">
                       <a:solidFill>
-                        <a:srgbClr val="8D3443"/>
+                        <a:srgbClr val="E198A4"/>
                       </a:solidFill>
                       <a:prstDash val="solid"/>
                     </a:lnR>
                     <a:lnT w="9525" cap="flat" cmpd="sng" algn="ctr">
                       <a:solidFill>
-                        <a:srgbClr val="8D3443"/>
+                        <a:srgbClr val="E198A4"/>
                       </a:solidFill>
                       <a:prstDash val="solid"/>
                     </a:lnT>
                     <a:lnB w="9525" cap="flat" cmpd="sng" algn="ctr">
                       <a:solidFill>
-                        <a:srgbClr val="8D3443"/>
+                        <a:srgbClr val="E198A4"/>
                       </a:solidFill>
                       <a:prstDash val="solid"/>
                     </a:lnB>
                     <a:solidFill>
-                      <a:srgbClr val="8D3443"/>
+                      <a:srgbClr val="E198A4"/>
                     </a:solidFill>
                   </a:tcPr>
                 </a:tc>
@@ -4915,7 +5133,7 @@
                       <a:r>
                         <a:rPr sz="1400" b="0">
                           <a:solidFill>
-                            <a:srgbClr val="2B2B2B"/>
+                            <a:srgbClr val="26231F"/>
                           </a:solidFill>
                         </a:rPr>
                         <a:t/>
@@ -4925,25 +5143,25 @@
                   <a:tcPr anchor="ctr" marL="73152" marR="73152">
                     <a:lnL w="9525" cap="flat" cmpd="sng" algn="ctr">
                       <a:solidFill>
-                        <a:srgbClr val="F0D1D6"/>
+                        <a:srgbClr val="F6D5DA"/>
                       </a:solidFill>
                       <a:prstDash val="solid"/>
                     </a:lnL>
                     <a:lnR w="9525" cap="flat" cmpd="sng" algn="ctr">
                       <a:solidFill>
-                        <a:srgbClr val="F0D1D6"/>
+                        <a:srgbClr val="F6D5DA"/>
                       </a:solidFill>
                       <a:prstDash val="solid"/>
                     </a:lnR>
                     <a:lnT w="9525" cap="flat" cmpd="sng" algn="ctr">
                       <a:solidFill>
-                        <a:srgbClr val="F0D1D6"/>
+                        <a:srgbClr val="F6D5DA"/>
                       </a:solidFill>
                       <a:prstDash val="solid"/>
                     </a:lnT>
                     <a:lnB w="9525" cap="flat" cmpd="sng" algn="ctr">
                       <a:solidFill>
-                        <a:srgbClr val="F0D1D6"/>
+                        <a:srgbClr val="F6D5DA"/>
                       </a:solidFill>
                       <a:prstDash val="solid"/>
                     </a:lnB>
@@ -4961,7 +5179,7 @@
                       <a:r>
                         <a:rPr sz="1400" b="0">
                           <a:solidFill>
-                            <a:srgbClr val="2B2B2B"/>
+                            <a:srgbClr val="26231F"/>
                           </a:solidFill>
                         </a:rPr>
                         <a:t/>
@@ -4971,25 +5189,25 @@
                   <a:tcPr anchor="ctr" marL="73152" marR="73152">
                     <a:lnL w="9525" cap="flat" cmpd="sng" algn="ctr">
                       <a:solidFill>
-                        <a:srgbClr val="F0D1D6"/>
+                        <a:srgbClr val="F6D5DA"/>
                       </a:solidFill>
                       <a:prstDash val="solid"/>
                     </a:lnL>
                     <a:lnR w="9525" cap="flat" cmpd="sng" algn="ctr">
                       <a:solidFill>
-                        <a:srgbClr val="F0D1D6"/>
+                        <a:srgbClr val="F6D5DA"/>
                       </a:solidFill>
                       <a:prstDash val="solid"/>
                     </a:lnR>
                     <a:lnT w="9525" cap="flat" cmpd="sng" algn="ctr">
                       <a:solidFill>
-                        <a:srgbClr val="F0D1D6"/>
+                        <a:srgbClr val="F6D5DA"/>
                       </a:solidFill>
                       <a:prstDash val="solid"/>
                     </a:lnT>
                     <a:lnB w="9525" cap="flat" cmpd="sng" algn="ctr">
                       <a:solidFill>
-                        <a:srgbClr val="F0D1D6"/>
+                        <a:srgbClr val="F6D5DA"/>
                       </a:solidFill>
                       <a:prstDash val="solid"/>
                     </a:lnB>
@@ -5007,7 +5225,7 @@
                       <a:r>
                         <a:rPr sz="1400" b="0">
                           <a:solidFill>
-                            <a:srgbClr val="2B2B2B"/>
+                            <a:srgbClr val="26231F"/>
                           </a:solidFill>
                         </a:rPr>
                         <a:t/>
@@ -5017,25 +5235,25 @@
                   <a:tcPr anchor="ctr" marL="73152" marR="73152">
                     <a:lnL w="9525" cap="flat" cmpd="sng" algn="ctr">
                       <a:solidFill>
-                        <a:srgbClr val="F0D1D6"/>
+                        <a:srgbClr val="F6D5DA"/>
                       </a:solidFill>
                       <a:prstDash val="solid"/>
                     </a:lnL>
                     <a:lnR w="9525" cap="flat" cmpd="sng" algn="ctr">
                       <a:solidFill>
-                        <a:srgbClr val="F0D1D6"/>
+                        <a:srgbClr val="F6D5DA"/>
                       </a:solidFill>
                       <a:prstDash val="solid"/>
                     </a:lnR>
                     <a:lnT w="9525" cap="flat" cmpd="sng" algn="ctr">
                       <a:solidFill>
-                        <a:srgbClr val="F0D1D6"/>
+                        <a:srgbClr val="F6D5DA"/>
                       </a:solidFill>
                       <a:prstDash val="solid"/>
                     </a:lnT>
                     <a:lnB w="9525" cap="flat" cmpd="sng" algn="ctr">
                       <a:solidFill>
-                        <a:srgbClr val="F0D1D6"/>
+                        <a:srgbClr val="F6D5DA"/>
                       </a:solidFill>
                       <a:prstDash val="solid"/>
                     </a:lnB>
@@ -5053,7 +5271,7 @@
                       <a:r>
                         <a:rPr sz="1400" b="0">
                           <a:solidFill>
-                            <a:srgbClr val="2B2B2B"/>
+                            <a:srgbClr val="26231F"/>
                           </a:solidFill>
                         </a:rPr>
                         <a:t/>
@@ -5063,25 +5281,25 @@
                   <a:tcPr anchor="ctr" marL="73152" marR="73152">
                     <a:lnL w="9525" cap="flat" cmpd="sng" algn="ctr">
                       <a:solidFill>
-                        <a:srgbClr val="F0D1D6"/>
+                        <a:srgbClr val="F6D5DA"/>
                       </a:solidFill>
                       <a:prstDash val="solid"/>
                     </a:lnL>
                     <a:lnR w="9525" cap="flat" cmpd="sng" algn="ctr">
                       <a:solidFill>
-                        <a:srgbClr val="F0D1D6"/>
+                        <a:srgbClr val="F6D5DA"/>
                       </a:solidFill>
                       <a:prstDash val="solid"/>
                     </a:lnR>
                     <a:lnT w="9525" cap="flat" cmpd="sng" algn="ctr">
                       <a:solidFill>
-                        <a:srgbClr val="F0D1D6"/>
+                        <a:srgbClr val="F6D5DA"/>
                       </a:solidFill>
                       <a:prstDash val="solid"/>
                     </a:lnT>
                     <a:lnB w="9525" cap="flat" cmpd="sng" algn="ctr">
                       <a:solidFill>
-                        <a:srgbClr val="F0D1D6"/>
+                        <a:srgbClr val="F6D5DA"/>
                       </a:solidFill>
                       <a:prstDash val="solid"/>
                     </a:lnB>
@@ -5099,7 +5317,7 @@
                       <a:r>
                         <a:rPr sz="1400" b="0">
                           <a:solidFill>
-                            <a:srgbClr val="2B2B2B"/>
+                            <a:srgbClr val="26231F"/>
                           </a:solidFill>
                         </a:rPr>
                         <a:t/>
@@ -5109,25 +5327,25 @@
                   <a:tcPr anchor="ctr" marL="73152" marR="73152">
                     <a:lnL w="9525" cap="flat" cmpd="sng" algn="ctr">
                       <a:solidFill>
-                        <a:srgbClr val="F0D1D6"/>
+                        <a:srgbClr val="F6D5DA"/>
                       </a:solidFill>
                       <a:prstDash val="solid"/>
                     </a:lnL>
                     <a:lnR w="9525" cap="flat" cmpd="sng" algn="ctr">
                       <a:solidFill>
-                        <a:srgbClr val="F0D1D6"/>
+                        <a:srgbClr val="F6D5DA"/>
                       </a:solidFill>
                       <a:prstDash val="solid"/>
                     </a:lnR>
                     <a:lnT w="9525" cap="flat" cmpd="sng" algn="ctr">
                       <a:solidFill>
-                        <a:srgbClr val="F0D1D6"/>
+                        <a:srgbClr val="F6D5DA"/>
                       </a:solidFill>
                       <a:prstDash val="solid"/>
                     </a:lnT>
                     <a:lnB w="9525" cap="flat" cmpd="sng" algn="ctr">
                       <a:solidFill>
-                        <a:srgbClr val="F0D1D6"/>
+                        <a:srgbClr val="F6D5DA"/>
                       </a:solidFill>
                       <a:prstDash val="solid"/>
                     </a:lnB>
@@ -5147,7 +5365,7 @@
                       <a:r>
                         <a:rPr sz="1400" b="0">
                           <a:solidFill>
-                            <a:srgbClr val="2B2B2B"/>
+                            <a:srgbClr val="26231F"/>
                           </a:solidFill>
                         </a:rPr>
                         <a:t/>
@@ -5157,30 +5375,30 @@
                   <a:tcPr anchor="ctr" marL="73152" marR="73152">
                     <a:lnL w="9525" cap="flat" cmpd="sng" algn="ctr">
                       <a:solidFill>
-                        <a:srgbClr val="F0D1D6"/>
+                        <a:srgbClr val="F6D5DA"/>
                       </a:solidFill>
                       <a:prstDash val="solid"/>
                     </a:lnL>
                     <a:lnR w="9525" cap="flat" cmpd="sng" algn="ctr">
                       <a:solidFill>
-                        <a:srgbClr val="F0D1D6"/>
+                        <a:srgbClr val="F6D5DA"/>
                       </a:solidFill>
                       <a:prstDash val="solid"/>
                     </a:lnR>
                     <a:lnT w="9525" cap="flat" cmpd="sng" algn="ctr">
                       <a:solidFill>
-                        <a:srgbClr val="F0D1D6"/>
+                        <a:srgbClr val="F6D5DA"/>
                       </a:solidFill>
                       <a:prstDash val="solid"/>
                     </a:lnT>
                     <a:lnB w="9525" cap="flat" cmpd="sng" algn="ctr">
                       <a:solidFill>
-                        <a:srgbClr val="F0D1D6"/>
+                        <a:srgbClr val="F6D5DA"/>
                       </a:solidFill>
                       <a:prstDash val="solid"/>
                     </a:lnB>
                     <a:solidFill>
-                      <a:srgbClr val="F9F0F2"/>
+                      <a:srgbClr val="FBECEF"/>
                     </a:solidFill>
                   </a:tcPr>
                 </a:tc>
@@ -5193,7 +5411,7 @@
                       <a:r>
                         <a:rPr sz="1400" b="0">
                           <a:solidFill>
-                            <a:srgbClr val="2B2B2B"/>
+                            <a:srgbClr val="26231F"/>
                           </a:solidFill>
                         </a:rPr>
                         <a:t/>
@@ -5203,30 +5421,30 @@
                   <a:tcPr anchor="ctr" marL="73152" marR="73152">
                     <a:lnL w="9525" cap="flat" cmpd="sng" algn="ctr">
                       <a:solidFill>
-                        <a:srgbClr val="F0D1D6"/>
+                        <a:srgbClr val="F6D5DA"/>
                       </a:solidFill>
                       <a:prstDash val="solid"/>
                     </a:lnL>
                     <a:lnR w="9525" cap="flat" cmpd="sng" algn="ctr">
                       <a:solidFill>
-                        <a:srgbClr val="F0D1D6"/>
+                        <a:srgbClr val="F6D5DA"/>
                       </a:solidFill>
                       <a:prstDash val="solid"/>
                     </a:lnR>
                     <a:lnT w="9525" cap="flat" cmpd="sng" algn="ctr">
                       <a:solidFill>
-                        <a:srgbClr val="F0D1D6"/>
+                        <a:srgbClr val="F6D5DA"/>
                       </a:solidFill>
                       <a:prstDash val="solid"/>
                     </a:lnT>
                     <a:lnB w="9525" cap="flat" cmpd="sng" algn="ctr">
                       <a:solidFill>
-                        <a:srgbClr val="F0D1D6"/>
+                        <a:srgbClr val="F6D5DA"/>
                       </a:solidFill>
                       <a:prstDash val="solid"/>
                     </a:lnB>
                     <a:solidFill>
-                      <a:srgbClr val="F9F0F2"/>
+                      <a:srgbClr val="FBECEF"/>
                     </a:solidFill>
                   </a:tcPr>
                 </a:tc>
@@ -5239,7 +5457,7 @@
                       <a:r>
                         <a:rPr sz="1400" b="0">
                           <a:solidFill>
-                            <a:srgbClr val="2B2B2B"/>
+                            <a:srgbClr val="26231F"/>
                           </a:solidFill>
                         </a:rPr>
                         <a:t/>
@@ -5249,30 +5467,30 @@
                   <a:tcPr anchor="ctr" marL="73152" marR="73152">
                     <a:lnL w="9525" cap="flat" cmpd="sng" algn="ctr">
                       <a:solidFill>
-                        <a:srgbClr val="F0D1D6"/>
+                        <a:srgbClr val="F6D5DA"/>
                       </a:solidFill>
                       <a:prstDash val="solid"/>
                     </a:lnL>
                     <a:lnR w="9525" cap="flat" cmpd="sng" algn="ctr">
                       <a:solidFill>
-                        <a:srgbClr val="F0D1D6"/>
+                        <a:srgbClr val="F6D5DA"/>
                       </a:solidFill>
                       <a:prstDash val="solid"/>
                     </a:lnR>
                     <a:lnT w="9525" cap="flat" cmpd="sng" algn="ctr">
                       <a:solidFill>
-                        <a:srgbClr val="F0D1D6"/>
+                        <a:srgbClr val="F6D5DA"/>
                       </a:solidFill>
                       <a:prstDash val="solid"/>
                     </a:lnT>
                     <a:lnB w="9525" cap="flat" cmpd="sng" algn="ctr">
                       <a:solidFill>
-                        <a:srgbClr val="F0D1D6"/>
+                        <a:srgbClr val="F6D5DA"/>
                       </a:solidFill>
                       <a:prstDash val="solid"/>
                     </a:lnB>
                     <a:solidFill>
-                      <a:srgbClr val="F9F0F2"/>
+                      <a:srgbClr val="FBECEF"/>
                     </a:solidFill>
                   </a:tcPr>
                 </a:tc>
@@ -5285,7 +5503,7 @@
                       <a:r>
                         <a:rPr sz="1400" b="0">
                           <a:solidFill>
-                            <a:srgbClr val="2B2B2B"/>
+                            <a:srgbClr val="26231F"/>
                           </a:solidFill>
                         </a:rPr>
                         <a:t/>
@@ -5295,30 +5513,30 @@
                   <a:tcPr anchor="ctr" marL="73152" marR="73152">
                     <a:lnL w="9525" cap="flat" cmpd="sng" algn="ctr">
                       <a:solidFill>
-                        <a:srgbClr val="F0D1D6"/>
+                        <a:srgbClr val="F6D5DA"/>
                       </a:solidFill>
                       <a:prstDash val="solid"/>
                     </a:lnL>
                     <a:lnR w="9525" cap="flat" cmpd="sng" algn="ctr">
                       <a:solidFill>
-                        <a:srgbClr val="F0D1D6"/>
+                        <a:srgbClr val="F6D5DA"/>
                       </a:solidFill>
                       <a:prstDash val="solid"/>
                     </a:lnR>
                     <a:lnT w="9525" cap="flat" cmpd="sng" algn="ctr">
                       <a:solidFill>
-                        <a:srgbClr val="F0D1D6"/>
+                        <a:srgbClr val="F6D5DA"/>
                       </a:solidFill>
                       <a:prstDash val="solid"/>
                     </a:lnT>
                     <a:lnB w="9525" cap="flat" cmpd="sng" algn="ctr">
                       <a:solidFill>
-                        <a:srgbClr val="F0D1D6"/>
+                        <a:srgbClr val="F6D5DA"/>
                       </a:solidFill>
                       <a:prstDash val="solid"/>
                     </a:lnB>
                     <a:solidFill>
-                      <a:srgbClr val="F9F0F2"/>
+                      <a:srgbClr val="FBECEF"/>
                     </a:solidFill>
                   </a:tcPr>
                 </a:tc>
@@ -5331,7 +5549,7 @@
                       <a:r>
                         <a:rPr sz="1400" b="0">
                           <a:solidFill>
-                            <a:srgbClr val="2B2B2B"/>
+                            <a:srgbClr val="26231F"/>
                           </a:solidFill>
                         </a:rPr>
                         <a:t/>
@@ -5341,30 +5559,30 @@
                   <a:tcPr anchor="ctr" marL="73152" marR="73152">
                     <a:lnL w="9525" cap="flat" cmpd="sng" algn="ctr">
                       <a:solidFill>
-                        <a:srgbClr val="F0D1D6"/>
+                        <a:srgbClr val="F6D5DA"/>
                       </a:solidFill>
                       <a:prstDash val="solid"/>
                     </a:lnL>
                     <a:lnR w="9525" cap="flat" cmpd="sng" algn="ctr">
                       <a:solidFill>
-                        <a:srgbClr val="F0D1D6"/>
+                        <a:srgbClr val="F6D5DA"/>
                       </a:solidFill>
                       <a:prstDash val="solid"/>
                     </a:lnR>
                     <a:lnT w="9525" cap="flat" cmpd="sng" algn="ctr">
                       <a:solidFill>
-                        <a:srgbClr val="F0D1D6"/>
+                        <a:srgbClr val="F6D5DA"/>
                       </a:solidFill>
                       <a:prstDash val="solid"/>
                     </a:lnT>
                     <a:lnB w="9525" cap="flat" cmpd="sng" algn="ctr">
                       <a:solidFill>
-                        <a:srgbClr val="F0D1D6"/>
+                        <a:srgbClr val="F6D5DA"/>
                       </a:solidFill>
                       <a:prstDash val="solid"/>
                     </a:lnB>
                     <a:solidFill>
-                      <a:srgbClr val="F9F0F2"/>
+                      <a:srgbClr val="FBECEF"/>
                     </a:solidFill>
                   </a:tcPr>
                 </a:tc>
@@ -5379,7 +5597,7 @@
                       <a:r>
                         <a:rPr sz="1400" b="0">
                           <a:solidFill>
-                            <a:srgbClr val="2B2B2B"/>
+                            <a:srgbClr val="26231F"/>
                           </a:solidFill>
                         </a:rPr>
                         <a:t/>
@@ -5389,25 +5607,25 @@
                   <a:tcPr anchor="ctr" marL="73152" marR="73152">
                     <a:lnL w="9525" cap="flat" cmpd="sng" algn="ctr">
                       <a:solidFill>
-                        <a:srgbClr val="F0D1D6"/>
+                        <a:srgbClr val="F6D5DA"/>
                       </a:solidFill>
                       <a:prstDash val="solid"/>
                     </a:lnL>
                     <a:lnR w="9525" cap="flat" cmpd="sng" algn="ctr">
                       <a:solidFill>
-                        <a:srgbClr val="F0D1D6"/>
+                        <a:srgbClr val="F6D5DA"/>
                       </a:solidFill>
                       <a:prstDash val="solid"/>
                     </a:lnR>
                     <a:lnT w="9525" cap="flat" cmpd="sng" algn="ctr">
                       <a:solidFill>
-                        <a:srgbClr val="F0D1D6"/>
+                        <a:srgbClr val="F6D5DA"/>
                       </a:solidFill>
                       <a:prstDash val="solid"/>
                     </a:lnT>
                     <a:lnB w="9525" cap="flat" cmpd="sng" algn="ctr">
                       <a:solidFill>
-                        <a:srgbClr val="F0D1D6"/>
+                        <a:srgbClr val="F6D5DA"/>
                       </a:solidFill>
                       <a:prstDash val="solid"/>
                     </a:lnB>
@@ -5425,7 +5643,7 @@
                       <a:r>
                         <a:rPr sz="1400" b="0">
                           <a:solidFill>
-                            <a:srgbClr val="2B2B2B"/>
+                            <a:srgbClr val="26231F"/>
                           </a:solidFill>
                         </a:rPr>
                         <a:t/>
@@ -5435,25 +5653,25 @@
                   <a:tcPr anchor="ctr" marL="73152" marR="73152">
                     <a:lnL w="9525" cap="flat" cmpd="sng" algn="ctr">
                       <a:solidFill>
-                        <a:srgbClr val="F0D1D6"/>
+                        <a:srgbClr val="F6D5DA"/>
                       </a:solidFill>
                       <a:prstDash val="solid"/>
                     </a:lnL>
                     <a:lnR w="9525" cap="flat" cmpd="sng" algn="ctr">
                       <a:solidFill>
-                        <a:srgbClr val="F0D1D6"/>
+                        <a:srgbClr val="F6D5DA"/>
                       </a:solidFill>
                       <a:prstDash val="solid"/>
                     </a:lnR>
                     <a:lnT w="9525" cap="flat" cmpd="sng" algn="ctr">
                       <a:solidFill>
-                        <a:srgbClr val="F0D1D6"/>
+                        <a:srgbClr val="F6D5DA"/>
                       </a:solidFill>
                       <a:prstDash val="solid"/>
                     </a:lnT>
                     <a:lnB w="9525" cap="flat" cmpd="sng" algn="ctr">
                       <a:solidFill>
-                        <a:srgbClr val="F0D1D6"/>
+                        <a:srgbClr val="F6D5DA"/>
                       </a:solidFill>
                       <a:prstDash val="solid"/>
                     </a:lnB>
@@ -5471,7 +5689,7 @@
                       <a:r>
                         <a:rPr sz="1400" b="0">
                           <a:solidFill>
-                            <a:srgbClr val="2B2B2B"/>
+                            <a:srgbClr val="26231F"/>
                           </a:solidFill>
                         </a:rPr>
                         <a:t/>
@@ -5481,25 +5699,25 @@
                   <a:tcPr anchor="ctr" marL="73152" marR="73152">
                     <a:lnL w="9525" cap="flat" cmpd="sng" algn="ctr">
                       <a:solidFill>
-                        <a:srgbClr val="F0D1D6"/>
+                        <a:srgbClr val="F6D5DA"/>
                       </a:solidFill>
                       <a:prstDash val="solid"/>
                     </a:lnL>
                     <a:lnR w="9525" cap="flat" cmpd="sng" algn="ctr">
                       <a:solidFill>
-                        <a:srgbClr val="F0D1D6"/>
+                        <a:srgbClr val="F6D5DA"/>
                       </a:solidFill>
                       <a:prstDash val="solid"/>
                     </a:lnR>
                     <a:lnT w="9525" cap="flat" cmpd="sng" algn="ctr">
                       <a:solidFill>
-                        <a:srgbClr val="F0D1D6"/>
+                        <a:srgbClr val="F6D5DA"/>
                       </a:solidFill>
                       <a:prstDash val="solid"/>
                     </a:lnT>
                     <a:lnB w="9525" cap="flat" cmpd="sng" algn="ctr">
                       <a:solidFill>
-                        <a:srgbClr val="F0D1D6"/>
+                        <a:srgbClr val="F6D5DA"/>
                       </a:solidFill>
                       <a:prstDash val="solid"/>
                     </a:lnB>
@@ -5517,7 +5735,7 @@
                       <a:r>
                         <a:rPr sz="1400" b="0">
                           <a:solidFill>
-                            <a:srgbClr val="2B2B2B"/>
+                            <a:srgbClr val="26231F"/>
                           </a:solidFill>
                         </a:rPr>
                         <a:t/>
@@ -5527,25 +5745,25 @@
                   <a:tcPr anchor="ctr" marL="73152" marR="73152">
                     <a:lnL w="9525" cap="flat" cmpd="sng" algn="ctr">
                       <a:solidFill>
-                        <a:srgbClr val="F0D1D6"/>
+                        <a:srgbClr val="F6D5DA"/>
                       </a:solidFill>
                       <a:prstDash val="solid"/>
                     </a:lnL>
                     <a:lnR w="9525" cap="flat" cmpd="sng" algn="ctr">
                       <a:solidFill>
-                        <a:srgbClr val="F0D1D6"/>
+                        <a:srgbClr val="F6D5DA"/>
                       </a:solidFill>
                       <a:prstDash val="solid"/>
                     </a:lnR>
                     <a:lnT w="9525" cap="flat" cmpd="sng" algn="ctr">
                       <a:solidFill>
-                        <a:srgbClr val="F0D1D6"/>
+                        <a:srgbClr val="F6D5DA"/>
                       </a:solidFill>
                       <a:prstDash val="solid"/>
                     </a:lnT>
                     <a:lnB w="9525" cap="flat" cmpd="sng" algn="ctr">
                       <a:solidFill>
-                        <a:srgbClr val="F0D1D6"/>
+                        <a:srgbClr val="F6D5DA"/>
                       </a:solidFill>
                       <a:prstDash val="solid"/>
                     </a:lnB>
@@ -5563,7 +5781,7 @@
                       <a:r>
                         <a:rPr sz="1400" b="0">
                           <a:solidFill>
-                            <a:srgbClr val="2B2B2B"/>
+                            <a:srgbClr val="26231F"/>
                           </a:solidFill>
                         </a:rPr>
                         <a:t/>
@@ -5573,25 +5791,25 @@
                   <a:tcPr anchor="ctr" marL="73152" marR="73152">
                     <a:lnL w="9525" cap="flat" cmpd="sng" algn="ctr">
                       <a:solidFill>
-                        <a:srgbClr val="F0D1D6"/>
+                        <a:srgbClr val="F6D5DA"/>
                       </a:solidFill>
                       <a:prstDash val="solid"/>
                     </a:lnL>
                     <a:lnR w="9525" cap="flat" cmpd="sng" algn="ctr">
                       <a:solidFill>
-                        <a:srgbClr val="F0D1D6"/>
+                        <a:srgbClr val="F6D5DA"/>
                       </a:solidFill>
                       <a:prstDash val="solid"/>
                     </a:lnR>
                     <a:lnT w="9525" cap="flat" cmpd="sng" algn="ctr">
                       <a:solidFill>
-                        <a:srgbClr val="F0D1D6"/>
+                        <a:srgbClr val="F6D5DA"/>
                       </a:solidFill>
                       <a:prstDash val="solid"/>
                     </a:lnT>
                     <a:lnB w="9525" cap="flat" cmpd="sng" algn="ctr">
                       <a:solidFill>
-                        <a:srgbClr val="F0D1D6"/>
+                        <a:srgbClr val="F6D5DA"/>
                       </a:solidFill>
                       <a:prstDash val="solid"/>
                     </a:lnB>
@@ -5611,7 +5829,7 @@
                       <a:r>
                         <a:rPr sz="1400" b="0">
                           <a:solidFill>
-                            <a:srgbClr val="2B2B2B"/>
+                            <a:srgbClr val="26231F"/>
                           </a:solidFill>
                         </a:rPr>
                         <a:t/>
@@ -5621,30 +5839,30 @@
                   <a:tcPr anchor="ctr" marL="73152" marR="73152">
                     <a:lnL w="9525" cap="flat" cmpd="sng" algn="ctr">
                       <a:solidFill>
-                        <a:srgbClr val="F0D1D6"/>
+                        <a:srgbClr val="F6D5DA"/>
                       </a:solidFill>
                       <a:prstDash val="solid"/>
                     </a:lnL>
                     <a:lnR w="9525" cap="flat" cmpd="sng" algn="ctr">
                       <a:solidFill>
-                        <a:srgbClr val="F0D1D6"/>
+                        <a:srgbClr val="F6D5DA"/>
                       </a:solidFill>
                       <a:prstDash val="solid"/>
                     </a:lnR>
                     <a:lnT w="9525" cap="flat" cmpd="sng" algn="ctr">
                       <a:solidFill>
-                        <a:srgbClr val="F0D1D6"/>
+                        <a:srgbClr val="F6D5DA"/>
                       </a:solidFill>
                       <a:prstDash val="solid"/>
                     </a:lnT>
                     <a:lnB w="9525" cap="flat" cmpd="sng" algn="ctr">
                       <a:solidFill>
-                        <a:srgbClr val="F0D1D6"/>
+                        <a:srgbClr val="F6D5DA"/>
                       </a:solidFill>
                       <a:prstDash val="solid"/>
                     </a:lnB>
                     <a:solidFill>
-                      <a:srgbClr val="F9F0F2"/>
+                      <a:srgbClr val="FBECEF"/>
                     </a:solidFill>
                   </a:tcPr>
                 </a:tc>
@@ -5657,7 +5875,7 @@
                       <a:r>
                         <a:rPr sz="1400" b="0">
                           <a:solidFill>
-                            <a:srgbClr val="2B2B2B"/>
+                            <a:srgbClr val="26231F"/>
                           </a:solidFill>
                         </a:rPr>
                         <a:t/>
@@ -5667,30 +5885,30 @@
                   <a:tcPr anchor="ctr" marL="73152" marR="73152">
                     <a:lnL w="9525" cap="flat" cmpd="sng" algn="ctr">
                       <a:solidFill>
-                        <a:srgbClr val="F0D1D6"/>
+                        <a:srgbClr val="F6D5DA"/>
                       </a:solidFill>
                       <a:prstDash val="solid"/>
                     </a:lnL>
                     <a:lnR w="9525" cap="flat" cmpd="sng" algn="ctr">
                       <a:solidFill>
-                        <a:srgbClr val="F0D1D6"/>
+                        <a:srgbClr val="F6D5DA"/>
                       </a:solidFill>
                       <a:prstDash val="solid"/>
                     </a:lnR>
                     <a:lnT w="9525" cap="flat" cmpd="sng" algn="ctr">
                       <a:solidFill>
-                        <a:srgbClr val="F0D1D6"/>
+                        <a:srgbClr val="F6D5DA"/>
                       </a:solidFill>
                       <a:prstDash val="solid"/>
                     </a:lnT>
                     <a:lnB w="9525" cap="flat" cmpd="sng" algn="ctr">
                       <a:solidFill>
-                        <a:srgbClr val="F0D1D6"/>
+                        <a:srgbClr val="F6D5DA"/>
                       </a:solidFill>
                       <a:prstDash val="solid"/>
                     </a:lnB>
                     <a:solidFill>
-                      <a:srgbClr val="F9F0F2"/>
+                      <a:srgbClr val="FBECEF"/>
                     </a:solidFill>
                   </a:tcPr>
                 </a:tc>
@@ -5703,7 +5921,7 @@
                       <a:r>
                         <a:rPr sz="1400" b="0">
                           <a:solidFill>
-                            <a:srgbClr val="2B2B2B"/>
+                            <a:srgbClr val="26231F"/>
                           </a:solidFill>
                         </a:rPr>
                         <a:t/>
@@ -5713,30 +5931,30 @@
                   <a:tcPr anchor="ctr" marL="73152" marR="73152">
                     <a:lnL w="9525" cap="flat" cmpd="sng" algn="ctr">
                       <a:solidFill>
-                        <a:srgbClr val="F0D1D6"/>
+                        <a:srgbClr val="F6D5DA"/>
                       </a:solidFill>
                       <a:prstDash val="solid"/>
                     </a:lnL>
                     <a:lnR w="9525" cap="flat" cmpd="sng" algn="ctr">
                       <a:solidFill>
-                        <a:srgbClr val="F0D1D6"/>
+                        <a:srgbClr val="F6D5DA"/>
                       </a:solidFill>
                       <a:prstDash val="solid"/>
                     </a:lnR>
                     <a:lnT w="9525" cap="flat" cmpd="sng" algn="ctr">
                       <a:solidFill>
-                        <a:srgbClr val="F0D1D6"/>
+                        <a:srgbClr val="F6D5DA"/>
                       </a:solidFill>
                       <a:prstDash val="solid"/>
                     </a:lnT>
                     <a:lnB w="9525" cap="flat" cmpd="sng" algn="ctr">
                       <a:solidFill>
-                        <a:srgbClr val="F0D1D6"/>
+                        <a:srgbClr val="F6D5DA"/>
                       </a:solidFill>
                       <a:prstDash val="solid"/>
                     </a:lnB>
                     <a:solidFill>
-                      <a:srgbClr val="F9F0F2"/>
+                      <a:srgbClr val="FBECEF"/>
                     </a:solidFill>
                   </a:tcPr>
                 </a:tc>
@@ -5749,7 +5967,7 @@
                       <a:r>
                         <a:rPr sz="1400" b="0">
                           <a:solidFill>
-                            <a:srgbClr val="2B2B2B"/>
+                            <a:srgbClr val="26231F"/>
                           </a:solidFill>
                         </a:rPr>
                         <a:t/>
@@ -5759,30 +5977,30 @@
                   <a:tcPr anchor="ctr" marL="73152" marR="73152">
                     <a:lnL w="9525" cap="flat" cmpd="sng" algn="ctr">
                       <a:solidFill>
-                        <a:srgbClr val="F0D1D6"/>
+                        <a:srgbClr val="F6D5DA"/>
                       </a:solidFill>
                       <a:prstDash val="solid"/>
                     </a:lnL>
                     <a:lnR w="9525" cap="flat" cmpd="sng" algn="ctr">
                       <a:solidFill>
-                        <a:srgbClr val="F0D1D6"/>
+                        <a:srgbClr val="F6D5DA"/>
                       </a:solidFill>
                       <a:prstDash val="solid"/>
                     </a:lnR>
                     <a:lnT w="9525" cap="flat" cmpd="sng" algn="ctr">
                       <a:solidFill>
-                        <a:srgbClr val="F0D1D6"/>
+                        <a:srgbClr val="F6D5DA"/>
                       </a:solidFill>
                       <a:prstDash val="solid"/>
                     </a:lnT>
                     <a:lnB w="9525" cap="flat" cmpd="sng" algn="ctr">
                       <a:solidFill>
-                        <a:srgbClr val="F0D1D6"/>
+                        <a:srgbClr val="F6D5DA"/>
                       </a:solidFill>
                       <a:prstDash val="solid"/>
                     </a:lnB>
                     <a:solidFill>
-                      <a:srgbClr val="F9F0F2"/>
+                      <a:srgbClr val="FBECEF"/>
                     </a:solidFill>
                   </a:tcPr>
                 </a:tc>
@@ -5795,7 +6013,7 @@
                       <a:r>
                         <a:rPr sz="1400" b="0">
                           <a:solidFill>
-                            <a:srgbClr val="2B2B2B"/>
+                            <a:srgbClr val="26231F"/>
                           </a:solidFill>
                         </a:rPr>
                         <a:t/>
@@ -5805,30 +6023,30 @@
                   <a:tcPr anchor="ctr" marL="73152" marR="73152">
                     <a:lnL w="9525" cap="flat" cmpd="sng" algn="ctr">
                       <a:solidFill>
-                        <a:srgbClr val="F0D1D6"/>
+                        <a:srgbClr val="F6D5DA"/>
                       </a:solidFill>
                       <a:prstDash val="solid"/>
                     </a:lnL>
                     <a:lnR w="9525" cap="flat" cmpd="sng" algn="ctr">
                       <a:solidFill>
-                        <a:srgbClr val="F0D1D6"/>
+                        <a:srgbClr val="F6D5DA"/>
                       </a:solidFill>
                       <a:prstDash val="solid"/>
                     </a:lnR>
                     <a:lnT w="9525" cap="flat" cmpd="sng" algn="ctr">
                       <a:solidFill>
-                        <a:srgbClr val="F0D1D6"/>
+                        <a:srgbClr val="F6D5DA"/>
                       </a:solidFill>
                       <a:prstDash val="solid"/>
                     </a:lnT>
                     <a:lnB w="9525" cap="flat" cmpd="sng" algn="ctr">
                       <a:solidFill>
-                        <a:srgbClr val="F0D1D6"/>
+                        <a:srgbClr val="F6D5DA"/>
                       </a:solidFill>
                       <a:prstDash val="solid"/>
                     </a:lnB>
                     <a:solidFill>
-                      <a:srgbClr val="F9F0F2"/>
+                      <a:srgbClr val="FBECEF"/>
                     </a:solidFill>
                   </a:tcPr>
                 </a:tc>
@@ -5843,7 +6061,7 @@
                       <a:r>
                         <a:rPr sz="1400" b="0">
                           <a:solidFill>
-                            <a:srgbClr val="2B2B2B"/>
+                            <a:srgbClr val="26231F"/>
                           </a:solidFill>
                         </a:rPr>
                         <a:t/>
@@ -5853,25 +6071,25 @@
                   <a:tcPr anchor="ctr" marL="73152" marR="73152">
                     <a:lnL w="9525" cap="flat" cmpd="sng" algn="ctr">
                       <a:solidFill>
-                        <a:srgbClr val="F0D1D6"/>
+                        <a:srgbClr val="F6D5DA"/>
                       </a:solidFill>
                       <a:prstDash val="solid"/>
                     </a:lnL>
                     <a:lnR w="9525" cap="flat" cmpd="sng" algn="ctr">
                       <a:solidFill>
-                        <a:srgbClr val="F0D1D6"/>
+                        <a:srgbClr val="F6D5DA"/>
                       </a:solidFill>
                       <a:prstDash val="solid"/>
                     </a:lnR>
                     <a:lnT w="9525" cap="flat" cmpd="sng" algn="ctr">
                       <a:solidFill>
-                        <a:srgbClr val="F0D1D6"/>
+                        <a:srgbClr val="F6D5DA"/>
                       </a:solidFill>
                       <a:prstDash val="solid"/>
                     </a:lnT>
                     <a:lnB w="9525" cap="flat" cmpd="sng" algn="ctr">
                       <a:solidFill>
-                        <a:srgbClr val="F0D1D6"/>
+                        <a:srgbClr val="F6D5DA"/>
                       </a:solidFill>
                       <a:prstDash val="solid"/>
                     </a:lnB>
@@ -5889,7 +6107,7 @@
                       <a:r>
                         <a:rPr sz="1400" b="0">
                           <a:solidFill>
-                            <a:srgbClr val="2B2B2B"/>
+                            <a:srgbClr val="26231F"/>
                           </a:solidFill>
                         </a:rPr>
                         <a:t/>
@@ -5899,25 +6117,25 @@
                   <a:tcPr anchor="ctr" marL="73152" marR="73152">
                     <a:lnL w="9525" cap="flat" cmpd="sng" algn="ctr">
                       <a:solidFill>
-                        <a:srgbClr val="F0D1D6"/>
+                        <a:srgbClr val="F6D5DA"/>
                       </a:solidFill>
                       <a:prstDash val="solid"/>
                     </a:lnL>
                     <a:lnR w="9525" cap="flat" cmpd="sng" algn="ctr">
                       <a:solidFill>
-                        <a:srgbClr val="F0D1D6"/>
+                        <a:srgbClr val="F6D5DA"/>
                       </a:solidFill>
                       <a:prstDash val="solid"/>
                     </a:lnR>
                     <a:lnT w="9525" cap="flat" cmpd="sng" algn="ctr">
                       <a:solidFill>
-                        <a:srgbClr val="F0D1D6"/>
+                        <a:srgbClr val="F6D5DA"/>
                       </a:solidFill>
                       <a:prstDash val="solid"/>
                     </a:lnT>
                     <a:lnB w="9525" cap="flat" cmpd="sng" algn="ctr">
                       <a:solidFill>
-                        <a:srgbClr val="F0D1D6"/>
+                        <a:srgbClr val="F6D5DA"/>
                       </a:solidFill>
                       <a:prstDash val="solid"/>
                     </a:lnB>
@@ -5935,7 +6153,7 @@
                       <a:r>
                         <a:rPr sz="1400" b="0">
                           <a:solidFill>
-                            <a:srgbClr val="2B2B2B"/>
+                            <a:srgbClr val="26231F"/>
                           </a:solidFill>
                         </a:rPr>
                         <a:t/>
@@ -5945,25 +6163,25 @@
                   <a:tcPr anchor="ctr" marL="73152" marR="73152">
                     <a:lnL w="9525" cap="flat" cmpd="sng" algn="ctr">
                       <a:solidFill>
-                        <a:srgbClr val="F0D1D6"/>
+                        <a:srgbClr val="F6D5DA"/>
                       </a:solidFill>
                       <a:prstDash val="solid"/>
                     </a:lnL>
                     <a:lnR w="9525" cap="flat" cmpd="sng" algn="ctr">
                       <a:solidFill>
-                        <a:srgbClr val="F0D1D6"/>
+                        <a:srgbClr val="F6D5DA"/>
                       </a:solidFill>
                       <a:prstDash val="solid"/>
                     </a:lnR>
                     <a:lnT w="9525" cap="flat" cmpd="sng" algn="ctr">
                       <a:solidFill>
-                        <a:srgbClr val="F0D1D6"/>
+                        <a:srgbClr val="F6D5DA"/>
                       </a:solidFill>
                       <a:prstDash val="solid"/>
                     </a:lnT>
                     <a:lnB w="9525" cap="flat" cmpd="sng" algn="ctr">
                       <a:solidFill>
-                        <a:srgbClr val="F0D1D6"/>
+                        <a:srgbClr val="F6D5DA"/>
                       </a:solidFill>
                       <a:prstDash val="solid"/>
                     </a:lnB>
@@ -5981,7 +6199,7 @@
                       <a:r>
                         <a:rPr sz="1400" b="0">
                           <a:solidFill>
-                            <a:srgbClr val="2B2B2B"/>
+                            <a:srgbClr val="26231F"/>
                           </a:solidFill>
                         </a:rPr>
                         <a:t/>
@@ -5991,25 +6209,25 @@
                   <a:tcPr anchor="ctr" marL="73152" marR="73152">
                     <a:lnL w="9525" cap="flat" cmpd="sng" algn="ctr">
                       <a:solidFill>
-                        <a:srgbClr val="F0D1D6"/>
+                        <a:srgbClr val="F6D5DA"/>
                       </a:solidFill>
                       <a:prstDash val="solid"/>
                     </a:lnL>
                     <a:lnR w="9525" cap="flat" cmpd="sng" algn="ctr">
                       <a:solidFill>
-                        <a:srgbClr val="F0D1D6"/>
+                        <a:srgbClr val="F6D5DA"/>
                       </a:solidFill>
                       <a:prstDash val="solid"/>
                     </a:lnR>
                     <a:lnT w="9525" cap="flat" cmpd="sng" algn="ctr">
                       <a:solidFill>
-                        <a:srgbClr val="F0D1D6"/>
+                        <a:srgbClr val="F6D5DA"/>
                       </a:solidFill>
                       <a:prstDash val="solid"/>
                     </a:lnT>
                     <a:lnB w="9525" cap="flat" cmpd="sng" algn="ctr">
                       <a:solidFill>
-                        <a:srgbClr val="F0D1D6"/>
+                        <a:srgbClr val="F6D5DA"/>
                       </a:solidFill>
                       <a:prstDash val="solid"/>
                     </a:lnB>
@@ -6027,7 +6245,7 @@
                       <a:r>
                         <a:rPr sz="1400" b="0">
                           <a:solidFill>
-                            <a:srgbClr val="2B2B2B"/>
+                            <a:srgbClr val="26231F"/>
                           </a:solidFill>
                         </a:rPr>
                         <a:t/>
@@ -6037,25 +6255,25 @@
                   <a:tcPr anchor="ctr" marL="73152" marR="73152">
                     <a:lnL w="9525" cap="flat" cmpd="sng" algn="ctr">
                       <a:solidFill>
-                        <a:srgbClr val="F0D1D6"/>
+                        <a:srgbClr val="F6D5DA"/>
                       </a:solidFill>
                       <a:prstDash val="solid"/>
                     </a:lnL>
                     <a:lnR w="9525" cap="flat" cmpd="sng" algn="ctr">
                       <a:solidFill>
-                        <a:srgbClr val="F0D1D6"/>
+                        <a:srgbClr val="F6D5DA"/>
                       </a:solidFill>
                       <a:prstDash val="solid"/>
                     </a:lnR>
                     <a:lnT w="9525" cap="flat" cmpd="sng" algn="ctr">
                       <a:solidFill>
-                        <a:srgbClr val="F0D1D6"/>
+                        <a:srgbClr val="F6D5DA"/>
                       </a:solidFill>
                       <a:prstDash val="solid"/>
                     </a:lnT>
                     <a:lnB w="9525" cap="flat" cmpd="sng" algn="ctr">
                       <a:solidFill>
-                        <a:srgbClr val="F0D1D6"/>
+                        <a:srgbClr val="F6D5DA"/>
                       </a:solidFill>
                       <a:prstDash val="solid"/>
                     </a:lnB>
@@ -6075,7 +6293,7 @@
                       <a:r>
                         <a:rPr sz="1400" b="0">
                           <a:solidFill>
-                            <a:srgbClr val="2B2B2B"/>
+                            <a:srgbClr val="26231F"/>
                           </a:solidFill>
                         </a:rPr>
                         <a:t/>
@@ -6085,30 +6303,30 @@
                   <a:tcPr anchor="ctr" marL="73152" marR="73152">
                     <a:lnL w="9525" cap="flat" cmpd="sng" algn="ctr">
                       <a:solidFill>
-                        <a:srgbClr val="F0D1D6"/>
+                        <a:srgbClr val="F6D5DA"/>
                       </a:solidFill>
                       <a:prstDash val="solid"/>
                     </a:lnL>
                     <a:lnR w="9525" cap="flat" cmpd="sng" algn="ctr">
                       <a:solidFill>
-                        <a:srgbClr val="F0D1D6"/>
+                        <a:srgbClr val="F6D5DA"/>
                       </a:solidFill>
                       <a:prstDash val="solid"/>
                     </a:lnR>
                     <a:lnT w="9525" cap="flat" cmpd="sng" algn="ctr">
                       <a:solidFill>
-                        <a:srgbClr val="F0D1D6"/>
+                        <a:srgbClr val="F6D5DA"/>
                       </a:solidFill>
                       <a:prstDash val="solid"/>
                     </a:lnT>
                     <a:lnB w="9525" cap="flat" cmpd="sng" algn="ctr">
                       <a:solidFill>
-                        <a:srgbClr val="F0D1D6"/>
+                        <a:srgbClr val="F6D5DA"/>
                       </a:solidFill>
                       <a:prstDash val="solid"/>
                     </a:lnB>
                     <a:solidFill>
-                      <a:srgbClr val="F9F0F2"/>
+                      <a:srgbClr val="FBECEF"/>
                     </a:solidFill>
                   </a:tcPr>
                 </a:tc>
@@ -6121,7 +6339,7 @@
                       <a:r>
                         <a:rPr sz="1400" b="0">
                           <a:solidFill>
-                            <a:srgbClr val="2B2B2B"/>
+                            <a:srgbClr val="26231F"/>
                           </a:solidFill>
                         </a:rPr>
                         <a:t/>
@@ -6131,30 +6349,30 @@
                   <a:tcPr anchor="ctr" marL="73152" marR="73152">
                     <a:lnL w="9525" cap="flat" cmpd="sng" algn="ctr">
                       <a:solidFill>
-                        <a:srgbClr val="F0D1D6"/>
+                        <a:srgbClr val="F6D5DA"/>
                       </a:solidFill>
                       <a:prstDash val="solid"/>
                     </a:lnL>
                     <a:lnR w="9525" cap="flat" cmpd="sng" algn="ctr">
                       <a:solidFill>
-                        <a:srgbClr val="F0D1D6"/>
+                        <a:srgbClr val="F6D5DA"/>
                       </a:solidFill>
                       <a:prstDash val="solid"/>
                     </a:lnR>
                     <a:lnT w="9525" cap="flat" cmpd="sng" algn="ctr">
                       <a:solidFill>
-                        <a:srgbClr val="F0D1D6"/>
+                        <a:srgbClr val="F6D5DA"/>
                       </a:solidFill>
                       <a:prstDash val="solid"/>
                     </a:lnT>
                     <a:lnB w="9525" cap="flat" cmpd="sng" algn="ctr">
                       <a:solidFill>
-                        <a:srgbClr val="F0D1D6"/>
+                        <a:srgbClr val="F6D5DA"/>
                       </a:solidFill>
                       <a:prstDash val="solid"/>
                     </a:lnB>
                     <a:solidFill>
-                      <a:srgbClr val="F9F0F2"/>
+                      <a:srgbClr val="FBECEF"/>
                     </a:solidFill>
                   </a:tcPr>
                 </a:tc>
@@ -6167,7 +6385,7 @@
                       <a:r>
                         <a:rPr sz="1400" b="0">
                           <a:solidFill>
-                            <a:srgbClr val="2B2B2B"/>
+                            <a:srgbClr val="26231F"/>
                           </a:solidFill>
                         </a:rPr>
                         <a:t/>
@@ -6177,30 +6395,30 @@
                   <a:tcPr anchor="ctr" marL="73152" marR="73152">
                     <a:lnL w="9525" cap="flat" cmpd="sng" algn="ctr">
                       <a:solidFill>
-                        <a:srgbClr val="F0D1D6"/>
+                        <a:srgbClr val="F6D5DA"/>
                       </a:solidFill>
                       <a:prstDash val="solid"/>
                     </a:lnL>
                     <a:lnR w="9525" cap="flat" cmpd="sng" algn="ctr">
                       <a:solidFill>
-                        <a:srgbClr val="F0D1D6"/>
+                        <a:srgbClr val="F6D5DA"/>
                       </a:solidFill>
                       <a:prstDash val="solid"/>
                     </a:lnR>
                     <a:lnT w="9525" cap="flat" cmpd="sng" algn="ctr">
                       <a:solidFill>
-                        <a:srgbClr val="F0D1D6"/>
+                        <a:srgbClr val="F6D5DA"/>
                       </a:solidFill>
                       <a:prstDash val="solid"/>
                     </a:lnT>
                     <a:lnB w="9525" cap="flat" cmpd="sng" algn="ctr">
                       <a:solidFill>
-                        <a:srgbClr val="F0D1D6"/>
+                        <a:srgbClr val="F6D5DA"/>
                       </a:solidFill>
                       <a:prstDash val="solid"/>
                     </a:lnB>
                     <a:solidFill>
-                      <a:srgbClr val="F9F0F2"/>
+                      <a:srgbClr val="FBECEF"/>
                     </a:solidFill>
                   </a:tcPr>
                 </a:tc>
@@ -6213,7 +6431,7 @@
                       <a:r>
                         <a:rPr sz="1400" b="0">
                           <a:solidFill>
-                            <a:srgbClr val="2B2B2B"/>
+                            <a:srgbClr val="26231F"/>
                           </a:solidFill>
                         </a:rPr>
                         <a:t/>
@@ -6223,30 +6441,30 @@
                   <a:tcPr anchor="ctr" marL="73152" marR="73152">
                     <a:lnL w="9525" cap="flat" cmpd="sng" algn="ctr">
                       <a:solidFill>
-                        <a:srgbClr val="F0D1D6"/>
+                        <a:srgbClr val="F6D5DA"/>
                       </a:solidFill>
                       <a:prstDash val="solid"/>
                     </a:lnL>
                     <a:lnR w="9525" cap="flat" cmpd="sng" algn="ctr">
                       <a:solidFill>
-                        <a:srgbClr val="F0D1D6"/>
+                        <a:srgbClr val="F6D5DA"/>
                       </a:solidFill>
                       <a:prstDash val="solid"/>
                     </a:lnR>
                     <a:lnT w="9525" cap="flat" cmpd="sng" algn="ctr">
                       <a:solidFill>
-                        <a:srgbClr val="F0D1D6"/>
+                        <a:srgbClr val="F6D5DA"/>
                       </a:solidFill>
                       <a:prstDash val="solid"/>
                     </a:lnT>
                     <a:lnB w="9525" cap="flat" cmpd="sng" algn="ctr">
                       <a:solidFill>
-                        <a:srgbClr val="F0D1D6"/>
+                        <a:srgbClr val="F6D5DA"/>
                       </a:solidFill>
                       <a:prstDash val="solid"/>
                     </a:lnB>
                     <a:solidFill>
-                      <a:srgbClr val="F9F0F2"/>
+                      <a:srgbClr val="FBECEF"/>
                     </a:solidFill>
                   </a:tcPr>
                 </a:tc>
@@ -6259,7 +6477,7 @@
                       <a:r>
                         <a:rPr sz="1400" b="0">
                           <a:solidFill>
-                            <a:srgbClr val="2B2B2B"/>
+                            <a:srgbClr val="26231F"/>
                           </a:solidFill>
                         </a:rPr>
                         <a:t/>
@@ -6269,30 +6487,30 @@
                   <a:tcPr anchor="ctr" marL="73152" marR="73152">
                     <a:lnL w="9525" cap="flat" cmpd="sng" algn="ctr">
                       <a:solidFill>
-                        <a:srgbClr val="F0D1D6"/>
+                        <a:srgbClr val="F6D5DA"/>
                       </a:solidFill>
                       <a:prstDash val="solid"/>
                     </a:lnL>
                     <a:lnR w="9525" cap="flat" cmpd="sng" algn="ctr">
                       <a:solidFill>
-                        <a:srgbClr val="F0D1D6"/>
+                        <a:srgbClr val="F6D5DA"/>
                       </a:solidFill>
                       <a:prstDash val="solid"/>
                     </a:lnR>
                     <a:lnT w="9525" cap="flat" cmpd="sng" algn="ctr">
                       <a:solidFill>
-                        <a:srgbClr val="F0D1D6"/>
+                        <a:srgbClr val="F6D5DA"/>
                       </a:solidFill>
                       <a:prstDash val="solid"/>
                     </a:lnT>
                     <a:lnB w="9525" cap="flat" cmpd="sng" algn="ctr">
                       <a:solidFill>
-                        <a:srgbClr val="F0D1D6"/>
+                        <a:srgbClr val="F6D5DA"/>
                       </a:solidFill>
                       <a:prstDash val="solid"/>
                     </a:lnB>
                     <a:solidFill>
-                      <a:srgbClr val="F9F0F2"/>
+                      <a:srgbClr val="FBECEF"/>
                     </a:solidFill>
                   </a:tcPr>
                 </a:tc>
@@ -6335,14 +6553,14 @@
         </p:nvSpPr>
         <p:spPr>
           <a:xfrm>
-            <a:off x="-182880" y="6144768"/>
-            <a:ext cx="12557455" cy="731520"/>
-          </a:xfrm>
-          <a:prstGeom prst="wave">
+            <a:off x="0" y="6565392"/>
+            <a:ext cx="12191695" cy="292608"/>
+          </a:xfrm>
+          <a:prstGeom prst="rect">
             <a:avLst/>
           </a:prstGeom>
           <a:solidFill>
-            <a:srgbClr val="F0D1D6"/>
+            <a:srgbClr val="EBADB8"/>
           </a:solidFill>
           <a:ln>
             <a:noFill/>
@@ -6364,14 +6582,83 @@
         </p:nvSpPr>
         <p:spPr>
           <a:xfrm>
-            <a:off x="-182880" y="6400800"/>
-            <a:ext cx="12557455" cy="502920"/>
-          </a:xfrm>
-          <a:prstGeom prst="wave">
+            <a:off x="640080" y="566928"/>
+            <a:ext cx="64008" cy="868680"/>
+          </a:xfrm>
+          <a:prstGeom prst="roundRect">
+            <a:avLst>
+              <a:gd name="adj" fmla="val 50000"/>
+            </a:avLst>
+          </a:prstGeom>
+          <a:solidFill>
+            <a:srgbClr val="E198A4"/>
+          </a:solidFill>
+          <a:ln>
+            <a:noFill/>
+          </a:ln>
+        </p:spPr>
+        <p:txBody>
+          <a:bodyPr rtlCol="0" anchor="ctr"/>
+          <a:lstStyle/>
+          <a:p>
+            <a:pPr algn="ctr"/>
+          </a:p>
+        </p:txBody>
+      </p:sp>
+      <p:sp>
+        <p:nvSpPr>
+          <p:cNvPr id="5" name="상단 라벨"/>
+          <p:cNvSpPr txBox="1"/>
+          <p:nvPr/>
+        </p:nvSpPr>
+        <p:spPr>
+          <a:xfrm>
+            <a:off x="868680" y="274320"/>
+            <a:ext cx="5486400" cy="274320"/>
+          </a:xfrm>
+          <a:prstGeom prst="rect">
+            <a:avLst/>
+          </a:prstGeom>
+          <a:noFill/>
+        </p:spPr>
+        <p:txBody>
+          <a:bodyPr wrap="square" lIns="54864" rIns="54864" tIns="27432" bIns="27432" anchor="ctr">
+            <a:noAutofit/>
+          </a:bodyPr>
+          <a:lstStyle/>
+          <a:p>
+            <a:pPr algn="l">
+              <a:lnSpc>
+                <a:spcPct val="115000"/>
+              </a:lnSpc>
+            </a:pPr>
+            <a:r>
+              <a:rPr sz="900" b="1" i="0" spc="250">
+                <a:solidFill>
+                  <a:srgbClr val="8E8780"/>
+                </a:solidFill>
+              </a:rPr>
+              <a:t>INSURANCE CHECK</a:t>
+            </a:r>
+          </a:p>
+        </p:txBody>
+      </p:sp>
+      <p:sp>
+        <p:nvSpPr>
+          <p:cNvPr id="6" name="포인트"/>
+          <p:cNvSpPr/>
+          <p:nvPr/>
+        </p:nvSpPr>
+        <p:spPr>
+          <a:xfrm>
+            <a:off x="11167567" y="667512"/>
+            <a:ext cx="310896" cy="310896"/>
+          </a:xfrm>
+          <a:prstGeom prst="mathPlus">
             <a:avLst/>
           </a:prstGeom>
           <a:solidFill>
-            <a:srgbClr val="8D3443"/>
+            <a:srgbClr val="EBADB8"/>
           </a:solidFill>
           <a:ln>
             <a:noFill/>
@@ -6397,8 +6684,8 @@
         </p:nvSpPr>
         <p:spPr>
           <a:xfrm>
-            <a:off x="640080" y="457200"/>
-            <a:ext cx="9722815" cy="868680"/>
+            <a:off x="868680" y="566928"/>
+            <a:ext cx="9448495" cy="868680"/>
           </a:xfrm>
         </p:spPr>
         <p:txBody>
@@ -6415,7 +6702,7 @@
             <a:r>
               <a:rPr sz="3000" b="1" i="0">
                 <a:solidFill>
-                  <a:srgbClr val="431920"/>
+                  <a:srgbClr val="26231F"/>
                 </a:solidFill>
               </a:rPr>
               <a:t>보장 항목 체크</a:t>
@@ -6425,14 +6712,14 @@
       </p:sp>
       <p:graphicFrame>
         <p:nvGraphicFramePr>
-          <p:cNvPr id="5" name="표"/>
+          <p:cNvPr id="7" name="표"/>
           <p:cNvGraphicFramePr>
             <a:graphicFrameLocks noGrp="1"/>
           </p:cNvGraphicFramePr>
           <p:nvPr/>
         </p:nvGraphicFramePr>
         <p:xfrm>
-          <a:off x="640080" y="1554480"/>
+          <a:off x="640080" y="1783080"/>
           <a:ext cx="10911534" cy="4773168"/>
         </p:xfrm>
         <a:graphic>
@@ -6457,7 +6744,7 @@
                       <a:r>
                         <a:rPr sz="1400" b="1">
                           <a:solidFill>
-                            <a:srgbClr val="FFFFFF"/>
+                            <a:srgbClr val="26231F"/>
                           </a:solidFill>
                         </a:rPr>
                         <a:t>보장 항목</a:t>
@@ -6467,30 +6754,30 @@
                   <a:tcPr anchor="ctr" marL="73152" marR="73152">
                     <a:lnL w="9525" cap="flat" cmpd="sng" algn="ctr">
                       <a:solidFill>
-                        <a:srgbClr val="8D3443"/>
+                        <a:srgbClr val="E198A4"/>
                       </a:solidFill>
                       <a:prstDash val="solid"/>
                     </a:lnL>
                     <a:lnR w="9525" cap="flat" cmpd="sng" algn="ctr">
                       <a:solidFill>
-                        <a:srgbClr val="8D3443"/>
+                        <a:srgbClr val="E198A4"/>
                       </a:solidFill>
                       <a:prstDash val="solid"/>
                     </a:lnR>
                     <a:lnT w="9525" cap="flat" cmpd="sng" algn="ctr">
                       <a:solidFill>
-                        <a:srgbClr val="8D3443"/>
+                        <a:srgbClr val="E198A4"/>
                       </a:solidFill>
                       <a:prstDash val="solid"/>
                     </a:lnT>
                     <a:lnB w="9525" cap="flat" cmpd="sng" algn="ctr">
                       <a:solidFill>
-                        <a:srgbClr val="8D3443"/>
+                        <a:srgbClr val="E198A4"/>
                       </a:solidFill>
                       <a:prstDash val="solid"/>
                     </a:lnB>
                     <a:solidFill>
-                      <a:srgbClr val="8D3443"/>
+                      <a:srgbClr val="E198A4"/>
                     </a:solidFill>
                   </a:tcPr>
                 </a:tc>
@@ -6503,7 +6790,7 @@
                       <a:r>
                         <a:rPr sz="1400" b="1">
                           <a:solidFill>
-                            <a:srgbClr val="FFFFFF"/>
+                            <a:srgbClr val="26231F"/>
                           </a:solidFill>
                         </a:rPr>
                         <a:t>가입 확인</a:t>
@@ -6513,30 +6800,30 @@
                   <a:tcPr anchor="ctr" marL="73152" marR="73152">
                     <a:lnL w="9525" cap="flat" cmpd="sng" algn="ctr">
                       <a:solidFill>
-                        <a:srgbClr val="8D3443"/>
+                        <a:srgbClr val="E198A4"/>
                       </a:solidFill>
                       <a:prstDash val="solid"/>
                     </a:lnL>
                     <a:lnR w="9525" cap="flat" cmpd="sng" algn="ctr">
                       <a:solidFill>
-                        <a:srgbClr val="8D3443"/>
+                        <a:srgbClr val="E198A4"/>
                       </a:solidFill>
                       <a:prstDash val="solid"/>
                     </a:lnR>
                     <a:lnT w="9525" cap="flat" cmpd="sng" algn="ctr">
                       <a:solidFill>
-                        <a:srgbClr val="8D3443"/>
+                        <a:srgbClr val="E198A4"/>
                       </a:solidFill>
                       <a:prstDash val="solid"/>
                     </a:lnT>
                     <a:lnB w="9525" cap="flat" cmpd="sng" algn="ctr">
                       <a:solidFill>
-                        <a:srgbClr val="8D3443"/>
+                        <a:srgbClr val="E198A4"/>
                       </a:solidFill>
                       <a:prstDash val="solid"/>
                     </a:lnB>
                     <a:solidFill>
-                      <a:srgbClr val="8D3443"/>
+                      <a:srgbClr val="E198A4"/>
                     </a:solidFill>
                   </a:tcPr>
                 </a:tc>
@@ -6549,7 +6836,7 @@
                       <a:r>
                         <a:rPr sz="1400" b="1">
                           <a:solidFill>
-                            <a:srgbClr val="FFFFFF"/>
+                            <a:srgbClr val="26231F"/>
                           </a:solidFill>
                         </a:rPr>
                         <a:t>확인 필요</a:t>
@@ -6559,30 +6846,30 @@
                   <a:tcPr anchor="ctr" marL="73152" marR="73152">
                     <a:lnL w="9525" cap="flat" cmpd="sng" algn="ctr">
                       <a:solidFill>
-                        <a:srgbClr val="8D3443"/>
+                        <a:srgbClr val="E198A4"/>
                       </a:solidFill>
                       <a:prstDash val="solid"/>
                     </a:lnL>
                     <a:lnR w="9525" cap="flat" cmpd="sng" algn="ctr">
                       <a:solidFill>
-                        <a:srgbClr val="8D3443"/>
+                        <a:srgbClr val="E198A4"/>
                       </a:solidFill>
                       <a:prstDash val="solid"/>
                     </a:lnR>
                     <a:lnT w="9525" cap="flat" cmpd="sng" algn="ctr">
                       <a:solidFill>
-                        <a:srgbClr val="8D3443"/>
+                        <a:srgbClr val="E198A4"/>
                       </a:solidFill>
                       <a:prstDash val="solid"/>
                     </a:lnT>
                     <a:lnB w="9525" cap="flat" cmpd="sng" algn="ctr">
                       <a:solidFill>
-                        <a:srgbClr val="8D3443"/>
+                        <a:srgbClr val="E198A4"/>
                       </a:solidFill>
                       <a:prstDash val="solid"/>
                     </a:lnB>
                     <a:solidFill>
-                      <a:srgbClr val="8D3443"/>
+                      <a:srgbClr val="E198A4"/>
                     </a:solidFill>
                   </a:tcPr>
                 </a:tc>
@@ -6595,7 +6882,7 @@
                       <a:r>
                         <a:rPr sz="1400" b="1">
                           <a:solidFill>
-                            <a:srgbClr val="FFFFFF"/>
+                            <a:srgbClr val="26231F"/>
                           </a:solidFill>
                         </a:rPr>
                         <a:t>해당 없음</a:t>
@@ -6605,30 +6892,30 @@
                   <a:tcPr anchor="ctr" marL="73152" marR="73152">
                     <a:lnL w="9525" cap="flat" cmpd="sng" algn="ctr">
                       <a:solidFill>
-                        <a:srgbClr val="8D3443"/>
+                        <a:srgbClr val="E198A4"/>
                       </a:solidFill>
                       <a:prstDash val="solid"/>
                     </a:lnL>
                     <a:lnR w="9525" cap="flat" cmpd="sng" algn="ctr">
                       <a:solidFill>
-                        <a:srgbClr val="8D3443"/>
+                        <a:srgbClr val="E198A4"/>
                       </a:solidFill>
                       <a:prstDash val="solid"/>
                     </a:lnR>
                     <a:lnT w="9525" cap="flat" cmpd="sng" algn="ctr">
                       <a:solidFill>
-                        <a:srgbClr val="8D3443"/>
+                        <a:srgbClr val="E198A4"/>
                       </a:solidFill>
                       <a:prstDash val="solid"/>
                     </a:lnT>
                     <a:lnB w="9525" cap="flat" cmpd="sng" algn="ctr">
                       <a:solidFill>
-                        <a:srgbClr val="8D3443"/>
+                        <a:srgbClr val="E198A4"/>
                       </a:solidFill>
                       <a:prstDash val="solid"/>
                     </a:lnB>
                     <a:solidFill>
-                      <a:srgbClr val="8D3443"/>
+                      <a:srgbClr val="E198A4"/>
                     </a:solidFill>
                   </a:tcPr>
                 </a:tc>
@@ -6643,7 +6930,7 @@
                       <a:r>
                         <a:rPr sz="1400" b="1">
                           <a:solidFill>
-                            <a:srgbClr val="431920"/>
+                            <a:srgbClr val="49272D"/>
                           </a:solidFill>
                         </a:rPr>
                         <a:t>사망·재해</a:t>
@@ -6653,30 +6940,30 @@
                   <a:tcPr anchor="ctr" marL="73152" marR="73152">
                     <a:lnL w="9525" cap="flat" cmpd="sng" algn="ctr">
                       <a:solidFill>
-                        <a:srgbClr val="F0D1D6"/>
+                        <a:srgbClr val="F6D5DA"/>
                       </a:solidFill>
                       <a:prstDash val="solid"/>
                     </a:lnL>
                     <a:lnR w="9525" cap="flat" cmpd="sng" algn="ctr">
                       <a:solidFill>
-                        <a:srgbClr val="F0D1D6"/>
+                        <a:srgbClr val="F6D5DA"/>
                       </a:solidFill>
                       <a:prstDash val="solid"/>
                     </a:lnR>
                     <a:lnT w="9525" cap="flat" cmpd="sng" algn="ctr">
                       <a:solidFill>
-                        <a:srgbClr val="F0D1D6"/>
+                        <a:srgbClr val="F6D5DA"/>
                       </a:solidFill>
                       <a:prstDash val="solid"/>
                     </a:lnT>
                     <a:lnB w="9525" cap="flat" cmpd="sng" algn="ctr">
                       <a:solidFill>
-                        <a:srgbClr val="F0D1D6"/>
+                        <a:srgbClr val="F6D5DA"/>
                       </a:solidFill>
                       <a:prstDash val="solid"/>
                     </a:lnB>
                     <a:solidFill>
-                      <a:srgbClr val="F0D1D6"/>
+                      <a:srgbClr val="F6D5DA"/>
                     </a:solidFill>
                   </a:tcPr>
                 </a:tc>
@@ -6689,7 +6976,7 @@
                       <a:r>
                         <a:rPr sz="1400" b="0">
                           <a:solidFill>
-                            <a:srgbClr val="2B2B2B"/>
+                            <a:srgbClr val="26231F"/>
                           </a:solidFill>
                         </a:rPr>
                         <a:t>□</a:t>
@@ -6699,25 +6986,25 @@
                   <a:tcPr anchor="ctr" marL="73152" marR="73152">
                     <a:lnL w="9525" cap="flat" cmpd="sng" algn="ctr">
                       <a:solidFill>
-                        <a:srgbClr val="F0D1D6"/>
+                        <a:srgbClr val="F6D5DA"/>
                       </a:solidFill>
                       <a:prstDash val="solid"/>
                     </a:lnL>
                     <a:lnR w="9525" cap="flat" cmpd="sng" algn="ctr">
                       <a:solidFill>
-                        <a:srgbClr val="F0D1D6"/>
+                        <a:srgbClr val="F6D5DA"/>
                       </a:solidFill>
                       <a:prstDash val="solid"/>
                     </a:lnR>
                     <a:lnT w="9525" cap="flat" cmpd="sng" algn="ctr">
                       <a:solidFill>
-                        <a:srgbClr val="F0D1D6"/>
+                        <a:srgbClr val="F6D5DA"/>
                       </a:solidFill>
                       <a:prstDash val="solid"/>
                     </a:lnT>
                     <a:lnB w="9525" cap="flat" cmpd="sng" algn="ctr">
                       <a:solidFill>
-                        <a:srgbClr val="F0D1D6"/>
+                        <a:srgbClr val="F6D5DA"/>
                       </a:solidFill>
                       <a:prstDash val="solid"/>
                     </a:lnB>
@@ -6735,7 +7022,7 @@
                       <a:r>
                         <a:rPr sz="1400" b="0">
                           <a:solidFill>
-                            <a:srgbClr val="2B2B2B"/>
+                            <a:srgbClr val="26231F"/>
                           </a:solidFill>
                         </a:rPr>
                         <a:t>□</a:t>
@@ -6745,25 +7032,25 @@
                   <a:tcPr anchor="ctr" marL="73152" marR="73152">
                     <a:lnL w="9525" cap="flat" cmpd="sng" algn="ctr">
                       <a:solidFill>
-                        <a:srgbClr val="F0D1D6"/>
+                        <a:srgbClr val="F6D5DA"/>
                       </a:solidFill>
                       <a:prstDash val="solid"/>
                     </a:lnL>
                     <a:lnR w="9525" cap="flat" cmpd="sng" algn="ctr">
                       <a:solidFill>
-                        <a:srgbClr val="F0D1D6"/>
+                        <a:srgbClr val="F6D5DA"/>
                       </a:solidFill>
                       <a:prstDash val="solid"/>
                     </a:lnR>
                     <a:lnT w="9525" cap="flat" cmpd="sng" algn="ctr">
                       <a:solidFill>
-                        <a:srgbClr val="F0D1D6"/>
+                        <a:srgbClr val="F6D5DA"/>
                       </a:solidFill>
                       <a:prstDash val="solid"/>
                     </a:lnT>
                     <a:lnB w="9525" cap="flat" cmpd="sng" algn="ctr">
                       <a:solidFill>
-                        <a:srgbClr val="F0D1D6"/>
+                        <a:srgbClr val="F6D5DA"/>
                       </a:solidFill>
                       <a:prstDash val="solid"/>
                     </a:lnB>
@@ -6781,7 +7068,7 @@
                       <a:r>
                         <a:rPr sz="1400" b="0">
                           <a:solidFill>
-                            <a:srgbClr val="2B2B2B"/>
+                            <a:srgbClr val="26231F"/>
                           </a:solidFill>
                         </a:rPr>
                         <a:t>□</a:t>
@@ -6791,25 +7078,25 @@
                   <a:tcPr anchor="ctr" marL="73152" marR="73152">
                     <a:lnL w="9525" cap="flat" cmpd="sng" algn="ctr">
                       <a:solidFill>
-                        <a:srgbClr val="F0D1D6"/>
+                        <a:srgbClr val="F6D5DA"/>
                       </a:solidFill>
                       <a:prstDash val="solid"/>
                     </a:lnL>
                     <a:lnR w="9525" cap="flat" cmpd="sng" algn="ctr">
                       <a:solidFill>
-                        <a:srgbClr val="F0D1D6"/>
+                        <a:srgbClr val="F6D5DA"/>
                       </a:solidFill>
                       <a:prstDash val="solid"/>
                     </a:lnR>
                     <a:lnT w="9525" cap="flat" cmpd="sng" algn="ctr">
                       <a:solidFill>
-                        <a:srgbClr val="F0D1D6"/>
+                        <a:srgbClr val="F6D5DA"/>
                       </a:solidFill>
                       <a:prstDash val="solid"/>
                     </a:lnT>
                     <a:lnB w="9525" cap="flat" cmpd="sng" algn="ctr">
                       <a:solidFill>
-                        <a:srgbClr val="F0D1D6"/>
+                        <a:srgbClr val="F6D5DA"/>
                       </a:solidFill>
                       <a:prstDash val="solid"/>
                     </a:lnB>
@@ -6829,7 +7116,7 @@
                       <a:r>
                         <a:rPr sz="1400" b="1">
                           <a:solidFill>
-                            <a:srgbClr val="431920"/>
+                            <a:srgbClr val="49272D"/>
                           </a:solidFill>
                         </a:rPr>
                         <a:t>질병 진단</a:t>
@@ -6839,30 +7126,30 @@
                   <a:tcPr anchor="ctr" marL="73152" marR="73152">
                     <a:lnL w="9525" cap="flat" cmpd="sng" algn="ctr">
                       <a:solidFill>
-                        <a:srgbClr val="F0D1D6"/>
+                        <a:srgbClr val="F6D5DA"/>
                       </a:solidFill>
                       <a:prstDash val="solid"/>
                     </a:lnL>
                     <a:lnR w="9525" cap="flat" cmpd="sng" algn="ctr">
                       <a:solidFill>
-                        <a:srgbClr val="F0D1D6"/>
+                        <a:srgbClr val="F6D5DA"/>
                       </a:solidFill>
                       <a:prstDash val="solid"/>
                     </a:lnR>
                     <a:lnT w="9525" cap="flat" cmpd="sng" algn="ctr">
                       <a:solidFill>
-                        <a:srgbClr val="F0D1D6"/>
+                        <a:srgbClr val="F6D5DA"/>
                       </a:solidFill>
                       <a:prstDash val="solid"/>
                     </a:lnT>
                     <a:lnB w="9525" cap="flat" cmpd="sng" algn="ctr">
                       <a:solidFill>
-                        <a:srgbClr val="F0D1D6"/>
+                        <a:srgbClr val="F6D5DA"/>
                       </a:solidFill>
                       <a:prstDash val="solid"/>
                     </a:lnB>
                     <a:solidFill>
-                      <a:srgbClr val="F0D1D6"/>
+                      <a:srgbClr val="F6D5DA"/>
                     </a:solidFill>
                   </a:tcPr>
                 </a:tc>
@@ -6875,7 +7162,7 @@
                       <a:r>
                         <a:rPr sz="1400" b="0">
                           <a:solidFill>
-                            <a:srgbClr val="2B2B2B"/>
+                            <a:srgbClr val="26231F"/>
                           </a:solidFill>
                         </a:rPr>
                         <a:t>□</a:t>
@@ -6885,30 +7172,30 @@
                   <a:tcPr anchor="ctr" marL="73152" marR="73152">
                     <a:lnL w="9525" cap="flat" cmpd="sng" algn="ctr">
                       <a:solidFill>
-                        <a:srgbClr val="F0D1D6"/>
+                        <a:srgbClr val="F6D5DA"/>
                       </a:solidFill>
                       <a:prstDash val="solid"/>
                     </a:lnL>
                     <a:lnR w="9525" cap="flat" cmpd="sng" algn="ctr">
                       <a:solidFill>
-                        <a:srgbClr val="F0D1D6"/>
+                        <a:srgbClr val="F6D5DA"/>
                       </a:solidFill>
                       <a:prstDash val="solid"/>
                     </a:lnR>
                     <a:lnT w="9525" cap="flat" cmpd="sng" algn="ctr">
                       <a:solidFill>
-                        <a:srgbClr val="F0D1D6"/>
+                        <a:srgbClr val="F6D5DA"/>
                       </a:solidFill>
                       <a:prstDash val="solid"/>
                     </a:lnT>
                     <a:lnB w="9525" cap="flat" cmpd="sng" algn="ctr">
                       <a:solidFill>
-                        <a:srgbClr val="F0D1D6"/>
+                        <a:srgbClr val="F6D5DA"/>
                       </a:solidFill>
                       <a:prstDash val="solid"/>
                     </a:lnB>
                     <a:solidFill>
-                      <a:srgbClr val="F9F0F2"/>
+                      <a:srgbClr val="FBECEF"/>
                     </a:solidFill>
                   </a:tcPr>
                 </a:tc>
@@ -6921,7 +7208,7 @@
                       <a:r>
                         <a:rPr sz="1400" b="0">
                           <a:solidFill>
-                            <a:srgbClr val="2B2B2B"/>
+                            <a:srgbClr val="26231F"/>
                           </a:solidFill>
                         </a:rPr>
                         <a:t>□</a:t>
@@ -6931,30 +7218,30 @@
                   <a:tcPr anchor="ctr" marL="73152" marR="73152">
                     <a:lnL w="9525" cap="flat" cmpd="sng" algn="ctr">
                       <a:solidFill>
-                        <a:srgbClr val="F0D1D6"/>
+                        <a:srgbClr val="F6D5DA"/>
                       </a:solidFill>
                       <a:prstDash val="solid"/>
                     </a:lnL>
                     <a:lnR w="9525" cap="flat" cmpd="sng" algn="ctr">
                       <a:solidFill>
-                        <a:srgbClr val="F0D1D6"/>
+                        <a:srgbClr val="F6D5DA"/>
                       </a:solidFill>
                       <a:prstDash val="solid"/>
                     </a:lnR>
                     <a:lnT w="9525" cap="flat" cmpd="sng" algn="ctr">
                       <a:solidFill>
-                        <a:srgbClr val="F0D1D6"/>
+                        <a:srgbClr val="F6D5DA"/>
                       </a:solidFill>
                       <a:prstDash val="solid"/>
                     </a:lnT>
                     <a:lnB w="9525" cap="flat" cmpd="sng" algn="ctr">
                       <a:solidFill>
-                        <a:srgbClr val="F0D1D6"/>
+                        <a:srgbClr val="F6D5DA"/>
                       </a:solidFill>
                       <a:prstDash val="solid"/>
                     </a:lnB>
                     <a:solidFill>
-                      <a:srgbClr val="F9F0F2"/>
+                      <a:srgbClr val="FBECEF"/>
                     </a:solidFill>
                   </a:tcPr>
                 </a:tc>
@@ -6967,7 +7254,7 @@
                       <a:r>
                         <a:rPr sz="1400" b="0">
                           <a:solidFill>
-                            <a:srgbClr val="2B2B2B"/>
+                            <a:srgbClr val="26231F"/>
                           </a:solidFill>
                         </a:rPr>
                         <a:t>□</a:t>
@@ -6977,30 +7264,30 @@
                   <a:tcPr anchor="ctr" marL="73152" marR="73152">
                     <a:lnL w="9525" cap="flat" cmpd="sng" algn="ctr">
                       <a:solidFill>
-                        <a:srgbClr val="F0D1D6"/>
+                        <a:srgbClr val="F6D5DA"/>
                       </a:solidFill>
                       <a:prstDash val="solid"/>
                     </a:lnL>
                     <a:lnR w="9525" cap="flat" cmpd="sng" algn="ctr">
                       <a:solidFill>
-                        <a:srgbClr val="F0D1D6"/>
+                        <a:srgbClr val="F6D5DA"/>
                       </a:solidFill>
                       <a:prstDash val="solid"/>
                     </a:lnR>
                     <a:lnT w="9525" cap="flat" cmpd="sng" algn="ctr">
                       <a:solidFill>
-                        <a:srgbClr val="F0D1D6"/>
+                        <a:srgbClr val="F6D5DA"/>
                       </a:solidFill>
                       <a:prstDash val="solid"/>
                     </a:lnT>
                     <a:lnB w="9525" cap="flat" cmpd="sng" algn="ctr">
                       <a:solidFill>
-                        <a:srgbClr val="F0D1D6"/>
+                        <a:srgbClr val="F6D5DA"/>
                       </a:solidFill>
                       <a:prstDash val="solid"/>
                     </a:lnB>
                     <a:solidFill>
-                      <a:srgbClr val="F9F0F2"/>
+                      <a:srgbClr val="FBECEF"/>
                     </a:solidFill>
                   </a:tcPr>
                 </a:tc>
@@ -7015,7 +7302,7 @@
                       <a:r>
                         <a:rPr sz="1400" b="1">
                           <a:solidFill>
-                            <a:srgbClr val="431920"/>
+                            <a:srgbClr val="49272D"/>
                           </a:solidFill>
                         </a:rPr>
                         <a:t>암</a:t>
@@ -7025,30 +7312,30 @@
                   <a:tcPr anchor="ctr" marL="73152" marR="73152">
                     <a:lnL w="9525" cap="flat" cmpd="sng" algn="ctr">
                       <a:solidFill>
-                        <a:srgbClr val="F0D1D6"/>
+                        <a:srgbClr val="F6D5DA"/>
                       </a:solidFill>
                       <a:prstDash val="solid"/>
                     </a:lnL>
                     <a:lnR w="9525" cap="flat" cmpd="sng" algn="ctr">
                       <a:solidFill>
-                        <a:srgbClr val="F0D1D6"/>
+                        <a:srgbClr val="F6D5DA"/>
                       </a:solidFill>
                       <a:prstDash val="solid"/>
                     </a:lnR>
                     <a:lnT w="9525" cap="flat" cmpd="sng" algn="ctr">
                       <a:solidFill>
-                        <a:srgbClr val="F0D1D6"/>
+                        <a:srgbClr val="F6D5DA"/>
                       </a:solidFill>
                       <a:prstDash val="solid"/>
                     </a:lnT>
                     <a:lnB w="9525" cap="flat" cmpd="sng" algn="ctr">
                       <a:solidFill>
-                        <a:srgbClr val="F0D1D6"/>
+                        <a:srgbClr val="F6D5DA"/>
                       </a:solidFill>
                       <a:prstDash val="solid"/>
                     </a:lnB>
                     <a:solidFill>
-                      <a:srgbClr val="F0D1D6"/>
+                      <a:srgbClr val="F6D5DA"/>
                     </a:solidFill>
                   </a:tcPr>
                 </a:tc>
@@ -7061,7 +7348,7 @@
                       <a:r>
                         <a:rPr sz="1400" b="0">
                           <a:solidFill>
-                            <a:srgbClr val="2B2B2B"/>
+                            <a:srgbClr val="26231F"/>
                           </a:solidFill>
                         </a:rPr>
                         <a:t>□</a:t>
@@ -7071,25 +7358,25 @@
                   <a:tcPr anchor="ctr" marL="73152" marR="73152">
                     <a:lnL w="9525" cap="flat" cmpd="sng" algn="ctr">
                       <a:solidFill>
-                        <a:srgbClr val="F0D1D6"/>
+                        <a:srgbClr val="F6D5DA"/>
                       </a:solidFill>
                       <a:prstDash val="solid"/>
                     </a:lnL>
                     <a:lnR w="9525" cap="flat" cmpd="sng" algn="ctr">
                       <a:solidFill>
-                        <a:srgbClr val="F0D1D6"/>
+                        <a:srgbClr val="F6D5DA"/>
                       </a:solidFill>
                       <a:prstDash val="solid"/>
                     </a:lnR>
                     <a:lnT w="9525" cap="flat" cmpd="sng" algn="ctr">
                       <a:solidFill>
-                        <a:srgbClr val="F0D1D6"/>
+                        <a:srgbClr val="F6D5DA"/>
                       </a:solidFill>
                       <a:prstDash val="solid"/>
                     </a:lnT>
                     <a:lnB w="9525" cap="flat" cmpd="sng" algn="ctr">
                       <a:solidFill>
-                        <a:srgbClr val="F0D1D6"/>
+                        <a:srgbClr val="F6D5DA"/>
                       </a:solidFill>
                       <a:prstDash val="solid"/>
                     </a:lnB>
@@ -7107,7 +7394,7 @@
                       <a:r>
                         <a:rPr sz="1400" b="0">
                           <a:solidFill>
-                            <a:srgbClr val="2B2B2B"/>
+                            <a:srgbClr val="26231F"/>
                           </a:solidFill>
                         </a:rPr>
                         <a:t>□</a:t>
@@ -7117,25 +7404,25 @@
                   <a:tcPr anchor="ctr" marL="73152" marR="73152">
                     <a:lnL w="9525" cap="flat" cmpd="sng" algn="ctr">
                       <a:solidFill>
-                        <a:srgbClr val="F0D1D6"/>
+                        <a:srgbClr val="F6D5DA"/>
                       </a:solidFill>
                       <a:prstDash val="solid"/>
                     </a:lnL>
                     <a:lnR w="9525" cap="flat" cmpd="sng" algn="ctr">
                       <a:solidFill>
-                        <a:srgbClr val="F0D1D6"/>
+                        <a:srgbClr val="F6D5DA"/>
                       </a:solidFill>
                       <a:prstDash val="solid"/>
                     </a:lnR>
                     <a:lnT w="9525" cap="flat" cmpd="sng" algn="ctr">
                       <a:solidFill>
-                        <a:srgbClr val="F0D1D6"/>
+                        <a:srgbClr val="F6D5DA"/>
                       </a:solidFill>
                       <a:prstDash val="solid"/>
                     </a:lnT>
                     <a:lnB w="9525" cap="flat" cmpd="sng" algn="ctr">
                       <a:solidFill>
-                        <a:srgbClr val="F0D1D6"/>
+                        <a:srgbClr val="F6D5DA"/>
                       </a:solidFill>
                       <a:prstDash val="solid"/>
                     </a:lnB>
@@ -7153,7 +7440,7 @@
                       <a:r>
                         <a:rPr sz="1400" b="0">
                           <a:solidFill>
-                            <a:srgbClr val="2B2B2B"/>
+                            <a:srgbClr val="26231F"/>
                           </a:solidFill>
                         </a:rPr>
                         <a:t>□</a:t>
@@ -7163,25 +7450,25 @@
                   <a:tcPr anchor="ctr" marL="73152" marR="73152">
                     <a:lnL w="9525" cap="flat" cmpd="sng" algn="ctr">
                       <a:solidFill>
-                        <a:srgbClr val="F0D1D6"/>
+                        <a:srgbClr val="F6D5DA"/>
                       </a:solidFill>
                       <a:prstDash val="solid"/>
                     </a:lnL>
                     <a:lnR w="9525" cap="flat" cmpd="sng" algn="ctr">
                       <a:solidFill>
-                        <a:srgbClr val="F0D1D6"/>
+                        <a:srgbClr val="F6D5DA"/>
                       </a:solidFill>
                       <a:prstDash val="solid"/>
                     </a:lnR>
                     <a:lnT w="9525" cap="flat" cmpd="sng" algn="ctr">
                       <a:solidFill>
-                        <a:srgbClr val="F0D1D6"/>
+                        <a:srgbClr val="F6D5DA"/>
                       </a:solidFill>
                       <a:prstDash val="solid"/>
                     </a:lnT>
                     <a:lnB w="9525" cap="flat" cmpd="sng" algn="ctr">
                       <a:solidFill>
-                        <a:srgbClr val="F0D1D6"/>
+                        <a:srgbClr val="F6D5DA"/>
                       </a:solidFill>
                       <a:prstDash val="solid"/>
                     </a:lnB>
@@ -7201,7 +7488,7 @@
                       <a:r>
                         <a:rPr sz="1400" b="1">
                           <a:solidFill>
-                            <a:srgbClr val="431920"/>
+                            <a:srgbClr val="49272D"/>
                           </a:solidFill>
                         </a:rPr>
                         <a:t>뇌·심장</a:t>
@@ -7211,30 +7498,30 @@
                   <a:tcPr anchor="ctr" marL="73152" marR="73152">
                     <a:lnL w="9525" cap="flat" cmpd="sng" algn="ctr">
                       <a:solidFill>
-                        <a:srgbClr val="F0D1D6"/>
+                        <a:srgbClr val="F6D5DA"/>
                       </a:solidFill>
                       <a:prstDash val="solid"/>
                     </a:lnL>
                     <a:lnR w="9525" cap="flat" cmpd="sng" algn="ctr">
                       <a:solidFill>
-                        <a:srgbClr val="F0D1D6"/>
+                        <a:srgbClr val="F6D5DA"/>
                       </a:solidFill>
                       <a:prstDash val="solid"/>
                     </a:lnR>
                     <a:lnT w="9525" cap="flat" cmpd="sng" algn="ctr">
                       <a:solidFill>
-                        <a:srgbClr val="F0D1D6"/>
+                        <a:srgbClr val="F6D5DA"/>
                       </a:solidFill>
                       <a:prstDash val="solid"/>
                     </a:lnT>
                     <a:lnB w="9525" cap="flat" cmpd="sng" algn="ctr">
                       <a:solidFill>
-                        <a:srgbClr val="F0D1D6"/>
+                        <a:srgbClr val="F6D5DA"/>
                       </a:solidFill>
                       <a:prstDash val="solid"/>
                     </a:lnB>
                     <a:solidFill>
-                      <a:srgbClr val="F0D1D6"/>
+                      <a:srgbClr val="F6D5DA"/>
                     </a:solidFill>
                   </a:tcPr>
                 </a:tc>
@@ -7247,7 +7534,7 @@
                       <a:r>
                         <a:rPr sz="1400" b="0">
                           <a:solidFill>
-                            <a:srgbClr val="2B2B2B"/>
+                            <a:srgbClr val="26231F"/>
                           </a:solidFill>
                         </a:rPr>
                         <a:t>□</a:t>
@@ -7257,30 +7544,30 @@
                   <a:tcPr anchor="ctr" marL="73152" marR="73152">
                     <a:lnL w="9525" cap="flat" cmpd="sng" algn="ctr">
                       <a:solidFill>
-                        <a:srgbClr val="F0D1D6"/>
+                        <a:srgbClr val="F6D5DA"/>
                       </a:solidFill>
                       <a:prstDash val="solid"/>
                     </a:lnL>
                     <a:lnR w="9525" cap="flat" cmpd="sng" algn="ctr">
                       <a:solidFill>
-                        <a:srgbClr val="F0D1D6"/>
+                        <a:srgbClr val="F6D5DA"/>
                       </a:solidFill>
                       <a:prstDash val="solid"/>
                     </a:lnR>
                     <a:lnT w="9525" cap="flat" cmpd="sng" algn="ctr">
                       <a:solidFill>
-                        <a:srgbClr val="F0D1D6"/>
+                        <a:srgbClr val="F6D5DA"/>
                       </a:solidFill>
                       <a:prstDash val="solid"/>
                     </a:lnT>
                     <a:lnB w="9525" cap="flat" cmpd="sng" algn="ctr">
                       <a:solidFill>
-                        <a:srgbClr val="F0D1D6"/>
+                        <a:srgbClr val="F6D5DA"/>
                       </a:solidFill>
                       <a:prstDash val="solid"/>
                     </a:lnB>
                     <a:solidFill>
-                      <a:srgbClr val="F9F0F2"/>
+                      <a:srgbClr val="FBECEF"/>
                     </a:solidFill>
                   </a:tcPr>
                 </a:tc>
@@ -7293,7 +7580,7 @@
                       <a:r>
                         <a:rPr sz="1400" b="0">
                           <a:solidFill>
-                            <a:srgbClr val="2B2B2B"/>
+                            <a:srgbClr val="26231F"/>
                           </a:solidFill>
                         </a:rPr>
                         <a:t>□</a:t>
@@ -7303,30 +7590,30 @@
                   <a:tcPr anchor="ctr" marL="73152" marR="73152">
                     <a:lnL w="9525" cap="flat" cmpd="sng" algn="ctr">
                       <a:solidFill>
-                        <a:srgbClr val="F0D1D6"/>
+                        <a:srgbClr val="F6D5DA"/>
                       </a:solidFill>
                       <a:prstDash val="solid"/>
                     </a:lnL>
                     <a:lnR w="9525" cap="flat" cmpd="sng" algn="ctr">
                       <a:solidFill>
-                        <a:srgbClr val="F0D1D6"/>
+                        <a:srgbClr val="F6D5DA"/>
                       </a:solidFill>
                       <a:prstDash val="solid"/>
                     </a:lnR>
                     <a:lnT w="9525" cap="flat" cmpd="sng" algn="ctr">
                       <a:solidFill>
-                        <a:srgbClr val="F0D1D6"/>
+                        <a:srgbClr val="F6D5DA"/>
                       </a:solidFill>
                       <a:prstDash val="solid"/>
                     </a:lnT>
                     <a:lnB w="9525" cap="flat" cmpd="sng" algn="ctr">
                       <a:solidFill>
-                        <a:srgbClr val="F0D1D6"/>
+                        <a:srgbClr val="F6D5DA"/>
                       </a:solidFill>
                       <a:prstDash val="solid"/>
                     </a:lnB>
                     <a:solidFill>
-                      <a:srgbClr val="F9F0F2"/>
+                      <a:srgbClr val="FBECEF"/>
                     </a:solidFill>
                   </a:tcPr>
                 </a:tc>
@@ -7339,7 +7626,7 @@
                       <a:r>
                         <a:rPr sz="1400" b="0">
                           <a:solidFill>
-                            <a:srgbClr val="2B2B2B"/>
+                            <a:srgbClr val="26231F"/>
                           </a:solidFill>
                         </a:rPr>
                         <a:t>□</a:t>
@@ -7349,30 +7636,30 @@
                   <a:tcPr anchor="ctr" marL="73152" marR="73152">
                     <a:lnL w="9525" cap="flat" cmpd="sng" algn="ctr">
                       <a:solidFill>
-                        <a:srgbClr val="F0D1D6"/>
+                        <a:srgbClr val="F6D5DA"/>
                       </a:solidFill>
                       <a:prstDash val="solid"/>
                     </a:lnL>
                     <a:lnR w="9525" cap="flat" cmpd="sng" algn="ctr">
                       <a:solidFill>
-                        <a:srgbClr val="F0D1D6"/>
+                        <a:srgbClr val="F6D5DA"/>
                       </a:solidFill>
                       <a:prstDash val="solid"/>
                     </a:lnR>
                     <a:lnT w="9525" cap="flat" cmpd="sng" algn="ctr">
                       <a:solidFill>
-                        <a:srgbClr val="F0D1D6"/>
+                        <a:srgbClr val="F6D5DA"/>
                       </a:solidFill>
                       <a:prstDash val="solid"/>
                     </a:lnT>
                     <a:lnB w="9525" cap="flat" cmpd="sng" algn="ctr">
                       <a:solidFill>
-                        <a:srgbClr val="F0D1D6"/>
+                        <a:srgbClr val="F6D5DA"/>
                       </a:solidFill>
                       <a:prstDash val="solid"/>
                     </a:lnB>
                     <a:solidFill>
-                      <a:srgbClr val="F9F0F2"/>
+                      <a:srgbClr val="FBECEF"/>
                     </a:solidFill>
                   </a:tcPr>
                 </a:tc>
@@ -7387,7 +7674,7 @@
                       <a:r>
                         <a:rPr sz="1400" b="1">
                           <a:solidFill>
-                            <a:srgbClr val="431920"/>
+                            <a:srgbClr val="49272D"/>
                           </a:solidFill>
                         </a:rPr>
                         <a:t>입원·수술</a:t>
@@ -7397,30 +7684,30 @@
                   <a:tcPr anchor="ctr" marL="73152" marR="73152">
                     <a:lnL w="9525" cap="flat" cmpd="sng" algn="ctr">
                       <a:solidFill>
-                        <a:srgbClr val="F0D1D6"/>
+                        <a:srgbClr val="F6D5DA"/>
                       </a:solidFill>
                       <a:prstDash val="solid"/>
                     </a:lnL>
                     <a:lnR w="9525" cap="flat" cmpd="sng" algn="ctr">
                       <a:solidFill>
-                        <a:srgbClr val="F0D1D6"/>
+                        <a:srgbClr val="F6D5DA"/>
                       </a:solidFill>
                       <a:prstDash val="solid"/>
                     </a:lnR>
                     <a:lnT w="9525" cap="flat" cmpd="sng" algn="ctr">
                       <a:solidFill>
-                        <a:srgbClr val="F0D1D6"/>
+                        <a:srgbClr val="F6D5DA"/>
                       </a:solidFill>
                       <a:prstDash val="solid"/>
                     </a:lnT>
                     <a:lnB w="9525" cap="flat" cmpd="sng" algn="ctr">
                       <a:solidFill>
-                        <a:srgbClr val="F0D1D6"/>
+                        <a:srgbClr val="F6D5DA"/>
                       </a:solidFill>
                       <a:prstDash val="solid"/>
                     </a:lnB>
                     <a:solidFill>
-                      <a:srgbClr val="F0D1D6"/>
+                      <a:srgbClr val="F6D5DA"/>
                     </a:solidFill>
                   </a:tcPr>
                 </a:tc>
@@ -7433,7 +7720,7 @@
                       <a:r>
                         <a:rPr sz="1400" b="0">
                           <a:solidFill>
-                            <a:srgbClr val="2B2B2B"/>
+                            <a:srgbClr val="26231F"/>
                           </a:solidFill>
                         </a:rPr>
                         <a:t>□</a:t>
@@ -7443,25 +7730,25 @@
                   <a:tcPr anchor="ctr" marL="73152" marR="73152">
                     <a:lnL w="9525" cap="flat" cmpd="sng" algn="ctr">
                       <a:solidFill>
-                        <a:srgbClr val="F0D1D6"/>
+                        <a:srgbClr val="F6D5DA"/>
                       </a:solidFill>
                       <a:prstDash val="solid"/>
                     </a:lnL>
                     <a:lnR w="9525" cap="flat" cmpd="sng" algn="ctr">
                       <a:solidFill>
-                        <a:srgbClr val="F0D1D6"/>
+                        <a:srgbClr val="F6D5DA"/>
                       </a:solidFill>
                       <a:prstDash val="solid"/>
                     </a:lnR>
                     <a:lnT w="9525" cap="flat" cmpd="sng" algn="ctr">
                       <a:solidFill>
-                        <a:srgbClr val="F0D1D6"/>
+                        <a:srgbClr val="F6D5DA"/>
                       </a:solidFill>
                       <a:prstDash val="solid"/>
                     </a:lnT>
                     <a:lnB w="9525" cap="flat" cmpd="sng" algn="ctr">
                       <a:solidFill>
-                        <a:srgbClr val="F0D1D6"/>
+                        <a:srgbClr val="F6D5DA"/>
                       </a:solidFill>
                       <a:prstDash val="solid"/>
                     </a:lnB>
@@ -7479,7 +7766,7 @@
                       <a:r>
                         <a:rPr sz="1400" b="0">
                           <a:solidFill>
-                            <a:srgbClr val="2B2B2B"/>
+                            <a:srgbClr val="26231F"/>
                           </a:solidFill>
                         </a:rPr>
                         <a:t>□</a:t>
@@ -7489,25 +7776,25 @@
                   <a:tcPr anchor="ctr" marL="73152" marR="73152">
                     <a:lnL w="9525" cap="flat" cmpd="sng" algn="ctr">
                       <a:solidFill>
-                        <a:srgbClr val="F0D1D6"/>
+                        <a:srgbClr val="F6D5DA"/>
                       </a:solidFill>
                       <a:prstDash val="solid"/>
                     </a:lnL>
                     <a:lnR w="9525" cap="flat" cmpd="sng" algn="ctr">
                       <a:solidFill>
-                        <a:srgbClr val="F0D1D6"/>
+                        <a:srgbClr val="F6D5DA"/>
                       </a:solidFill>
                       <a:prstDash val="solid"/>
                     </a:lnR>
                     <a:lnT w="9525" cap="flat" cmpd="sng" algn="ctr">
                       <a:solidFill>
-                        <a:srgbClr val="F0D1D6"/>
+                        <a:srgbClr val="F6D5DA"/>
                       </a:solidFill>
                       <a:prstDash val="solid"/>
                     </a:lnT>
                     <a:lnB w="9525" cap="flat" cmpd="sng" algn="ctr">
                       <a:solidFill>
-                        <a:srgbClr val="F0D1D6"/>
+                        <a:srgbClr val="F6D5DA"/>
                       </a:solidFill>
                       <a:prstDash val="solid"/>
                     </a:lnB>
@@ -7525,7 +7812,7 @@
                       <a:r>
                         <a:rPr sz="1400" b="0">
                           <a:solidFill>
-                            <a:srgbClr val="2B2B2B"/>
+                            <a:srgbClr val="26231F"/>
                           </a:solidFill>
                         </a:rPr>
                         <a:t>□</a:t>
@@ -7535,25 +7822,25 @@
                   <a:tcPr anchor="ctr" marL="73152" marR="73152">
                     <a:lnL w="9525" cap="flat" cmpd="sng" algn="ctr">
                       <a:solidFill>
-                        <a:srgbClr val="F0D1D6"/>
+                        <a:srgbClr val="F6D5DA"/>
                       </a:solidFill>
                       <a:prstDash val="solid"/>
                     </a:lnL>
                     <a:lnR w="9525" cap="flat" cmpd="sng" algn="ctr">
                       <a:solidFill>
-                        <a:srgbClr val="F0D1D6"/>
+                        <a:srgbClr val="F6D5DA"/>
                       </a:solidFill>
                       <a:prstDash val="solid"/>
                     </a:lnR>
                     <a:lnT w="9525" cap="flat" cmpd="sng" algn="ctr">
                       <a:solidFill>
-                        <a:srgbClr val="F0D1D6"/>
+                        <a:srgbClr val="F6D5DA"/>
                       </a:solidFill>
                       <a:prstDash val="solid"/>
                     </a:lnT>
                     <a:lnB w="9525" cap="flat" cmpd="sng" algn="ctr">
                       <a:solidFill>
-                        <a:srgbClr val="F0D1D6"/>
+                        <a:srgbClr val="F6D5DA"/>
                       </a:solidFill>
                       <a:prstDash val="solid"/>
                     </a:lnB>
@@ -7573,7 +7860,7 @@
                       <a:r>
                         <a:rPr sz="1400" b="1">
                           <a:solidFill>
-                            <a:srgbClr val="431920"/>
+                            <a:srgbClr val="49272D"/>
                           </a:solidFill>
                         </a:rPr>
                         <a:t>상해</a:t>
@@ -7583,30 +7870,30 @@
                   <a:tcPr anchor="ctr" marL="73152" marR="73152">
                     <a:lnL w="9525" cap="flat" cmpd="sng" algn="ctr">
                       <a:solidFill>
-                        <a:srgbClr val="F0D1D6"/>
+                        <a:srgbClr val="F6D5DA"/>
                       </a:solidFill>
                       <a:prstDash val="solid"/>
                     </a:lnL>
                     <a:lnR w="9525" cap="flat" cmpd="sng" algn="ctr">
                       <a:solidFill>
-                        <a:srgbClr val="F0D1D6"/>
+                        <a:srgbClr val="F6D5DA"/>
                       </a:solidFill>
                       <a:prstDash val="solid"/>
                     </a:lnR>
                     <a:lnT w="9525" cap="flat" cmpd="sng" algn="ctr">
                       <a:solidFill>
-                        <a:srgbClr val="F0D1D6"/>
+                        <a:srgbClr val="F6D5DA"/>
                       </a:solidFill>
                       <a:prstDash val="solid"/>
                     </a:lnT>
                     <a:lnB w="9525" cap="flat" cmpd="sng" algn="ctr">
                       <a:solidFill>
-                        <a:srgbClr val="F0D1D6"/>
+                        <a:srgbClr val="F6D5DA"/>
                       </a:solidFill>
                       <a:prstDash val="solid"/>
                     </a:lnB>
                     <a:solidFill>
-                      <a:srgbClr val="F0D1D6"/>
+                      <a:srgbClr val="F6D5DA"/>
                     </a:solidFill>
                   </a:tcPr>
                 </a:tc>
@@ -7619,7 +7906,7 @@
                       <a:r>
                         <a:rPr sz="1400" b="0">
                           <a:solidFill>
-                            <a:srgbClr val="2B2B2B"/>
+                            <a:srgbClr val="26231F"/>
                           </a:solidFill>
                         </a:rPr>
                         <a:t>□</a:t>
@@ -7629,30 +7916,30 @@
                   <a:tcPr anchor="ctr" marL="73152" marR="73152">
                     <a:lnL w="9525" cap="flat" cmpd="sng" algn="ctr">
                       <a:solidFill>
-                        <a:srgbClr val="F0D1D6"/>
+                        <a:srgbClr val="F6D5DA"/>
                       </a:solidFill>
                       <a:prstDash val="solid"/>
                     </a:lnL>
                     <a:lnR w="9525" cap="flat" cmpd="sng" algn="ctr">
                       <a:solidFill>
-                        <a:srgbClr val="F0D1D6"/>
+                        <a:srgbClr val="F6D5DA"/>
                       </a:solidFill>
                       <a:prstDash val="solid"/>
                     </a:lnR>
                     <a:lnT w="9525" cap="flat" cmpd="sng" algn="ctr">
                       <a:solidFill>
-                        <a:srgbClr val="F0D1D6"/>
+                        <a:srgbClr val="F6D5DA"/>
                       </a:solidFill>
                       <a:prstDash val="solid"/>
                     </a:lnT>
                     <a:lnB w="9525" cap="flat" cmpd="sng" algn="ctr">
                       <a:solidFill>
-                        <a:srgbClr val="F0D1D6"/>
+                        <a:srgbClr val="F6D5DA"/>
                       </a:solidFill>
                       <a:prstDash val="solid"/>
                     </a:lnB>
                     <a:solidFill>
-                      <a:srgbClr val="F9F0F2"/>
+                      <a:srgbClr val="FBECEF"/>
                     </a:solidFill>
                   </a:tcPr>
                 </a:tc>
@@ -7665,7 +7952,7 @@
                       <a:r>
                         <a:rPr sz="1400" b="0">
                           <a:solidFill>
-                            <a:srgbClr val="2B2B2B"/>
+                            <a:srgbClr val="26231F"/>
                           </a:solidFill>
                         </a:rPr>
                         <a:t>□</a:t>
@@ -7675,30 +7962,30 @@
                   <a:tcPr anchor="ctr" marL="73152" marR="73152">
                     <a:lnL w="9525" cap="flat" cmpd="sng" algn="ctr">
                       <a:solidFill>
-                        <a:srgbClr val="F0D1D6"/>
+                        <a:srgbClr val="F6D5DA"/>
                       </a:solidFill>
                       <a:prstDash val="solid"/>
                     </a:lnL>
                     <a:lnR w="9525" cap="flat" cmpd="sng" algn="ctr">
                       <a:solidFill>
-                        <a:srgbClr val="F0D1D6"/>
+                        <a:srgbClr val="F6D5DA"/>
                       </a:solidFill>
                       <a:prstDash val="solid"/>
                     </a:lnR>
                     <a:lnT w="9525" cap="flat" cmpd="sng" algn="ctr">
                       <a:solidFill>
-                        <a:srgbClr val="F0D1D6"/>
+                        <a:srgbClr val="F6D5DA"/>
                       </a:solidFill>
                       <a:prstDash val="solid"/>
                     </a:lnT>
                     <a:lnB w="9525" cap="flat" cmpd="sng" algn="ctr">
                       <a:solidFill>
-                        <a:srgbClr val="F0D1D6"/>
+                        <a:srgbClr val="F6D5DA"/>
                       </a:solidFill>
                       <a:prstDash val="solid"/>
                     </a:lnB>
                     <a:solidFill>
-                      <a:srgbClr val="F9F0F2"/>
+                      <a:srgbClr val="FBECEF"/>
                     </a:solidFill>
                   </a:tcPr>
                 </a:tc>
@@ -7711,7 +7998,7 @@
                       <a:r>
                         <a:rPr sz="1400" b="0">
                           <a:solidFill>
-                            <a:srgbClr val="2B2B2B"/>
+                            <a:srgbClr val="26231F"/>
                           </a:solidFill>
                         </a:rPr>
                         <a:t>□</a:t>
@@ -7721,30 +8008,30 @@
                   <a:tcPr anchor="ctr" marL="73152" marR="73152">
                     <a:lnL w="9525" cap="flat" cmpd="sng" algn="ctr">
                       <a:solidFill>
-                        <a:srgbClr val="F0D1D6"/>
+                        <a:srgbClr val="F6D5DA"/>
                       </a:solidFill>
                       <a:prstDash val="solid"/>
                     </a:lnL>
                     <a:lnR w="9525" cap="flat" cmpd="sng" algn="ctr">
                       <a:solidFill>
-                        <a:srgbClr val="F0D1D6"/>
+                        <a:srgbClr val="F6D5DA"/>
                       </a:solidFill>
                       <a:prstDash val="solid"/>
                     </a:lnR>
                     <a:lnT w="9525" cap="flat" cmpd="sng" algn="ctr">
                       <a:solidFill>
-                        <a:srgbClr val="F0D1D6"/>
+                        <a:srgbClr val="F6D5DA"/>
                       </a:solidFill>
                       <a:prstDash val="solid"/>
                     </a:lnT>
                     <a:lnB w="9525" cap="flat" cmpd="sng" algn="ctr">
                       <a:solidFill>
-                        <a:srgbClr val="F0D1D6"/>
+                        <a:srgbClr val="F6D5DA"/>
                       </a:solidFill>
                       <a:prstDash val="solid"/>
                     </a:lnB>
                     <a:solidFill>
-                      <a:srgbClr val="F9F0F2"/>
+                      <a:srgbClr val="FBECEF"/>
                     </a:solidFill>
                   </a:tcPr>
                 </a:tc>
@@ -7759,7 +8046,7 @@
                       <a:r>
                         <a:rPr sz="1400" b="1">
                           <a:solidFill>
-                            <a:srgbClr val="431920"/>
+                            <a:srgbClr val="49272D"/>
                           </a:solidFill>
                         </a:rPr>
                         <a:t>실손의료</a:t>
@@ -7769,30 +8056,30 @@
                   <a:tcPr anchor="ctr" marL="73152" marR="73152">
                     <a:lnL w="9525" cap="flat" cmpd="sng" algn="ctr">
                       <a:solidFill>
-                        <a:srgbClr val="F0D1D6"/>
+                        <a:srgbClr val="F6D5DA"/>
                       </a:solidFill>
                       <a:prstDash val="solid"/>
                     </a:lnL>
                     <a:lnR w="9525" cap="flat" cmpd="sng" algn="ctr">
                       <a:solidFill>
-                        <a:srgbClr val="F0D1D6"/>
+                        <a:srgbClr val="F6D5DA"/>
                       </a:solidFill>
                       <a:prstDash val="solid"/>
                     </a:lnR>
                     <a:lnT w="9525" cap="flat" cmpd="sng" algn="ctr">
                       <a:solidFill>
-                        <a:srgbClr val="F0D1D6"/>
+                        <a:srgbClr val="F6D5DA"/>
                       </a:solidFill>
                       <a:prstDash val="solid"/>
                     </a:lnT>
                     <a:lnB w="9525" cap="flat" cmpd="sng" algn="ctr">
                       <a:solidFill>
-                        <a:srgbClr val="F0D1D6"/>
+                        <a:srgbClr val="F6D5DA"/>
                       </a:solidFill>
                       <a:prstDash val="solid"/>
                     </a:lnB>
                     <a:solidFill>
-                      <a:srgbClr val="F0D1D6"/>
+                      <a:srgbClr val="F6D5DA"/>
                     </a:solidFill>
                   </a:tcPr>
                 </a:tc>
@@ -7805,7 +8092,7 @@
                       <a:r>
                         <a:rPr sz="1400" b="0">
                           <a:solidFill>
-                            <a:srgbClr val="2B2B2B"/>
+                            <a:srgbClr val="26231F"/>
                           </a:solidFill>
                         </a:rPr>
                         <a:t>□</a:t>
@@ -7815,25 +8102,25 @@
                   <a:tcPr anchor="ctr" marL="73152" marR="73152">
                     <a:lnL w="9525" cap="flat" cmpd="sng" algn="ctr">
                       <a:solidFill>
-                        <a:srgbClr val="F0D1D6"/>
+                        <a:srgbClr val="F6D5DA"/>
                       </a:solidFill>
                       <a:prstDash val="solid"/>
                     </a:lnL>
                     <a:lnR w="9525" cap="flat" cmpd="sng" algn="ctr">
                       <a:solidFill>
-                        <a:srgbClr val="F0D1D6"/>
+                        <a:srgbClr val="F6D5DA"/>
                       </a:solidFill>
                       <a:prstDash val="solid"/>
                     </a:lnR>
                     <a:lnT w="9525" cap="flat" cmpd="sng" algn="ctr">
                       <a:solidFill>
-                        <a:srgbClr val="F0D1D6"/>
+                        <a:srgbClr val="F6D5DA"/>
                       </a:solidFill>
                       <a:prstDash val="solid"/>
                     </a:lnT>
                     <a:lnB w="9525" cap="flat" cmpd="sng" algn="ctr">
                       <a:solidFill>
-                        <a:srgbClr val="F0D1D6"/>
+                        <a:srgbClr val="F6D5DA"/>
                       </a:solidFill>
                       <a:prstDash val="solid"/>
                     </a:lnB>
@@ -7851,7 +8138,7 @@
                       <a:r>
                         <a:rPr sz="1400" b="0">
                           <a:solidFill>
-                            <a:srgbClr val="2B2B2B"/>
+                            <a:srgbClr val="26231F"/>
                           </a:solidFill>
                         </a:rPr>
                         <a:t>□</a:t>
@@ -7861,25 +8148,25 @@
                   <a:tcPr anchor="ctr" marL="73152" marR="73152">
                     <a:lnL w="9525" cap="flat" cmpd="sng" algn="ctr">
                       <a:solidFill>
-                        <a:srgbClr val="F0D1D6"/>
+                        <a:srgbClr val="F6D5DA"/>
                       </a:solidFill>
                       <a:prstDash val="solid"/>
                     </a:lnL>
                     <a:lnR w="9525" cap="flat" cmpd="sng" algn="ctr">
                       <a:solidFill>
-                        <a:srgbClr val="F0D1D6"/>
+                        <a:srgbClr val="F6D5DA"/>
                       </a:solidFill>
                       <a:prstDash val="solid"/>
                     </a:lnR>
                     <a:lnT w="9525" cap="flat" cmpd="sng" algn="ctr">
                       <a:solidFill>
-                        <a:srgbClr val="F0D1D6"/>
+                        <a:srgbClr val="F6D5DA"/>
                       </a:solidFill>
                       <a:prstDash val="solid"/>
                     </a:lnT>
                     <a:lnB w="9525" cap="flat" cmpd="sng" algn="ctr">
                       <a:solidFill>
-                        <a:srgbClr val="F0D1D6"/>
+                        <a:srgbClr val="F6D5DA"/>
                       </a:solidFill>
                       <a:prstDash val="solid"/>
                     </a:lnB>
@@ -7897,7 +8184,7 @@
                       <a:r>
                         <a:rPr sz="1400" b="0">
                           <a:solidFill>
-                            <a:srgbClr val="2B2B2B"/>
+                            <a:srgbClr val="26231F"/>
                           </a:solidFill>
                         </a:rPr>
                         <a:t>□</a:t>
@@ -7907,25 +8194,25 @@
                   <a:tcPr anchor="ctr" marL="73152" marR="73152">
                     <a:lnL w="9525" cap="flat" cmpd="sng" algn="ctr">
                       <a:solidFill>
-                        <a:srgbClr val="F0D1D6"/>
+                        <a:srgbClr val="F6D5DA"/>
                       </a:solidFill>
                       <a:prstDash val="solid"/>
                     </a:lnL>
                     <a:lnR w="9525" cap="flat" cmpd="sng" algn="ctr">
                       <a:solidFill>
-                        <a:srgbClr val="F0D1D6"/>
+                        <a:srgbClr val="F6D5DA"/>
                       </a:solidFill>
                       <a:prstDash val="solid"/>
                     </a:lnR>
                     <a:lnT w="9525" cap="flat" cmpd="sng" algn="ctr">
                       <a:solidFill>
-                        <a:srgbClr val="F0D1D6"/>
+                        <a:srgbClr val="F6D5DA"/>
                       </a:solidFill>
                       <a:prstDash val="solid"/>
                     </a:lnT>
                     <a:lnB w="9525" cap="flat" cmpd="sng" algn="ctr">
                       <a:solidFill>
-                        <a:srgbClr val="F0D1D6"/>
+                        <a:srgbClr val="F6D5DA"/>
                       </a:solidFill>
                       <a:prstDash val="solid"/>
                     </a:lnB>
@@ -7945,7 +8232,7 @@
                       <a:r>
                         <a:rPr sz="1400" b="1">
                           <a:solidFill>
-                            <a:srgbClr val="431920"/>
+                            <a:srgbClr val="49272D"/>
                           </a:solidFill>
                         </a:rPr>
                         <a:t>연금·노후자금</a:t>
@@ -7955,30 +8242,30 @@
                   <a:tcPr anchor="ctr" marL="73152" marR="73152">
                     <a:lnL w="9525" cap="flat" cmpd="sng" algn="ctr">
                       <a:solidFill>
-                        <a:srgbClr val="F0D1D6"/>
+                        <a:srgbClr val="F6D5DA"/>
                       </a:solidFill>
                       <a:prstDash val="solid"/>
                     </a:lnL>
                     <a:lnR w="9525" cap="flat" cmpd="sng" algn="ctr">
                       <a:solidFill>
-                        <a:srgbClr val="F0D1D6"/>
+                        <a:srgbClr val="F6D5DA"/>
                       </a:solidFill>
                       <a:prstDash val="solid"/>
                     </a:lnR>
                     <a:lnT w="9525" cap="flat" cmpd="sng" algn="ctr">
                       <a:solidFill>
-                        <a:srgbClr val="F0D1D6"/>
+                        <a:srgbClr val="F6D5DA"/>
                       </a:solidFill>
                       <a:prstDash val="solid"/>
                     </a:lnT>
                     <a:lnB w="9525" cap="flat" cmpd="sng" algn="ctr">
                       <a:solidFill>
-                        <a:srgbClr val="F0D1D6"/>
+                        <a:srgbClr val="F6D5DA"/>
                       </a:solidFill>
                       <a:prstDash val="solid"/>
                     </a:lnB>
                     <a:solidFill>
-                      <a:srgbClr val="F0D1D6"/>
+                      <a:srgbClr val="F6D5DA"/>
                     </a:solidFill>
                   </a:tcPr>
                 </a:tc>
@@ -7991,7 +8278,7 @@
                       <a:r>
                         <a:rPr sz="1400" b="0">
                           <a:solidFill>
-                            <a:srgbClr val="2B2B2B"/>
+                            <a:srgbClr val="26231F"/>
                           </a:solidFill>
                         </a:rPr>
                         <a:t>□</a:t>
@@ -8001,30 +8288,30 @@
                   <a:tcPr anchor="ctr" marL="73152" marR="73152">
                     <a:lnL w="9525" cap="flat" cmpd="sng" algn="ctr">
                       <a:solidFill>
-                        <a:srgbClr val="F0D1D6"/>
+                        <a:srgbClr val="F6D5DA"/>
                       </a:solidFill>
                       <a:prstDash val="solid"/>
                     </a:lnL>
                     <a:lnR w="9525" cap="flat" cmpd="sng" algn="ctr">
                       <a:solidFill>
-                        <a:srgbClr val="F0D1D6"/>
+                        <a:srgbClr val="F6D5DA"/>
                       </a:solidFill>
                       <a:prstDash val="solid"/>
                     </a:lnR>
                     <a:lnT w="9525" cap="flat" cmpd="sng" algn="ctr">
                       <a:solidFill>
-                        <a:srgbClr val="F0D1D6"/>
+                        <a:srgbClr val="F6D5DA"/>
                       </a:solidFill>
                       <a:prstDash val="solid"/>
                     </a:lnT>
                     <a:lnB w="9525" cap="flat" cmpd="sng" algn="ctr">
                       <a:solidFill>
-                        <a:srgbClr val="F0D1D6"/>
+                        <a:srgbClr val="F6D5DA"/>
                       </a:solidFill>
                       <a:prstDash val="solid"/>
                     </a:lnB>
                     <a:solidFill>
-                      <a:srgbClr val="F9F0F2"/>
+                      <a:srgbClr val="FBECEF"/>
                     </a:solidFill>
                   </a:tcPr>
                 </a:tc>
@@ -8037,7 +8324,7 @@
                       <a:r>
                         <a:rPr sz="1400" b="0">
                           <a:solidFill>
-                            <a:srgbClr val="2B2B2B"/>
+                            <a:srgbClr val="26231F"/>
                           </a:solidFill>
                         </a:rPr>
                         <a:t>□</a:t>
@@ -8047,30 +8334,30 @@
                   <a:tcPr anchor="ctr" marL="73152" marR="73152">
                     <a:lnL w="9525" cap="flat" cmpd="sng" algn="ctr">
                       <a:solidFill>
-                        <a:srgbClr val="F0D1D6"/>
+                        <a:srgbClr val="F6D5DA"/>
                       </a:solidFill>
                       <a:prstDash val="solid"/>
                     </a:lnL>
                     <a:lnR w="9525" cap="flat" cmpd="sng" algn="ctr">
                       <a:solidFill>
-                        <a:srgbClr val="F0D1D6"/>
+                        <a:srgbClr val="F6D5DA"/>
                       </a:solidFill>
                       <a:prstDash val="solid"/>
                     </a:lnR>
                     <a:lnT w="9525" cap="flat" cmpd="sng" algn="ctr">
                       <a:solidFill>
-                        <a:srgbClr val="F0D1D6"/>
+                        <a:srgbClr val="F6D5DA"/>
                       </a:solidFill>
                       <a:prstDash val="solid"/>
                     </a:lnT>
                     <a:lnB w="9525" cap="flat" cmpd="sng" algn="ctr">
                       <a:solidFill>
-                        <a:srgbClr val="F0D1D6"/>
+                        <a:srgbClr val="F6D5DA"/>
                       </a:solidFill>
                       <a:prstDash val="solid"/>
                     </a:lnB>
                     <a:solidFill>
-                      <a:srgbClr val="F9F0F2"/>
+                      <a:srgbClr val="FBECEF"/>
                     </a:solidFill>
                   </a:tcPr>
                 </a:tc>
@@ -8083,7 +8370,7 @@
                       <a:r>
                         <a:rPr sz="1400" b="0">
                           <a:solidFill>
-                            <a:srgbClr val="2B2B2B"/>
+                            <a:srgbClr val="26231F"/>
                           </a:solidFill>
                         </a:rPr>
                         <a:t>□</a:t>
@@ -8093,30 +8380,30 @@
                   <a:tcPr anchor="ctr" marL="73152" marR="73152">
                     <a:lnL w="9525" cap="flat" cmpd="sng" algn="ctr">
                       <a:solidFill>
-                        <a:srgbClr val="F0D1D6"/>
+                        <a:srgbClr val="F6D5DA"/>
                       </a:solidFill>
                       <a:prstDash val="solid"/>
                     </a:lnL>
                     <a:lnR w="9525" cap="flat" cmpd="sng" algn="ctr">
                       <a:solidFill>
-                        <a:srgbClr val="F0D1D6"/>
+                        <a:srgbClr val="F6D5DA"/>
                       </a:solidFill>
                       <a:prstDash val="solid"/>
                     </a:lnR>
                     <a:lnT w="9525" cap="flat" cmpd="sng" algn="ctr">
                       <a:solidFill>
-                        <a:srgbClr val="F0D1D6"/>
+                        <a:srgbClr val="F6D5DA"/>
                       </a:solidFill>
                       <a:prstDash val="solid"/>
                     </a:lnT>
                     <a:lnB w="9525" cap="flat" cmpd="sng" algn="ctr">
                       <a:solidFill>
-                        <a:srgbClr val="F0D1D6"/>
+                        <a:srgbClr val="F6D5DA"/>
                       </a:solidFill>
                       <a:prstDash val="solid"/>
                     </a:lnB>
                     <a:solidFill>
-                      <a:srgbClr val="F9F0F2"/>
+                      <a:srgbClr val="FBECEF"/>
                     </a:solidFill>
                   </a:tcPr>
                 </a:tc>
@@ -8159,14 +8446,14 @@
         </p:nvSpPr>
         <p:spPr>
           <a:xfrm>
-            <a:off x="-182880" y="6144768"/>
-            <a:ext cx="12557455" cy="731520"/>
-          </a:xfrm>
-          <a:prstGeom prst="wave">
+            <a:off x="0" y="6565392"/>
+            <a:ext cx="12191695" cy="292608"/>
+          </a:xfrm>
+          <a:prstGeom prst="rect">
             <a:avLst/>
           </a:prstGeom>
           <a:solidFill>
-            <a:srgbClr val="F0D1D6"/>
+            <a:srgbClr val="EBADB8"/>
           </a:solidFill>
           <a:ln>
             <a:noFill/>
@@ -8188,14 +8475,83 @@
         </p:nvSpPr>
         <p:spPr>
           <a:xfrm>
-            <a:off x="-182880" y="6400800"/>
-            <a:ext cx="12557455" cy="502920"/>
-          </a:xfrm>
-          <a:prstGeom prst="wave">
+            <a:off x="640080" y="566928"/>
+            <a:ext cx="64008" cy="868680"/>
+          </a:xfrm>
+          <a:prstGeom prst="roundRect">
+            <a:avLst>
+              <a:gd name="adj" fmla="val 50000"/>
+            </a:avLst>
+          </a:prstGeom>
+          <a:solidFill>
+            <a:srgbClr val="E198A4"/>
+          </a:solidFill>
+          <a:ln>
+            <a:noFill/>
+          </a:ln>
+        </p:spPr>
+        <p:txBody>
+          <a:bodyPr rtlCol="0" anchor="ctr"/>
+          <a:lstStyle/>
+          <a:p>
+            <a:pPr algn="ctr"/>
+          </a:p>
+        </p:txBody>
+      </p:sp>
+      <p:sp>
+        <p:nvSpPr>
+          <p:cNvPr id="5" name="상단 라벨"/>
+          <p:cNvSpPr txBox="1"/>
+          <p:nvPr/>
+        </p:nvSpPr>
+        <p:spPr>
+          <a:xfrm>
+            <a:off x="868680" y="274320"/>
+            <a:ext cx="5486400" cy="274320"/>
+          </a:xfrm>
+          <a:prstGeom prst="rect">
+            <a:avLst/>
+          </a:prstGeom>
+          <a:noFill/>
+        </p:spPr>
+        <p:txBody>
+          <a:bodyPr wrap="square" lIns="54864" rIns="54864" tIns="27432" bIns="27432" anchor="ctr">
+            <a:noAutofit/>
+          </a:bodyPr>
+          <a:lstStyle/>
+          <a:p>
+            <a:pPr algn="l">
+              <a:lnSpc>
+                <a:spcPct val="115000"/>
+              </a:lnSpc>
+            </a:pPr>
+            <a:r>
+              <a:rPr sz="900" b="1" i="0" spc="250">
+                <a:solidFill>
+                  <a:srgbClr val="8E8780"/>
+                </a:solidFill>
+              </a:rPr>
+              <a:t>INSURANCE CHECK</a:t>
+            </a:r>
+          </a:p>
+        </p:txBody>
+      </p:sp>
+      <p:sp>
+        <p:nvSpPr>
+          <p:cNvPr id="6" name="포인트"/>
+          <p:cNvSpPr/>
+          <p:nvPr/>
+        </p:nvSpPr>
+        <p:spPr>
+          <a:xfrm>
+            <a:off x="11167567" y="667512"/>
+            <a:ext cx="310896" cy="310896"/>
+          </a:xfrm>
+          <a:prstGeom prst="mathPlus">
             <a:avLst/>
           </a:prstGeom>
           <a:solidFill>
-            <a:srgbClr val="8D3443"/>
+            <a:srgbClr val="EBADB8"/>
           </a:solidFill>
           <a:ln>
             <a:noFill/>
@@ -8221,8 +8577,8 @@
         </p:nvSpPr>
         <p:spPr>
           <a:xfrm>
-            <a:off x="640080" y="457200"/>
-            <a:ext cx="9722815" cy="868680"/>
+            <a:off x="868680" y="566928"/>
+            <a:ext cx="9448495" cy="868680"/>
           </a:xfrm>
         </p:spPr>
         <p:txBody>
@@ -8239,7 +8595,7 @@
             <a:r>
               <a:rPr sz="3000" b="1" i="0">
                 <a:solidFill>
-                  <a:srgbClr val="431920"/>
+                  <a:srgbClr val="26231F"/>
                 </a:solidFill>
               </a:rPr>
               <a:t>월 보험료 한눈에</a:t>
@@ -8249,26 +8605,24 @@
       </p:sp>
       <p:sp>
         <p:nvSpPr>
-          <p:cNvPr id="5" name="카드 1"/>
+          <p:cNvPr id="7" name="카드 1"/>
           <p:cNvSpPr/>
           <p:nvPr/>
         </p:nvSpPr>
         <p:spPr>
           <a:xfrm>
-            <a:off x="640080" y="1554480"/>
+            <a:off x="640080" y="1783080"/>
             <a:ext cx="3484778" cy="2926080"/>
           </a:xfrm>
           <a:prstGeom prst="roundRect">
             <a:avLst>
-              <a:gd name="adj" fmla="val 8000"/>
+              <a:gd name="adj" fmla="val 7000"/>
             </a:avLst>
           </a:prstGeom>
-          <a:solidFill>
-            <a:srgbClr val="F9F0F2"/>
-          </a:solidFill>
+          <a:noFill/>
           <a:ln w="15875">
             <a:solidFill>
-              <a:srgbClr val="F0D1D6"/>
+              <a:srgbClr val="E198A4"/>
             </a:solidFill>
           </a:ln>
         </p:spPr>
@@ -8282,23 +8636,23 @@
       </p:sp>
       <p:sp>
         <p:nvSpPr>
-          <p:cNvPr id="6" name="번호 1"/>
+          <p:cNvPr id="8" name="번호 1"/>
           <p:cNvSpPr/>
           <p:nvPr/>
         </p:nvSpPr>
         <p:spPr>
           <a:xfrm>
-            <a:off x="822959" y="1737360"/>
+            <a:off x="822959" y="1965960"/>
             <a:ext cx="457200" cy="457200"/>
           </a:xfrm>
           <a:prstGeom prst="ellipse">
             <a:avLst/>
           </a:prstGeom>
-          <a:solidFill>
-            <a:srgbClr val="8D3443"/>
-          </a:solidFill>
-          <a:ln>
-            <a:noFill/>
+          <a:noFill/>
+          <a:ln w="19050">
+            <a:solidFill>
+              <a:srgbClr val="E198A4"/>
+            </a:solidFill>
           </a:ln>
         </p:spPr>
         <p:txBody>
@@ -8315,7 +8669,7 @@
             <a:r>
               <a:rPr sz="1600" b="1" i="0">
                 <a:solidFill>
-                  <a:srgbClr val="FFFFFF"/>
+                  <a:srgbClr val="49272D"/>
                 </a:solidFill>
               </a:rPr>
               <a:t>1</a:t>
@@ -8325,13 +8679,13 @@
       </p:sp>
       <p:sp>
         <p:nvSpPr>
-          <p:cNvPr id="7" name="TextBox 6"/>
+          <p:cNvPr id="9" name="TextBox 8"/>
           <p:cNvSpPr txBox="1"/>
           <p:nvPr/>
         </p:nvSpPr>
         <p:spPr>
           <a:xfrm>
-            <a:off x="777240" y="2331720"/>
+            <a:off x="777240" y="2560320"/>
             <a:ext cx="3210458" cy="640080"/>
           </a:xfrm>
           <a:prstGeom prst="rect">
@@ -8353,7 +8707,7 @@
             <a:r>
               <a:rPr sz="1700" b="1" i="0">
                 <a:solidFill>
-                  <a:srgbClr val="431920"/>
+                  <a:srgbClr val="49272D"/>
                 </a:solidFill>
               </a:rPr>
               <a:t>월 보험료 합계</a:t>
@@ -8363,13 +8717,13 @@
       </p:sp>
       <p:sp>
         <p:nvSpPr>
-          <p:cNvPr id="8" name="TextBox 7"/>
+          <p:cNvPr id="10" name="TextBox 9"/>
           <p:cNvSpPr txBox="1"/>
           <p:nvPr/>
         </p:nvSpPr>
         <p:spPr>
           <a:xfrm>
-            <a:off x="777240" y="3017520"/>
+            <a:off x="777240" y="3246120"/>
             <a:ext cx="3210458" cy="1325880"/>
           </a:xfrm>
           <a:prstGeom prst="rect">
@@ -8391,7 +8745,7 @@
             <a:r>
               <a:rPr sz="3000" b="0" i="0">
                 <a:solidFill>
-                  <a:srgbClr val="2B2B2B"/>
+                  <a:srgbClr val="26231F"/>
                 </a:solidFill>
               </a:rPr>
               <a:t>0원</a:t>
@@ -8401,26 +8755,24 @@
       </p:sp>
       <p:sp>
         <p:nvSpPr>
-          <p:cNvPr id="9" name="카드 2"/>
+          <p:cNvPr id="11" name="카드 2"/>
           <p:cNvSpPr/>
           <p:nvPr/>
         </p:nvSpPr>
         <p:spPr>
           <a:xfrm>
-            <a:off x="4353458" y="1554480"/>
+            <a:off x="4353458" y="1783080"/>
             <a:ext cx="3484778" cy="2926080"/>
           </a:xfrm>
           <a:prstGeom prst="roundRect">
             <a:avLst>
-              <a:gd name="adj" fmla="val 8000"/>
+              <a:gd name="adj" fmla="val 7000"/>
             </a:avLst>
           </a:prstGeom>
-          <a:solidFill>
-            <a:srgbClr val="F9F0F2"/>
-          </a:solidFill>
+          <a:noFill/>
           <a:ln w="15875">
             <a:solidFill>
-              <a:srgbClr val="F0D1D6"/>
+              <a:srgbClr val="E198A4"/>
             </a:solidFill>
           </a:ln>
         </p:spPr>
@@ -8434,23 +8786,23 @@
       </p:sp>
       <p:sp>
         <p:nvSpPr>
-          <p:cNvPr id="10" name="번호 2"/>
+          <p:cNvPr id="12" name="번호 2"/>
           <p:cNvSpPr/>
           <p:nvPr/>
         </p:nvSpPr>
         <p:spPr>
           <a:xfrm>
-            <a:off x="4536338" y="1737360"/>
+            <a:off x="4536338" y="1965960"/>
             <a:ext cx="457200" cy="457200"/>
           </a:xfrm>
           <a:prstGeom prst="ellipse">
             <a:avLst/>
           </a:prstGeom>
-          <a:solidFill>
-            <a:srgbClr val="8D3443"/>
-          </a:solidFill>
-          <a:ln>
-            <a:noFill/>
+          <a:noFill/>
+          <a:ln w="19050">
+            <a:solidFill>
+              <a:srgbClr val="E198A4"/>
+            </a:solidFill>
           </a:ln>
         </p:spPr>
         <p:txBody>
@@ -8467,7 +8819,7 @@
             <a:r>
               <a:rPr sz="1600" b="1" i="0">
                 <a:solidFill>
-                  <a:srgbClr val="FFFFFF"/>
+                  <a:srgbClr val="49272D"/>
                 </a:solidFill>
               </a:rPr>
               <a:t>2</a:t>
@@ -8477,13 +8829,13 @@
       </p:sp>
       <p:sp>
         <p:nvSpPr>
-          <p:cNvPr id="11" name="TextBox 10"/>
+          <p:cNvPr id="13" name="TextBox 12"/>
           <p:cNvSpPr txBox="1"/>
           <p:nvPr/>
         </p:nvSpPr>
         <p:spPr>
           <a:xfrm>
-            <a:off x="4490618" y="2331720"/>
+            <a:off x="4490618" y="2560320"/>
             <a:ext cx="3210458" cy="640080"/>
           </a:xfrm>
           <a:prstGeom prst="rect">
@@ -8505,7 +8857,7 @@
             <a:r>
               <a:rPr sz="1700" b="1" i="0">
                 <a:solidFill>
-                  <a:srgbClr val="431920"/>
+                  <a:srgbClr val="49272D"/>
                 </a:solidFill>
               </a:rPr>
               <a:t>연 보험료 합계</a:t>
@@ -8515,13 +8867,13 @@
       </p:sp>
       <p:sp>
         <p:nvSpPr>
-          <p:cNvPr id="12" name="TextBox 11"/>
+          <p:cNvPr id="14" name="TextBox 13"/>
           <p:cNvSpPr txBox="1"/>
           <p:nvPr/>
         </p:nvSpPr>
         <p:spPr>
           <a:xfrm>
-            <a:off x="4490618" y="3017520"/>
+            <a:off x="4490618" y="3246120"/>
             <a:ext cx="3210458" cy="1325880"/>
           </a:xfrm>
           <a:prstGeom prst="rect">
@@ -8543,7 +8895,7 @@
             <a:r>
               <a:rPr sz="3000" b="0" i="0">
                 <a:solidFill>
-                  <a:srgbClr val="2B2B2B"/>
+                  <a:srgbClr val="26231F"/>
                 </a:solidFill>
               </a:rPr>
               <a:t>0원</a:t>
@@ -8553,26 +8905,24 @@
       </p:sp>
       <p:sp>
         <p:nvSpPr>
-          <p:cNvPr id="13" name="카드 3"/>
+          <p:cNvPr id="15" name="카드 3"/>
           <p:cNvSpPr/>
           <p:nvPr/>
         </p:nvSpPr>
         <p:spPr>
           <a:xfrm>
-            <a:off x="8066836" y="1554480"/>
+            <a:off x="8066836" y="1783080"/>
             <a:ext cx="3484778" cy="2926080"/>
           </a:xfrm>
           <a:prstGeom prst="roundRect">
             <a:avLst>
-              <a:gd name="adj" fmla="val 8000"/>
+              <a:gd name="adj" fmla="val 7000"/>
             </a:avLst>
           </a:prstGeom>
-          <a:solidFill>
-            <a:srgbClr val="F9F0F2"/>
-          </a:solidFill>
+          <a:noFill/>
           <a:ln w="15875">
             <a:solidFill>
-              <a:srgbClr val="F0D1D6"/>
+              <a:srgbClr val="E198A4"/>
             </a:solidFill>
           </a:ln>
         </p:spPr>
@@ -8586,23 +8936,23 @@
       </p:sp>
       <p:sp>
         <p:nvSpPr>
-          <p:cNvPr id="14" name="번호 3"/>
+          <p:cNvPr id="16" name="번호 3"/>
           <p:cNvSpPr/>
           <p:nvPr/>
         </p:nvSpPr>
         <p:spPr>
           <a:xfrm>
-            <a:off x="8249716" y="1737360"/>
+            <a:off x="8249716" y="1965960"/>
             <a:ext cx="457200" cy="457200"/>
           </a:xfrm>
           <a:prstGeom prst="ellipse">
             <a:avLst/>
           </a:prstGeom>
-          <a:solidFill>
-            <a:srgbClr val="8D3443"/>
-          </a:solidFill>
-          <a:ln>
-            <a:noFill/>
+          <a:noFill/>
+          <a:ln w="19050">
+            <a:solidFill>
+              <a:srgbClr val="E198A4"/>
+            </a:solidFill>
           </a:ln>
         </p:spPr>
         <p:txBody>
@@ -8619,7 +8969,7 @@
             <a:r>
               <a:rPr sz="1600" b="1" i="0">
                 <a:solidFill>
-                  <a:srgbClr val="FFFFFF"/>
+                  <a:srgbClr val="49272D"/>
                 </a:solidFill>
               </a:rPr>
               <a:t>3</a:t>
@@ -8629,13 +8979,13 @@
       </p:sp>
       <p:sp>
         <p:nvSpPr>
-          <p:cNvPr id="15" name="TextBox 14"/>
+          <p:cNvPr id="17" name="TextBox 16"/>
           <p:cNvSpPr txBox="1"/>
           <p:nvPr/>
         </p:nvSpPr>
         <p:spPr>
           <a:xfrm>
-            <a:off x="8203996" y="2331720"/>
+            <a:off x="8203996" y="2560320"/>
             <a:ext cx="3210458" cy="640080"/>
           </a:xfrm>
           <a:prstGeom prst="rect">
@@ -8657,7 +9007,7 @@
             <a:r>
               <a:rPr sz="1700" b="1" i="0">
                 <a:solidFill>
-                  <a:srgbClr val="431920"/>
+                  <a:srgbClr val="49272D"/>
                 </a:solidFill>
               </a:rPr>
               <a:t>월 소득 대비</a:t>
@@ -8667,13 +9017,13 @@
       </p:sp>
       <p:sp>
         <p:nvSpPr>
-          <p:cNvPr id="16" name="TextBox 15"/>
+          <p:cNvPr id="18" name="TextBox 17"/>
           <p:cNvSpPr txBox="1"/>
           <p:nvPr/>
         </p:nvSpPr>
         <p:spPr>
           <a:xfrm>
-            <a:off x="8203996" y="3017520"/>
+            <a:off x="8203996" y="3246120"/>
             <a:ext cx="3210458" cy="1325880"/>
           </a:xfrm>
           <a:prstGeom prst="rect">
@@ -8695,7 +9045,7 @@
             <a:r>
               <a:rPr sz="3000" b="0" i="0">
                 <a:solidFill>
-                  <a:srgbClr val="2B2B2B"/>
+                  <a:srgbClr val="26231F"/>
                 </a:solidFill>
               </a:rPr>
               <a:t>0 %</a:t>
@@ -8705,13 +9055,13 @@
       </p:sp>
       <p:sp>
         <p:nvSpPr>
-          <p:cNvPr id="17" name="안내"/>
+          <p:cNvPr id="19" name="안내"/>
           <p:cNvSpPr txBox="1"/>
           <p:nvPr/>
         </p:nvSpPr>
         <p:spPr>
           <a:xfrm>
-            <a:off x="640080" y="4663440"/>
+            <a:off x="640080" y="4892040"/>
             <a:ext cx="10911535" cy="365760"/>
           </a:xfrm>
           <a:prstGeom prst="rect">
@@ -8775,14 +9125,14 @@
         </p:nvSpPr>
         <p:spPr>
           <a:xfrm>
-            <a:off x="-182880" y="6144768"/>
-            <a:ext cx="12557455" cy="731520"/>
-          </a:xfrm>
-          <a:prstGeom prst="wave">
+            <a:off x="0" y="6565392"/>
+            <a:ext cx="12191695" cy="292608"/>
+          </a:xfrm>
+          <a:prstGeom prst="rect">
             <a:avLst/>
           </a:prstGeom>
           <a:solidFill>
-            <a:srgbClr val="F0D1D6"/>
+            <a:srgbClr val="EBADB8"/>
           </a:solidFill>
           <a:ln>
             <a:noFill/>
@@ -8804,14 +9154,83 @@
         </p:nvSpPr>
         <p:spPr>
           <a:xfrm>
-            <a:off x="-182880" y="6400800"/>
-            <a:ext cx="12557455" cy="502920"/>
-          </a:xfrm>
-          <a:prstGeom prst="wave">
+            <a:off x="640080" y="566928"/>
+            <a:ext cx="64008" cy="868680"/>
+          </a:xfrm>
+          <a:prstGeom prst="roundRect">
+            <a:avLst>
+              <a:gd name="adj" fmla="val 50000"/>
+            </a:avLst>
+          </a:prstGeom>
+          <a:solidFill>
+            <a:srgbClr val="E198A4"/>
+          </a:solidFill>
+          <a:ln>
+            <a:noFill/>
+          </a:ln>
+        </p:spPr>
+        <p:txBody>
+          <a:bodyPr rtlCol="0" anchor="ctr"/>
+          <a:lstStyle/>
+          <a:p>
+            <a:pPr algn="ctr"/>
+          </a:p>
+        </p:txBody>
+      </p:sp>
+      <p:sp>
+        <p:nvSpPr>
+          <p:cNvPr id="5" name="상단 라벨"/>
+          <p:cNvSpPr txBox="1"/>
+          <p:nvPr/>
+        </p:nvSpPr>
+        <p:spPr>
+          <a:xfrm>
+            <a:off x="868680" y="274320"/>
+            <a:ext cx="5486400" cy="274320"/>
+          </a:xfrm>
+          <a:prstGeom prst="rect">
+            <a:avLst/>
+          </a:prstGeom>
+          <a:noFill/>
+        </p:spPr>
+        <p:txBody>
+          <a:bodyPr wrap="square" lIns="54864" rIns="54864" tIns="27432" bIns="27432" anchor="ctr">
+            <a:noAutofit/>
+          </a:bodyPr>
+          <a:lstStyle/>
+          <a:p>
+            <a:pPr algn="l">
+              <a:lnSpc>
+                <a:spcPct val="115000"/>
+              </a:lnSpc>
+            </a:pPr>
+            <a:r>
+              <a:rPr sz="900" b="1" i="0" spc="250">
+                <a:solidFill>
+                  <a:srgbClr val="8E8780"/>
+                </a:solidFill>
+              </a:rPr>
+              <a:t>INSURANCE CHECK</a:t>
+            </a:r>
+          </a:p>
+        </p:txBody>
+      </p:sp>
+      <p:sp>
+        <p:nvSpPr>
+          <p:cNvPr id="6" name="포인트"/>
+          <p:cNvSpPr/>
+          <p:nvPr/>
+        </p:nvSpPr>
+        <p:spPr>
+          <a:xfrm>
+            <a:off x="11167567" y="667512"/>
+            <a:ext cx="310896" cy="310896"/>
+          </a:xfrm>
+          <a:prstGeom prst="mathPlus">
             <a:avLst/>
           </a:prstGeom>
           <a:solidFill>
-            <a:srgbClr val="8D3443"/>
+            <a:srgbClr val="EBADB8"/>
           </a:solidFill>
           <a:ln>
             <a:noFill/>
@@ -8837,8 +9256,8 @@
         </p:nvSpPr>
         <p:spPr>
           <a:xfrm>
-            <a:off x="640080" y="457200"/>
-            <a:ext cx="9722815" cy="868680"/>
+            <a:off x="868680" y="566928"/>
+            <a:ext cx="9448495" cy="868680"/>
           </a:xfrm>
         </p:spPr>
         <p:txBody>
@@ -8855,7 +9274,7 @@
             <a:r>
               <a:rPr sz="3000" b="1" i="0">
                 <a:solidFill>
-                  <a:srgbClr val="431920"/>
+                  <a:srgbClr val="26231F"/>
                 </a:solidFill>
               </a:rPr>
               <a:t>점검 메모와 다음 할 일</a:t>
@@ -8865,26 +9284,24 @@
       </p:sp>
       <p:sp>
         <p:nvSpPr>
-          <p:cNvPr id="5" name="카드 1"/>
+          <p:cNvPr id="7" name="카드 1"/>
           <p:cNvSpPr/>
           <p:nvPr/>
         </p:nvSpPr>
         <p:spPr>
           <a:xfrm>
-            <a:off x="640080" y="1554480"/>
+            <a:off x="640080" y="1783080"/>
             <a:ext cx="3484778" cy="3749039"/>
           </a:xfrm>
           <a:prstGeom prst="roundRect">
             <a:avLst>
-              <a:gd name="adj" fmla="val 8000"/>
+              <a:gd name="adj" fmla="val 7000"/>
             </a:avLst>
           </a:prstGeom>
-          <a:solidFill>
-            <a:srgbClr val="F9F0F2"/>
-          </a:solidFill>
+          <a:noFill/>
           <a:ln w="15875">
             <a:solidFill>
-              <a:srgbClr val="F0D1D6"/>
+              <a:srgbClr val="E198A4"/>
             </a:solidFill>
           </a:ln>
         </p:spPr>
@@ -8898,23 +9315,23 @@
       </p:sp>
       <p:sp>
         <p:nvSpPr>
-          <p:cNvPr id="6" name="번호 1"/>
+          <p:cNvPr id="8" name="번호 1"/>
           <p:cNvSpPr/>
           <p:nvPr/>
         </p:nvSpPr>
         <p:spPr>
           <a:xfrm>
-            <a:off x="822959" y="1737360"/>
+            <a:off x="822959" y="1965960"/>
             <a:ext cx="457200" cy="457200"/>
           </a:xfrm>
           <a:prstGeom prst="ellipse">
             <a:avLst/>
           </a:prstGeom>
-          <a:solidFill>
-            <a:srgbClr val="8D3443"/>
-          </a:solidFill>
-          <a:ln>
-            <a:noFill/>
+          <a:noFill/>
+          <a:ln w="19050">
+            <a:solidFill>
+              <a:srgbClr val="E198A4"/>
+            </a:solidFill>
           </a:ln>
         </p:spPr>
         <p:txBody>
@@ -8931,7 +9348,7 @@
             <a:r>
               <a:rPr sz="1600" b="1" i="0">
                 <a:solidFill>
-                  <a:srgbClr val="FFFFFF"/>
+                  <a:srgbClr val="49272D"/>
                 </a:solidFill>
               </a:rPr>
               <a:t>1</a:t>
@@ -8941,13 +9358,13 @@
       </p:sp>
       <p:sp>
         <p:nvSpPr>
-          <p:cNvPr id="7" name="TextBox 6"/>
+          <p:cNvPr id="9" name="TextBox 8"/>
           <p:cNvSpPr txBox="1"/>
           <p:nvPr/>
         </p:nvSpPr>
         <p:spPr>
           <a:xfrm>
-            <a:off x="777240" y="2331720"/>
+            <a:off x="777240" y="2560320"/>
             <a:ext cx="3210458" cy="640080"/>
           </a:xfrm>
           <a:prstGeom prst="rect">
@@ -8969,7 +9386,7 @@
             <a:r>
               <a:rPr sz="1800" b="1" i="0">
                 <a:solidFill>
-                  <a:srgbClr val="431920"/>
+                  <a:srgbClr val="49272D"/>
                 </a:solidFill>
               </a:rPr>
               <a:t>확인할 것</a:t>
@@ -8979,13 +9396,13 @@
       </p:sp>
       <p:sp>
         <p:nvSpPr>
-          <p:cNvPr id="8" name="TextBox 7"/>
+          <p:cNvPr id="10" name="TextBox 9"/>
           <p:cNvSpPr txBox="1"/>
           <p:nvPr/>
         </p:nvSpPr>
         <p:spPr>
           <a:xfrm>
-            <a:off x="777240" y="3017520"/>
+            <a:off x="777240" y="3246120"/>
             <a:ext cx="3210458" cy="2148839"/>
           </a:xfrm>
           <a:prstGeom prst="rect">
@@ -9007,7 +9424,7 @@
             <a:r>
               <a:rPr sz="1500" b="0" i="0">
                 <a:solidFill>
-                  <a:srgbClr val="2B2B2B"/>
+                  <a:srgbClr val="26231F"/>
                 </a:solidFill>
               </a:rPr>
               <a:t>내용을 입력하세요</a:t>
@@ -9017,26 +9434,24 @@
       </p:sp>
       <p:sp>
         <p:nvSpPr>
-          <p:cNvPr id="9" name="카드 2"/>
+          <p:cNvPr id="11" name="카드 2"/>
           <p:cNvSpPr/>
           <p:nvPr/>
         </p:nvSpPr>
         <p:spPr>
           <a:xfrm>
-            <a:off x="4353458" y="1554480"/>
+            <a:off x="4353458" y="1783080"/>
             <a:ext cx="3484778" cy="3749039"/>
           </a:xfrm>
           <a:prstGeom prst="roundRect">
             <a:avLst>
-              <a:gd name="adj" fmla="val 8000"/>
+              <a:gd name="adj" fmla="val 7000"/>
             </a:avLst>
           </a:prstGeom>
-          <a:solidFill>
-            <a:srgbClr val="F9F0F2"/>
-          </a:solidFill>
+          <a:noFill/>
           <a:ln w="15875">
             <a:solidFill>
-              <a:srgbClr val="F0D1D6"/>
+              <a:srgbClr val="E198A4"/>
             </a:solidFill>
           </a:ln>
         </p:spPr>
@@ -9050,23 +9465,23 @@
       </p:sp>
       <p:sp>
         <p:nvSpPr>
-          <p:cNvPr id="10" name="번호 2"/>
+          <p:cNvPr id="12" name="번호 2"/>
           <p:cNvSpPr/>
           <p:nvPr/>
         </p:nvSpPr>
         <p:spPr>
           <a:xfrm>
-            <a:off x="4536338" y="1737360"/>
+            <a:off x="4536338" y="1965960"/>
             <a:ext cx="457200" cy="457200"/>
           </a:xfrm>
           <a:prstGeom prst="ellipse">
             <a:avLst/>
           </a:prstGeom>
-          <a:solidFill>
-            <a:srgbClr val="8D3443"/>
-          </a:solidFill>
-          <a:ln>
-            <a:noFill/>
+          <a:noFill/>
+          <a:ln w="19050">
+            <a:solidFill>
+              <a:srgbClr val="E198A4"/>
+            </a:solidFill>
           </a:ln>
         </p:spPr>
         <p:txBody>
@@ -9083,7 +9498,7 @@
             <a:r>
               <a:rPr sz="1600" b="1" i="0">
                 <a:solidFill>
-                  <a:srgbClr val="FFFFFF"/>
+                  <a:srgbClr val="49272D"/>
                 </a:solidFill>
               </a:rPr>
               <a:t>2</a:t>
@@ -9093,13 +9508,13 @@
       </p:sp>
       <p:sp>
         <p:nvSpPr>
-          <p:cNvPr id="11" name="TextBox 10"/>
+          <p:cNvPr id="13" name="TextBox 12"/>
           <p:cNvSpPr txBox="1"/>
           <p:nvPr/>
         </p:nvSpPr>
         <p:spPr>
           <a:xfrm>
-            <a:off x="4490618" y="2331720"/>
+            <a:off x="4490618" y="2560320"/>
             <a:ext cx="3210458" cy="640080"/>
           </a:xfrm>
           <a:prstGeom prst="rect">
@@ -9121,7 +9536,7 @@
             <a:r>
               <a:rPr sz="1800" b="1" i="0">
                 <a:solidFill>
-                  <a:srgbClr val="431920"/>
+                  <a:srgbClr val="49272D"/>
                 </a:solidFill>
               </a:rPr>
               <a:t>문의할 것</a:t>
@@ -9131,13 +9546,13 @@
       </p:sp>
       <p:sp>
         <p:nvSpPr>
-          <p:cNvPr id="12" name="TextBox 11"/>
+          <p:cNvPr id="14" name="TextBox 13"/>
           <p:cNvSpPr txBox="1"/>
           <p:nvPr/>
         </p:nvSpPr>
         <p:spPr>
           <a:xfrm>
-            <a:off x="4490618" y="3017520"/>
+            <a:off x="4490618" y="3246120"/>
             <a:ext cx="3210458" cy="2148839"/>
           </a:xfrm>
           <a:prstGeom prst="rect">
@@ -9159,7 +9574,7 @@
             <a:r>
               <a:rPr sz="1500" b="0" i="0">
                 <a:solidFill>
-                  <a:srgbClr val="2B2B2B"/>
+                  <a:srgbClr val="26231F"/>
                 </a:solidFill>
               </a:rPr>
               <a:t>내용을 입력하세요</a:t>
@@ -9169,26 +9584,24 @@
       </p:sp>
       <p:sp>
         <p:nvSpPr>
-          <p:cNvPr id="13" name="카드 3"/>
+          <p:cNvPr id="15" name="카드 3"/>
           <p:cNvSpPr/>
           <p:nvPr/>
         </p:nvSpPr>
         <p:spPr>
           <a:xfrm>
-            <a:off x="8066836" y="1554480"/>
+            <a:off x="8066836" y="1783080"/>
             <a:ext cx="3484778" cy="3749039"/>
           </a:xfrm>
           <a:prstGeom prst="roundRect">
             <a:avLst>
-              <a:gd name="adj" fmla="val 8000"/>
+              <a:gd name="adj" fmla="val 7000"/>
             </a:avLst>
           </a:prstGeom>
-          <a:solidFill>
-            <a:srgbClr val="F9F0F2"/>
-          </a:solidFill>
+          <a:noFill/>
           <a:ln w="15875">
             <a:solidFill>
-              <a:srgbClr val="F0D1D6"/>
+              <a:srgbClr val="E198A4"/>
             </a:solidFill>
           </a:ln>
         </p:spPr>
@@ -9202,23 +9615,23 @@
       </p:sp>
       <p:sp>
         <p:nvSpPr>
-          <p:cNvPr id="14" name="번호 3"/>
+          <p:cNvPr id="16" name="번호 3"/>
           <p:cNvSpPr/>
           <p:nvPr/>
         </p:nvSpPr>
         <p:spPr>
           <a:xfrm>
-            <a:off x="8249716" y="1737360"/>
+            <a:off x="8249716" y="1965960"/>
             <a:ext cx="457200" cy="457200"/>
           </a:xfrm>
           <a:prstGeom prst="ellipse">
             <a:avLst/>
           </a:prstGeom>
-          <a:solidFill>
-            <a:srgbClr val="8D3443"/>
-          </a:solidFill>
-          <a:ln>
-            <a:noFill/>
+          <a:noFill/>
+          <a:ln w="19050">
+            <a:solidFill>
+              <a:srgbClr val="E198A4"/>
+            </a:solidFill>
           </a:ln>
         </p:spPr>
         <p:txBody>
@@ -9235,7 +9648,7 @@
             <a:r>
               <a:rPr sz="1600" b="1" i="0">
                 <a:solidFill>
-                  <a:srgbClr val="FFFFFF"/>
+                  <a:srgbClr val="49272D"/>
                 </a:solidFill>
               </a:rPr>
               <a:t>3</a:t>
@@ -9245,13 +9658,13 @@
       </p:sp>
       <p:sp>
         <p:nvSpPr>
-          <p:cNvPr id="15" name="TextBox 14"/>
+          <p:cNvPr id="17" name="TextBox 16"/>
           <p:cNvSpPr txBox="1"/>
           <p:nvPr/>
         </p:nvSpPr>
         <p:spPr>
           <a:xfrm>
-            <a:off x="8203996" y="2331720"/>
+            <a:off x="8203996" y="2560320"/>
             <a:ext cx="3210458" cy="640080"/>
           </a:xfrm>
           <a:prstGeom prst="rect">
@@ -9273,7 +9686,7 @@
             <a:r>
               <a:rPr sz="1800" b="1" i="0">
                 <a:solidFill>
-                  <a:srgbClr val="431920"/>
+                  <a:srgbClr val="49272D"/>
                 </a:solidFill>
               </a:rPr>
               <a:t>정리할 날짜</a:t>
@@ -9283,13 +9696,13 @@
       </p:sp>
       <p:sp>
         <p:nvSpPr>
-          <p:cNvPr id="16" name="TextBox 15"/>
+          <p:cNvPr id="18" name="TextBox 17"/>
           <p:cNvSpPr txBox="1"/>
           <p:nvPr/>
         </p:nvSpPr>
         <p:spPr>
           <a:xfrm>
-            <a:off x="8203996" y="3017520"/>
+            <a:off x="8203996" y="3246120"/>
             <a:ext cx="3210458" cy="2148839"/>
           </a:xfrm>
           <a:prstGeom prst="rect">
@@ -9311,7 +9724,7 @@
             <a:r>
               <a:rPr sz="1500" b="0" i="0">
                 <a:solidFill>
-                  <a:srgbClr val="2B2B2B"/>
+                  <a:srgbClr val="26231F"/>
                 </a:solidFill>
               </a:rPr>
               <a:t>내용을 입력하세요</a:t>
@@ -9321,13 +9734,13 @@
       </p:sp>
       <p:sp>
         <p:nvSpPr>
-          <p:cNvPr id="17" name="안내 문구"/>
+          <p:cNvPr id="19" name="안내 문구"/>
           <p:cNvSpPr txBox="1"/>
           <p:nvPr/>
         </p:nvSpPr>
         <p:spPr>
           <a:xfrm>
-            <a:off x="640080" y="5394960"/>
+            <a:off x="640080" y="5623560"/>
             <a:ext cx="10911535" cy="548640"/>
           </a:xfrm>
           <a:prstGeom prst="rect">
@@ -9376,34 +9789,34 @@
         <a:sysClr val="window" lastClr="FFFFFF"/>
       </a:lt1>
       <a:dk2>
-        <a:srgbClr val="431920"/>
+        <a:srgbClr val="49272D"/>
       </a:dk2>
       <a:lt2>
-        <a:srgbClr val="F9F0F2"/>
+        <a:srgbClr val="FBECEF"/>
       </a:lt2>
       <a:accent1>
-        <a:srgbClr val="8D3443"/>
+        <a:srgbClr val="E198A4"/>
       </a:accent1>
       <a:accent2>
-        <a:srgbClr val="3B9158"/>
+        <a:srgbClr val="EAC7B8"/>
       </a:accent2>
       <a:accent3>
-        <a:srgbClr val="431920"/>
+        <a:srgbClr val="49272D"/>
       </a:accent3>
       <a:accent4>
-        <a:srgbClr val="F0D1D6"/>
+        <a:srgbClr val="F6D5DA"/>
       </a:accent4>
       <a:accent5>
-        <a:srgbClr val="64624E"/>
+        <a:srgbClr val="E6B0AE"/>
       </a:accent5>
       <a:accent6>
-        <a:srgbClr val="8E7579"/>
+        <a:srgbClr val="927D81"/>
       </a:accent6>
       <a:hlink>
-        <a:srgbClr val="8D3443"/>
+        <a:srgbClr val="E198A4"/>
       </a:hlink>
       <a:folHlink>
-        <a:srgbClr val="431920"/>
+        <a:srgbClr val="49272D"/>
       </a:folHlink>
     </a:clrScheme>
     <a:fontScheme name="Office">
